--- a/Основы Российской Государственности/Кочкин Виталий Васильевич.pptx
+++ b/Основы Российской Государственности/Кочкин Виталий Васильевич.pptx
@@ -8,6 +8,8 @@
     <p:sldId id="256" r:id="rId3"/>
     <p:sldId id="257" r:id="rId4"/>
     <p:sldId id="258" r:id="rId5"/>
+    <p:sldId id="259" r:id="rId6"/>
+    <p:sldId id="260" r:id="rId7"/>
   </p:sldIdLst>
   <p:sldSz cx="10080625" cy="5670550"/>
   <p:notesSz cx="7559675" cy="10691813"/>
@@ -15,7 +17,7 @@
 </file>
 
 <file path=ppt/slideLayouts/slideLayout1.xml><?xml version="1.0" encoding="utf-8"?>
-<p:sldLayout xmlns:a="http://schemas.openxmlformats.org/drawingml/2006/main" xmlns:p="http://schemas.openxmlformats.org/presentationml/2006/main" xmlns:r="http://schemas.openxmlformats.org/officeDocument/2006/relationships" xmlns:p14="http://schemas.microsoft.com/office/powerpoint/2010/main" xmlns:p15="http://schemas.microsoft.com/office/powerpoint/2012/main" xmlns:mc="http://schemas.openxmlformats.org/markup-compatibility/2006" type="mediaAndTx" preserve="1">
+<p:sldLayout xmlns:a="http://schemas.openxmlformats.org/drawingml/2006/main" xmlns:p="http://schemas.openxmlformats.org/presentationml/2006/main" xmlns:r="http://schemas.openxmlformats.org/officeDocument/2006/relationships" xmlns:p14="http://schemas.microsoft.com/office/powerpoint/2010/main" xmlns:p15="http://schemas.microsoft.com/office/powerpoint/2012/main" xmlns:mc="http://schemas.openxmlformats.org/markup-compatibility/2006" type="blank" preserve="1">
   <p:cSld name="Vivid">
     <p:spTree>
       <p:nvGrpSpPr>
@@ -40,7 +42,7 @@
         <p:spPr>
           <a:xfrm>
             <a:off x="0" y="3780000"/>
-            <a:ext cx="10080000" cy="1890000"/>
+            <a:ext cx="10079640" cy="1889640"/>
           </a:xfrm>
           <a:prstGeom prst="rect">
             <a:avLst/>
@@ -57,7 +59,7 @@
             <a:noFill/>
           </a:ln>
           <a:effectLst>
-            <a:outerShdw dist="25200" dir="16200000" blurRad="0" rotWithShape="0">
+            <a:outerShdw blurRad="0" dir="16200000" dist="25200" rotWithShape="0">
               <a:srgbClr val="f49100"/>
             </a:outerShdw>
           </a:effectLst>
@@ -73,6 +75,11 @@
             <a:noAutofit/>
           </a:bodyPr>
           <a:p>
+            <a:pPr>
+              <a:lnSpc>
+                <a:spcPct val="100000"/>
+              </a:lnSpc>
+            </a:pPr>
             <a:endParaRPr b="0" lang="ru-RU" sz="2200" strike="noStrike" u="none">
               <a:solidFill>
                 <a:srgbClr val="ffffff"/>
@@ -80,6 +87,7 @@
               <a:effectLst/>
               <a:uFillTx/>
               <a:latin typeface="Noto Sans"/>
+              <a:ea typeface="DejaVu Sans"/>
             </a:endParaRPr>
           </a:p>
         </p:txBody>
@@ -97,7 +105,7 @@
         <p:spPr>
           <a:xfrm>
             <a:off x="504000" y="5130000"/>
-            <a:ext cx="2340000" cy="450000"/>
+            <a:ext cx="2339640" cy="242640"/>
           </a:xfrm>
           <a:prstGeom prst="rect">
             <a:avLst/>
@@ -113,7 +121,13 @@
           </a:bodyPr>
           <a:lstStyle>
             <a:lvl1pPr indent="0">
+              <a:lnSpc>
+                <a:spcPct val="100000"/>
+              </a:lnSpc>
               <a:buNone/>
+              <a:tabLst>
+                <a:tab algn="l" pos="0"/>
+              </a:tabLst>
               <a:defRPr b="0" lang="ru-RU" sz="1400" strike="noStrike" u="none">
                 <a:solidFill>
                   <a:srgbClr val="dbf5f9"/>
@@ -126,7 +140,13 @@
           </a:lstStyle>
           <a:p>
             <a:pPr indent="0">
+              <a:lnSpc>
+                <a:spcPct val="100000"/>
+              </a:lnSpc>
               <a:buNone/>
+              <a:tabLst>
+                <a:tab algn="l" pos="0"/>
+              </a:tabLst>
             </a:pPr>
             <a:r>
               <a:rPr b="0" lang="ru-RU" sz="1400" strike="noStrike" u="none">
@@ -137,15 +157,15 @@
                 <a:uFillTx/>
                 <a:latin typeface="Noto Sans"/>
               </a:rPr>
-              <a:t> </a:t>
+              <a:t>&lt;дата/время&gt;</a:t>
             </a:r>
             <a:endParaRPr b="0" lang="ru-RU" sz="1400" strike="noStrike" u="none">
               <a:solidFill>
-                <a:srgbClr val="dbf5f9"/>
-              </a:solidFill>
-              <a:effectLst/>
-              <a:uFillTx/>
-              <a:latin typeface="Noto Sans"/>
+                <a:srgbClr val="000000"/>
+              </a:solidFill>
+              <a:effectLst/>
+              <a:uFillTx/>
+              <a:latin typeface="Times New Roman"/>
             </a:endParaRPr>
           </a:p>
         </p:txBody>
@@ -163,7 +183,7 @@
         <p:spPr>
           <a:xfrm>
             <a:off x="3420000" y="5130000"/>
-            <a:ext cx="3240000" cy="450000"/>
+            <a:ext cx="3239640" cy="242640"/>
           </a:xfrm>
           <a:prstGeom prst="rect">
             <a:avLst/>
@@ -179,7 +199,13 @@
           </a:bodyPr>
           <a:lstStyle>
             <a:lvl1pPr indent="0" algn="ctr">
+              <a:lnSpc>
+                <a:spcPct val="100000"/>
+              </a:lnSpc>
               <a:buNone/>
+              <a:tabLst>
+                <a:tab algn="l" pos="0"/>
+              </a:tabLst>
               <a:defRPr b="0" lang="ru-RU" sz="1400" strike="noStrike" u="none">
                 <a:solidFill>
                   <a:srgbClr val="dbf5f9"/>
@@ -192,7 +218,13 @@
           </a:lstStyle>
           <a:p>
             <a:pPr indent="0" algn="ctr">
+              <a:lnSpc>
+                <a:spcPct val="100000"/>
+              </a:lnSpc>
               <a:buNone/>
+              <a:tabLst>
+                <a:tab algn="l" pos="0"/>
+              </a:tabLst>
             </a:pPr>
             <a:r>
               <a:rPr b="0" lang="ru-RU" sz="1400" strike="noStrike" u="none">
@@ -207,11 +239,11 @@
             </a:r>
             <a:endParaRPr b="0" lang="ru-RU" sz="1400" strike="noStrike" u="none">
               <a:solidFill>
-                <a:srgbClr val="dbf5f9"/>
-              </a:solidFill>
-              <a:effectLst/>
-              <a:uFillTx/>
-              <a:latin typeface="Noto Sans"/>
+                <a:srgbClr val="000000"/>
+              </a:solidFill>
+              <a:effectLst/>
+              <a:uFillTx/>
+              <a:latin typeface="Times New Roman"/>
             </a:endParaRPr>
           </a:p>
         </p:txBody>
@@ -229,7 +261,7 @@
         <p:spPr>
           <a:xfrm>
             <a:off x="7236000" y="5130000"/>
-            <a:ext cx="2340000" cy="450000"/>
+            <a:ext cx="2339640" cy="213840"/>
           </a:xfrm>
           <a:prstGeom prst="rect">
             <a:avLst/>
@@ -245,7 +277,13 @@
           </a:bodyPr>
           <a:lstStyle>
             <a:lvl1pPr indent="0" algn="r">
+              <a:lnSpc>
+                <a:spcPct val="100000"/>
+              </a:lnSpc>
               <a:buNone/>
+              <a:tabLst>
+                <a:tab algn="l" pos="0"/>
+              </a:tabLst>
               <a:defRPr b="0" lang="ru-RU" sz="1400" strike="noStrike" u="none">
                 <a:solidFill>
                   <a:srgbClr val="dbf5f9"/>
@@ -258,9 +296,15 @@
           </a:lstStyle>
           <a:p>
             <a:pPr indent="0" algn="r">
+              <a:lnSpc>
+                <a:spcPct val="100000"/>
+              </a:lnSpc>
               <a:buNone/>
-            </a:pPr>
-            <a:fld id="{69A30713-0289-4F2B-B931-E72A0B414EA0}" type="slidenum">
+              <a:tabLst>
+                <a:tab algn="l" pos="0"/>
+              </a:tabLst>
+            </a:pPr>
+            <a:fld id="{0AFC8106-B29E-4A59-AE75-1A55668FF8E5}" type="slidenum">
               <a:rPr b="0" lang="ru-RU" sz="1400" strike="noStrike" u="none">
                 <a:solidFill>
                   <a:srgbClr val="dbf5f9"/>
@@ -273,11 +317,11 @@
             </a:fld>
             <a:endParaRPr b="0" lang="ru-RU" sz="1400" strike="noStrike" u="none">
               <a:solidFill>
-                <a:srgbClr val="dbf5f9"/>
-              </a:solidFill>
-              <a:effectLst/>
-              <a:uFillTx/>
-              <a:latin typeface="Noto Sans"/>
+                <a:srgbClr val="000000"/>
+              </a:solidFill>
+              <a:effectLst/>
+              <a:uFillTx/>
+              <a:latin typeface="Times New Roman"/>
             </a:endParaRPr>
           </a:p>
         </p:txBody>
@@ -295,7 +339,7 @@
         <p:spPr>
           <a:xfrm>
             <a:off x="504000" y="270000"/>
-            <a:ext cx="9072000" cy="3240000"/>
+            <a:ext cx="9071640" cy="3239640"/>
           </a:xfrm>
           <a:prstGeom prst="rect">
             <a:avLst/>
@@ -311,7 +355,13 @@
           </a:bodyPr>
           <a:p>
             <a:pPr indent="0">
+              <a:lnSpc>
+                <a:spcPct val="100000"/>
+              </a:lnSpc>
               <a:buNone/>
+              <a:tabLst>
+                <a:tab algn="l" pos="0"/>
+              </a:tabLst>
             </a:pPr>
             <a:r>
               <a:rPr b="0" lang="ru-RU" sz="6000" strike="noStrike" u="none">
@@ -326,11 +376,11 @@
             </a:r>
             <a:endParaRPr b="0" lang="ru-RU" sz="6000" strike="noStrike" u="none">
               <a:solidFill>
-                <a:srgbClr val="04617b"/>
-              </a:solidFill>
-              <a:effectLst/>
-              <a:uFillTx/>
-              <a:latin typeface="Noto Sans"/>
+                <a:srgbClr val="000000"/>
+              </a:solidFill>
+              <a:effectLst/>
+              <a:uFillTx/>
+              <a:latin typeface="Arial"/>
             </a:endParaRPr>
           </a:p>
         </p:txBody>
@@ -348,7 +398,7 @@
         <p:spPr>
           <a:xfrm>
             <a:off x="504000" y="3870000"/>
-            <a:ext cx="9072000" cy="1170000"/>
+            <a:ext cx="9071640" cy="1169640"/>
           </a:xfrm>
           <a:prstGeom prst="rect">
             <a:avLst/>
@@ -360,10 +410,13 @@
         </p:spPr>
         <p:txBody>
           <a:bodyPr lIns="0" rIns="0" tIns="0" bIns="0" anchor="t">
-            <a:normAutofit fontScale="47500" lnSpcReduction="19999"/>
+            <a:normAutofit fontScale="55000" lnSpcReduction="19999"/>
           </a:bodyPr>
           <a:p>
             <a:pPr marL="432000" indent="-324000">
+              <a:lnSpc>
+                <a:spcPct val="100000"/>
+              </a:lnSpc>
               <a:spcAft>
                 <a:spcPts val="924"/>
               </a:spcAft>
@@ -387,15 +440,18 @@
             </a:r>
             <a:endParaRPr b="0" lang="ru-RU" sz="2100" strike="noStrike" u="none">
               <a:solidFill>
-                <a:srgbClr val="dbf5f9"/>
-              </a:solidFill>
-              <a:effectLst/>
-              <a:uFillTx/>
-              <a:latin typeface="Noto Sans"/>
+                <a:srgbClr val="000000"/>
+              </a:solidFill>
+              <a:effectLst/>
+              <a:uFillTx/>
+              <a:latin typeface="Arial"/>
             </a:endParaRPr>
           </a:p>
           <a:p>
             <a:pPr lvl="1" marL="864000" indent="-324000">
+              <a:lnSpc>
+                <a:spcPct val="100000"/>
+              </a:lnSpc>
               <a:spcAft>
                 <a:spcPts val="842"/>
               </a:spcAft>
@@ -419,15 +475,18 @@
             </a:r>
             <a:endParaRPr b="0" lang="ru-RU" sz="1650" strike="noStrike" u="none">
               <a:solidFill>
-                <a:srgbClr val="dbf5f9"/>
-              </a:solidFill>
-              <a:effectLst/>
-              <a:uFillTx/>
-              <a:latin typeface="Noto Sans"/>
+                <a:srgbClr val="000000"/>
+              </a:solidFill>
+              <a:effectLst/>
+              <a:uFillTx/>
+              <a:latin typeface="Arial"/>
             </a:endParaRPr>
           </a:p>
           <a:p>
             <a:pPr lvl="2" marL="1296000" indent="-288000">
+              <a:lnSpc>
+                <a:spcPct val="100000"/>
+              </a:lnSpc>
               <a:spcAft>
                 <a:spcPts val="635"/>
               </a:spcAft>
@@ -451,15 +510,18 @@
             </a:r>
             <a:endParaRPr b="0" lang="ru-RU" sz="1800" strike="noStrike" u="none">
               <a:solidFill>
-                <a:srgbClr val="dbf5f9"/>
-              </a:solidFill>
-              <a:effectLst/>
-              <a:uFillTx/>
-              <a:latin typeface="Noto Sans"/>
+                <a:srgbClr val="000000"/>
+              </a:solidFill>
+              <a:effectLst/>
+              <a:uFillTx/>
+              <a:latin typeface="Arial"/>
             </a:endParaRPr>
           </a:p>
           <a:p>
             <a:pPr lvl="3" marL="1728000" indent="-216000">
+              <a:lnSpc>
+                <a:spcPct val="100000"/>
+              </a:lnSpc>
               <a:spcAft>
                 <a:spcPts val="422"/>
               </a:spcAft>
@@ -483,15 +545,18 @@
             </a:r>
             <a:endParaRPr b="0" lang="ru-RU" sz="1500" strike="noStrike" u="none">
               <a:solidFill>
-                <a:srgbClr val="dbf5f9"/>
-              </a:solidFill>
-              <a:effectLst/>
-              <a:uFillTx/>
-              <a:latin typeface="Noto Sans"/>
+                <a:srgbClr val="000000"/>
+              </a:solidFill>
+              <a:effectLst/>
+              <a:uFillTx/>
+              <a:latin typeface="Arial"/>
             </a:endParaRPr>
           </a:p>
           <a:p>
             <a:pPr lvl="4" marL="2160000" indent="-216000">
+              <a:lnSpc>
+                <a:spcPct val="100000"/>
+              </a:lnSpc>
               <a:spcAft>
                 <a:spcPts val="210"/>
               </a:spcAft>
@@ -515,15 +580,18 @@
             </a:r>
             <a:endParaRPr b="0" lang="ru-RU" sz="1500" strike="noStrike" u="none">
               <a:solidFill>
-                <a:srgbClr val="dbf5f9"/>
-              </a:solidFill>
-              <a:effectLst/>
-              <a:uFillTx/>
-              <a:latin typeface="Noto Sans"/>
+                <a:srgbClr val="000000"/>
+              </a:solidFill>
+              <a:effectLst/>
+              <a:uFillTx/>
+              <a:latin typeface="Arial"/>
             </a:endParaRPr>
           </a:p>
           <a:p>
             <a:pPr lvl="5" marL="2592000" indent="-216000">
+              <a:lnSpc>
+                <a:spcPct val="100000"/>
+              </a:lnSpc>
               <a:spcAft>
                 <a:spcPts val="210"/>
               </a:spcAft>
@@ -547,15 +615,18 @@
             </a:r>
             <a:endParaRPr b="0" lang="ru-RU" sz="1500" strike="noStrike" u="none">
               <a:solidFill>
-                <a:srgbClr val="dbf5f9"/>
-              </a:solidFill>
-              <a:effectLst/>
-              <a:uFillTx/>
-              <a:latin typeface="Noto Sans"/>
+                <a:srgbClr val="000000"/>
+              </a:solidFill>
+              <a:effectLst/>
+              <a:uFillTx/>
+              <a:latin typeface="Arial"/>
             </a:endParaRPr>
           </a:p>
           <a:p>
             <a:pPr lvl="6" marL="3024000" indent="-216000">
+              <a:lnSpc>
+                <a:spcPct val="100000"/>
+              </a:lnSpc>
               <a:spcAft>
                 <a:spcPts val="210"/>
               </a:spcAft>
@@ -579,11 +650,11 @@
             </a:r>
             <a:endParaRPr b="0" lang="ru-RU" sz="1500" strike="noStrike" u="none">
               <a:solidFill>
-                <a:srgbClr val="dbf5f9"/>
-              </a:solidFill>
-              <a:effectLst/>
-              <a:uFillTx/>
-              <a:latin typeface="Noto Sans"/>
+                <a:srgbClr val="000000"/>
+              </a:solidFill>
+              <a:effectLst/>
+              <a:uFillTx/>
+              <a:latin typeface="Arial"/>
             </a:endParaRPr>
           </a:p>
         </p:txBody>
@@ -595,7 +666,7 @@
 
 <file path=ppt/slideLayouts/slideLayout2.xml><?xml version="1.0" encoding="utf-8"?>
 <p:sldLayout xmlns:a="http://schemas.openxmlformats.org/drawingml/2006/main" xmlns:p="http://schemas.openxmlformats.org/presentationml/2006/main" xmlns:r="http://schemas.openxmlformats.org/officeDocument/2006/relationships" xmlns:p14="http://schemas.microsoft.com/office/powerpoint/2010/main" xmlns:p15="http://schemas.microsoft.com/office/powerpoint/2012/main" xmlns:mc="http://schemas.openxmlformats.org/markup-compatibility/2006" type="title" preserve="1">
-  <p:cSld name="Vivid">
+  <p:cSld name="Обычный">
     <p:spTree>
       <p:nvGrpSpPr>
         <p:cNvPr id="1" name=""/>
@@ -612,14 +683,14 @@
       </p:grpSpPr>
       <p:sp>
         <p:nvSpPr>
-          <p:cNvPr id="2" name=""/>
+          <p:cNvPr id="8" name=""/>
           <p:cNvSpPr/>
           <p:nvPr/>
         </p:nvSpPr>
         <p:spPr>
           <a:xfrm>
             <a:off x="0" y="3780000"/>
-            <a:ext cx="10080000" cy="1890000"/>
+            <a:ext cx="10079640" cy="1889640"/>
           </a:xfrm>
           <a:prstGeom prst="rect">
             <a:avLst/>
@@ -636,7 +707,7 @@
             <a:noFill/>
           </a:ln>
           <a:effectLst>
-            <a:outerShdw dist="25200" dir="16200000" blurRad="0" rotWithShape="0">
+            <a:outerShdw blurRad="0" dir="16200000" dist="25200" rotWithShape="0">
               <a:srgbClr val="f49100"/>
             </a:outerShdw>
           </a:effectLst>
@@ -652,6 +723,11 @@
             <a:noAutofit/>
           </a:bodyPr>
           <a:p>
+            <a:pPr>
+              <a:lnSpc>
+                <a:spcPct val="100000"/>
+              </a:lnSpc>
+            </a:pPr>
             <a:endParaRPr b="0" lang="ru-RU" sz="2200" strike="noStrike" u="none">
               <a:solidFill>
                 <a:srgbClr val="ffffff"/>
@@ -659,13 +735,14 @@
               <a:effectLst/>
               <a:uFillTx/>
               <a:latin typeface="Noto Sans"/>
+              <a:ea typeface="DejaVu Sans"/>
             </a:endParaRPr>
           </a:p>
         </p:txBody>
       </p:sp>
       <p:sp>
         <p:nvSpPr>
-          <p:cNvPr id="8" name="PlaceHolder 1"/>
+          <p:cNvPr id="9" name="PlaceHolder 1"/>
           <p:cNvSpPr>
             <a:spLocks noGrp="1"/>
           </p:cNvSpPr>
@@ -676,7 +753,7 @@
         <p:spPr>
           <a:xfrm>
             <a:off x="504000" y="5130000"/>
-            <a:ext cx="2340000" cy="450000"/>
+            <a:ext cx="2339640" cy="242640"/>
           </a:xfrm>
           <a:prstGeom prst="rect">
             <a:avLst/>
@@ -692,7 +769,13 @@
           </a:bodyPr>
           <a:lstStyle>
             <a:lvl1pPr indent="0">
+              <a:lnSpc>
+                <a:spcPct val="100000"/>
+              </a:lnSpc>
               <a:buNone/>
+              <a:tabLst>
+                <a:tab algn="l" pos="0"/>
+              </a:tabLst>
               <a:defRPr b="0" lang="ru-RU" sz="1400" strike="noStrike" u="none">
                 <a:solidFill>
                   <a:srgbClr val="dbf5f9"/>
@@ -705,7 +788,13 @@
           </a:lstStyle>
           <a:p>
             <a:pPr indent="0">
+              <a:lnSpc>
+                <a:spcPct val="100000"/>
+              </a:lnSpc>
               <a:buNone/>
+              <a:tabLst>
+                <a:tab algn="l" pos="0"/>
+              </a:tabLst>
             </a:pPr>
             <a:r>
               <a:rPr b="0" lang="ru-RU" sz="1400" strike="noStrike" u="none">
@@ -716,22 +805,22 @@
                 <a:uFillTx/>
                 <a:latin typeface="Noto Sans"/>
               </a:rPr>
-              <a:t> </a:t>
+              <a:t>&lt;дата/время&gt;</a:t>
             </a:r>
             <a:endParaRPr b="0" lang="ru-RU" sz="1400" strike="noStrike" u="none">
               <a:solidFill>
-                <a:srgbClr val="dbf5f9"/>
-              </a:solidFill>
-              <a:effectLst/>
-              <a:uFillTx/>
-              <a:latin typeface="Noto Sans"/>
+                <a:srgbClr val="000000"/>
+              </a:solidFill>
+              <a:effectLst/>
+              <a:uFillTx/>
+              <a:latin typeface="Times New Roman"/>
             </a:endParaRPr>
           </a:p>
         </p:txBody>
       </p:sp>
       <p:sp>
         <p:nvSpPr>
-          <p:cNvPr id="9" name="PlaceHolder 2"/>
+          <p:cNvPr id="10" name="PlaceHolder 2"/>
           <p:cNvSpPr>
             <a:spLocks noGrp="1"/>
           </p:cNvSpPr>
@@ -742,7 +831,7 @@
         <p:spPr>
           <a:xfrm>
             <a:off x="3420000" y="5130000"/>
-            <a:ext cx="3240000" cy="450000"/>
+            <a:ext cx="3239640" cy="242640"/>
           </a:xfrm>
           <a:prstGeom prst="rect">
             <a:avLst/>
@@ -758,7 +847,13 @@
           </a:bodyPr>
           <a:lstStyle>
             <a:lvl1pPr indent="0" algn="ctr">
+              <a:lnSpc>
+                <a:spcPct val="100000"/>
+              </a:lnSpc>
               <a:buNone/>
+              <a:tabLst>
+                <a:tab algn="l" pos="0"/>
+              </a:tabLst>
               <a:defRPr b="0" lang="ru-RU" sz="1400" strike="noStrike" u="none">
                 <a:solidFill>
                   <a:srgbClr val="dbf5f9"/>
@@ -771,7 +866,13 @@
           </a:lstStyle>
           <a:p>
             <a:pPr indent="0" algn="ctr">
+              <a:lnSpc>
+                <a:spcPct val="100000"/>
+              </a:lnSpc>
               <a:buNone/>
+              <a:tabLst>
+                <a:tab algn="l" pos="0"/>
+              </a:tabLst>
             </a:pPr>
             <a:r>
               <a:rPr b="0" lang="ru-RU" sz="1400" strike="noStrike" u="none">
@@ -786,18 +887,18 @@
             </a:r>
             <a:endParaRPr b="0" lang="ru-RU" sz="1400" strike="noStrike" u="none">
               <a:solidFill>
-                <a:srgbClr val="dbf5f9"/>
-              </a:solidFill>
-              <a:effectLst/>
-              <a:uFillTx/>
-              <a:latin typeface="Noto Sans"/>
+                <a:srgbClr val="000000"/>
+              </a:solidFill>
+              <a:effectLst/>
+              <a:uFillTx/>
+              <a:latin typeface="Times New Roman"/>
             </a:endParaRPr>
           </a:p>
         </p:txBody>
       </p:sp>
       <p:sp>
         <p:nvSpPr>
-          <p:cNvPr id="10" name="PlaceHolder 3"/>
+          <p:cNvPr id="11" name="PlaceHolder 3"/>
           <p:cNvSpPr>
             <a:spLocks noGrp="1"/>
           </p:cNvSpPr>
@@ -808,7 +909,7 @@
         <p:spPr>
           <a:xfrm>
             <a:off x="7236000" y="5130000"/>
-            <a:ext cx="2340000" cy="450000"/>
+            <a:ext cx="2339640" cy="213840"/>
           </a:xfrm>
           <a:prstGeom prst="rect">
             <a:avLst/>
@@ -824,7 +925,13 @@
           </a:bodyPr>
           <a:lstStyle>
             <a:lvl1pPr indent="0" algn="r">
+              <a:lnSpc>
+                <a:spcPct val="100000"/>
+              </a:lnSpc>
               <a:buNone/>
+              <a:tabLst>
+                <a:tab algn="l" pos="0"/>
+              </a:tabLst>
               <a:defRPr b="0" lang="ru-RU" sz="1400" strike="noStrike" u="none">
                 <a:solidFill>
                   <a:srgbClr val="dbf5f9"/>
@@ -837,9 +944,15 @@
           </a:lstStyle>
           <a:p>
             <a:pPr indent="0" algn="r">
+              <a:lnSpc>
+                <a:spcPct val="100000"/>
+              </a:lnSpc>
               <a:buNone/>
-            </a:pPr>
-            <a:fld id="{F2140100-ED0F-4160-BA71-89970620EBA8}" type="slidenum">
+              <a:tabLst>
+                <a:tab algn="l" pos="0"/>
+              </a:tabLst>
+            </a:pPr>
+            <a:fld id="{394C4D69-51F4-4CE6-8FC6-7F2A3F165238}" type="slidenum">
               <a:rPr b="0" lang="ru-RU" sz="1400" strike="noStrike" u="none">
                 <a:solidFill>
                   <a:srgbClr val="dbf5f9"/>
@@ -852,18 +965,18 @@
             </a:fld>
             <a:endParaRPr b="0" lang="ru-RU" sz="1400" strike="noStrike" u="none">
               <a:solidFill>
-                <a:srgbClr val="dbf5f9"/>
-              </a:solidFill>
-              <a:effectLst/>
-              <a:uFillTx/>
-              <a:latin typeface="Noto Sans"/>
+                <a:srgbClr val="000000"/>
+              </a:solidFill>
+              <a:effectLst/>
+              <a:uFillTx/>
+              <a:latin typeface="Times New Roman"/>
             </a:endParaRPr>
           </a:p>
         </p:txBody>
       </p:sp>
       <p:sp>
         <p:nvSpPr>
-          <p:cNvPr id="11" name="PlaceHolder 4"/>
+          <p:cNvPr id="12" name="PlaceHolder 4"/>
           <p:cNvSpPr>
             <a:spLocks noGrp="1"/>
           </p:cNvSpPr>
@@ -874,7 +987,7 @@
         <p:spPr>
           <a:xfrm>
             <a:off x="504000" y="270000"/>
-            <a:ext cx="9072000" cy="3240000"/>
+            <a:ext cx="9071640" cy="3239640"/>
           </a:xfrm>
           <a:prstGeom prst="rect">
             <a:avLst/>
@@ -890,7 +1003,13 @@
           </a:bodyPr>
           <a:p>
             <a:pPr indent="0">
+              <a:lnSpc>
+                <a:spcPct val="100000"/>
+              </a:lnSpc>
               <a:buNone/>
+              <a:tabLst>
+                <a:tab algn="l" pos="0"/>
+              </a:tabLst>
             </a:pPr>
             <a:r>
               <a:rPr b="0" lang="ru-RU" sz="6000" strike="noStrike" u="none">
@@ -905,18 +1024,18 @@
             </a:r>
             <a:endParaRPr b="0" lang="ru-RU" sz="6000" strike="noStrike" u="none">
               <a:solidFill>
-                <a:srgbClr val="04617b"/>
-              </a:solidFill>
-              <a:effectLst/>
-              <a:uFillTx/>
-              <a:latin typeface="Noto Sans"/>
+                <a:srgbClr val="000000"/>
+              </a:solidFill>
+              <a:effectLst/>
+              <a:uFillTx/>
+              <a:latin typeface="Arial"/>
             </a:endParaRPr>
           </a:p>
         </p:txBody>
       </p:sp>
       <p:sp>
         <p:nvSpPr>
-          <p:cNvPr id="12" name="PlaceHolder 5"/>
+          <p:cNvPr id="13" name="PlaceHolder 5"/>
           <p:cNvSpPr>
             <a:spLocks noGrp="1"/>
           </p:cNvSpPr>
@@ -927,7 +1046,7 @@
         <p:spPr>
           <a:xfrm>
             <a:off x="504000" y="3870000"/>
-            <a:ext cx="9072000" cy="1170000"/>
+            <a:ext cx="9071640" cy="1169640"/>
           </a:xfrm>
           <a:prstGeom prst="rect">
             <a:avLst/>
@@ -939,10 +1058,13 @@
         </p:spPr>
         <p:txBody>
           <a:bodyPr lIns="0" rIns="0" tIns="0" bIns="0" anchor="t">
-            <a:normAutofit fontScale="47500" lnSpcReduction="19999"/>
+            <a:normAutofit fontScale="55000" lnSpcReduction="19999"/>
           </a:bodyPr>
           <a:p>
             <a:pPr marL="432000" indent="-324000">
+              <a:lnSpc>
+                <a:spcPct val="100000"/>
+              </a:lnSpc>
               <a:spcAft>
                 <a:spcPts val="924"/>
               </a:spcAft>
@@ -966,15 +1088,18 @@
             </a:r>
             <a:endParaRPr b="0" lang="ru-RU" sz="2100" strike="noStrike" u="none">
               <a:solidFill>
-                <a:srgbClr val="dbf5f9"/>
-              </a:solidFill>
-              <a:effectLst/>
-              <a:uFillTx/>
-              <a:latin typeface="Noto Sans"/>
+                <a:srgbClr val="000000"/>
+              </a:solidFill>
+              <a:effectLst/>
+              <a:uFillTx/>
+              <a:latin typeface="Arial"/>
             </a:endParaRPr>
           </a:p>
           <a:p>
             <a:pPr lvl="1" marL="864000" indent="-324000">
+              <a:lnSpc>
+                <a:spcPct val="100000"/>
+              </a:lnSpc>
               <a:spcAft>
                 <a:spcPts val="842"/>
               </a:spcAft>
@@ -998,15 +1123,18 @@
             </a:r>
             <a:endParaRPr b="0" lang="ru-RU" sz="1650" strike="noStrike" u="none">
               <a:solidFill>
-                <a:srgbClr val="dbf5f9"/>
-              </a:solidFill>
-              <a:effectLst/>
-              <a:uFillTx/>
-              <a:latin typeface="Noto Sans"/>
+                <a:srgbClr val="000000"/>
+              </a:solidFill>
+              <a:effectLst/>
+              <a:uFillTx/>
+              <a:latin typeface="Arial"/>
             </a:endParaRPr>
           </a:p>
           <a:p>
             <a:pPr lvl="2" marL="1296000" indent="-288000">
+              <a:lnSpc>
+                <a:spcPct val="100000"/>
+              </a:lnSpc>
               <a:spcAft>
                 <a:spcPts val="635"/>
               </a:spcAft>
@@ -1030,15 +1158,18 @@
             </a:r>
             <a:endParaRPr b="0" lang="ru-RU" sz="1800" strike="noStrike" u="none">
               <a:solidFill>
-                <a:srgbClr val="dbf5f9"/>
-              </a:solidFill>
-              <a:effectLst/>
-              <a:uFillTx/>
-              <a:latin typeface="Noto Sans"/>
+                <a:srgbClr val="000000"/>
+              </a:solidFill>
+              <a:effectLst/>
+              <a:uFillTx/>
+              <a:latin typeface="Arial"/>
             </a:endParaRPr>
           </a:p>
           <a:p>
             <a:pPr lvl="3" marL="1728000" indent="-216000">
+              <a:lnSpc>
+                <a:spcPct val="100000"/>
+              </a:lnSpc>
               <a:spcAft>
                 <a:spcPts val="422"/>
               </a:spcAft>
@@ -1062,15 +1193,18 @@
             </a:r>
             <a:endParaRPr b="0" lang="ru-RU" sz="1500" strike="noStrike" u="none">
               <a:solidFill>
-                <a:srgbClr val="dbf5f9"/>
-              </a:solidFill>
-              <a:effectLst/>
-              <a:uFillTx/>
-              <a:latin typeface="Noto Sans"/>
+                <a:srgbClr val="000000"/>
+              </a:solidFill>
+              <a:effectLst/>
+              <a:uFillTx/>
+              <a:latin typeface="Arial"/>
             </a:endParaRPr>
           </a:p>
           <a:p>
             <a:pPr lvl="4" marL="2160000" indent="-216000">
+              <a:lnSpc>
+                <a:spcPct val="100000"/>
+              </a:lnSpc>
               <a:spcAft>
                 <a:spcPts val="210"/>
               </a:spcAft>
@@ -1094,15 +1228,18 @@
             </a:r>
             <a:endParaRPr b="0" lang="ru-RU" sz="1500" strike="noStrike" u="none">
               <a:solidFill>
-                <a:srgbClr val="dbf5f9"/>
-              </a:solidFill>
-              <a:effectLst/>
-              <a:uFillTx/>
-              <a:latin typeface="Noto Sans"/>
+                <a:srgbClr val="000000"/>
+              </a:solidFill>
+              <a:effectLst/>
+              <a:uFillTx/>
+              <a:latin typeface="Arial"/>
             </a:endParaRPr>
           </a:p>
           <a:p>
             <a:pPr lvl="5" marL="2592000" indent="-216000">
+              <a:lnSpc>
+                <a:spcPct val="100000"/>
+              </a:lnSpc>
               <a:spcAft>
                 <a:spcPts val="210"/>
               </a:spcAft>
@@ -1126,15 +1263,18 @@
             </a:r>
             <a:endParaRPr b="0" lang="ru-RU" sz="1500" strike="noStrike" u="none">
               <a:solidFill>
-                <a:srgbClr val="dbf5f9"/>
-              </a:solidFill>
-              <a:effectLst/>
-              <a:uFillTx/>
-              <a:latin typeface="Noto Sans"/>
+                <a:srgbClr val="000000"/>
+              </a:solidFill>
+              <a:effectLst/>
+              <a:uFillTx/>
+              <a:latin typeface="Arial"/>
             </a:endParaRPr>
           </a:p>
           <a:p>
             <a:pPr lvl="6" marL="3024000" indent="-216000">
+              <a:lnSpc>
+                <a:spcPct val="100000"/>
+              </a:lnSpc>
               <a:spcAft>
                 <a:spcPts val="210"/>
               </a:spcAft>
@@ -1158,11 +1298,11 @@
             </a:r>
             <a:endParaRPr b="0" lang="ru-RU" sz="1500" strike="noStrike" u="none">
               <a:solidFill>
-                <a:srgbClr val="dbf5f9"/>
-              </a:solidFill>
-              <a:effectLst/>
-              <a:uFillTx/>
-              <a:latin typeface="Noto Sans"/>
+                <a:srgbClr val="000000"/>
+              </a:solidFill>
+              <a:effectLst/>
+              <a:uFillTx/>
+              <a:latin typeface="Arial"/>
             </a:endParaRPr>
           </a:p>
         </p:txBody>
@@ -1191,14 +1331,14 @@
       </p:grpSpPr>
       <p:sp>
         <p:nvSpPr>
-          <p:cNvPr id="13" name=""/>
+          <p:cNvPr id="14" name=""/>
           <p:cNvSpPr/>
           <p:nvPr/>
         </p:nvSpPr>
         <p:spPr>
           <a:xfrm flipV="1">
-            <a:off x="0" y="0"/>
-            <a:ext cx="10080000" cy="1080000"/>
+            <a:off x="0" y="-720"/>
+            <a:ext cx="10079640" cy="1079640"/>
           </a:xfrm>
           <a:prstGeom prst="rect">
             <a:avLst/>
@@ -1215,7 +1355,7 @@
             <a:noFill/>
           </a:ln>
           <a:effectLst>
-            <a:outerShdw dist="25200" dir="5400000" blurRad="0" rotWithShape="0">
+            <a:outerShdw blurRad="0" dir="5400000" dist="25200" rotWithShape="0">
               <a:srgbClr val="f49100"/>
             </a:outerShdw>
           </a:effectLst>
@@ -1231,6 +1371,11 @@
             <a:noAutofit/>
           </a:bodyPr>
           <a:p>
+            <a:pPr>
+              <a:lnSpc>
+                <a:spcPct val="100000"/>
+              </a:lnSpc>
+            </a:pPr>
             <a:endParaRPr b="0" lang="ru-RU" sz="2200" strike="noStrike" u="none">
               <a:solidFill>
                 <a:srgbClr val="ffffff"/>
@@ -1238,13 +1383,14 @@
               <a:effectLst/>
               <a:uFillTx/>
               <a:latin typeface="Noto Sans"/>
+              <a:ea typeface="DejaVu Sans"/>
             </a:endParaRPr>
           </a:p>
         </p:txBody>
       </p:sp>
       <p:sp>
         <p:nvSpPr>
-          <p:cNvPr id="14" name="PlaceHolder 1"/>
+          <p:cNvPr id="15" name="PlaceHolder 1"/>
           <p:cNvSpPr>
             <a:spLocks noGrp="1"/>
           </p:cNvSpPr>
@@ -1255,7 +1401,7 @@
         <p:spPr>
           <a:xfrm>
             <a:off x="504000" y="90000"/>
-            <a:ext cx="9072000" cy="990000"/>
+            <a:ext cx="9071640" cy="989640"/>
           </a:xfrm>
           <a:prstGeom prst="rect">
             <a:avLst/>
@@ -1267,11 +1413,17 @@
         </p:spPr>
         <p:txBody>
           <a:bodyPr lIns="0" rIns="0" tIns="0" bIns="0" anchor="b">
-            <a:normAutofit fontScale="77500" lnSpcReduction="19999"/>
+            <a:normAutofit fontScale="85000" lnSpcReduction="19999"/>
           </a:bodyPr>
           <a:p>
             <a:pPr indent="0">
+              <a:lnSpc>
+                <a:spcPct val="100000"/>
+              </a:lnSpc>
               <a:buNone/>
+              <a:tabLst>
+                <a:tab algn="l" pos="0"/>
+              </a:tabLst>
             </a:pPr>
             <a:r>
               <a:rPr b="0" lang="ru-RU" sz="4500" strike="noStrike" u="none">
@@ -1286,18 +1438,18 @@
             </a:r>
             <a:endParaRPr b="0" lang="ru-RU" sz="4500" strike="noStrike" u="none">
               <a:solidFill>
-                <a:srgbClr val="dbf5f9"/>
-              </a:solidFill>
-              <a:effectLst/>
-              <a:uFillTx/>
-              <a:latin typeface="Noto Sans"/>
+                <a:srgbClr val="000000"/>
+              </a:solidFill>
+              <a:effectLst/>
+              <a:uFillTx/>
+              <a:latin typeface="Arial"/>
             </a:endParaRPr>
           </a:p>
         </p:txBody>
       </p:sp>
       <p:sp>
         <p:nvSpPr>
-          <p:cNvPr id="15" name="PlaceHolder 2"/>
+          <p:cNvPr id="16" name="PlaceHolder 2"/>
           <p:cNvSpPr>
             <a:spLocks noGrp="1"/>
           </p:cNvSpPr>
@@ -1308,7 +1460,7 @@
         <p:spPr>
           <a:xfrm>
             <a:off x="504000" y="1440000"/>
-            <a:ext cx="9072000" cy="3510000"/>
+            <a:ext cx="9071640" cy="3509640"/>
           </a:xfrm>
           <a:prstGeom prst="rect">
             <a:avLst/>
@@ -1324,6 +1476,9 @@
           </a:bodyPr>
           <a:p>
             <a:pPr marL="432000" indent="-324000">
+              <a:lnSpc>
+                <a:spcPct val="100000"/>
+              </a:lnSpc>
               <a:spcAft>
                 <a:spcPts val="1054"/>
               </a:spcAft>
@@ -1347,15 +1502,18 @@
             </a:r>
             <a:endParaRPr b="0" lang="ru-RU" sz="2400" strike="noStrike" u="none">
               <a:solidFill>
-                <a:srgbClr val="04617b"/>
-              </a:solidFill>
-              <a:effectLst/>
-              <a:uFillTx/>
-              <a:latin typeface="Noto Sans"/>
+                <a:srgbClr val="000000"/>
+              </a:solidFill>
+              <a:effectLst/>
+              <a:uFillTx/>
+              <a:latin typeface="Arial"/>
             </a:endParaRPr>
           </a:p>
           <a:p>
             <a:pPr lvl="1" marL="864000" indent="-324000">
+              <a:lnSpc>
+                <a:spcPct val="100000"/>
+              </a:lnSpc>
               <a:spcAft>
                 <a:spcPts val="842"/>
               </a:spcAft>
@@ -1379,15 +1537,18 @@
             </a:r>
             <a:endParaRPr b="0" lang="ru-RU" sz="2100" strike="noStrike" u="none">
               <a:solidFill>
-                <a:srgbClr val="04617b"/>
-              </a:solidFill>
-              <a:effectLst/>
-              <a:uFillTx/>
-              <a:latin typeface="Noto Sans"/>
+                <a:srgbClr val="000000"/>
+              </a:solidFill>
+              <a:effectLst/>
+              <a:uFillTx/>
+              <a:latin typeface="Arial"/>
             </a:endParaRPr>
           </a:p>
           <a:p>
             <a:pPr lvl="2" marL="1296000" indent="-288000">
+              <a:lnSpc>
+                <a:spcPct val="100000"/>
+              </a:lnSpc>
               <a:spcAft>
                 <a:spcPts val="635"/>
               </a:spcAft>
@@ -1411,15 +1572,18 @@
             </a:r>
             <a:endParaRPr b="0" lang="ru-RU" sz="1800" strike="noStrike" u="none">
               <a:solidFill>
-                <a:srgbClr val="04617b"/>
-              </a:solidFill>
-              <a:effectLst/>
-              <a:uFillTx/>
-              <a:latin typeface="Noto Sans"/>
+                <a:srgbClr val="000000"/>
+              </a:solidFill>
+              <a:effectLst/>
+              <a:uFillTx/>
+              <a:latin typeface="Arial"/>
             </a:endParaRPr>
           </a:p>
           <a:p>
             <a:pPr lvl="3" marL="1728000" indent="-216000">
+              <a:lnSpc>
+                <a:spcPct val="100000"/>
+              </a:lnSpc>
               <a:spcAft>
                 <a:spcPts val="422"/>
               </a:spcAft>
@@ -1443,15 +1607,18 @@
             </a:r>
             <a:endParaRPr b="0" lang="ru-RU" sz="1800" strike="noStrike" u="none">
               <a:solidFill>
-                <a:srgbClr val="04617b"/>
-              </a:solidFill>
-              <a:effectLst/>
-              <a:uFillTx/>
-              <a:latin typeface="Noto Sans"/>
+                <a:srgbClr val="000000"/>
+              </a:solidFill>
+              <a:effectLst/>
+              <a:uFillTx/>
+              <a:latin typeface="Arial"/>
             </a:endParaRPr>
           </a:p>
           <a:p>
             <a:pPr lvl="4" marL="2160000" indent="-216000">
+              <a:lnSpc>
+                <a:spcPct val="100000"/>
+              </a:lnSpc>
               <a:spcAft>
                 <a:spcPts val="210"/>
               </a:spcAft>
@@ -1475,15 +1642,18 @@
             </a:r>
             <a:endParaRPr b="0" lang="ru-RU" sz="1800" strike="noStrike" u="none">
               <a:solidFill>
-                <a:srgbClr val="04617b"/>
-              </a:solidFill>
-              <a:effectLst/>
-              <a:uFillTx/>
-              <a:latin typeface="Noto Sans"/>
+                <a:srgbClr val="000000"/>
+              </a:solidFill>
+              <a:effectLst/>
+              <a:uFillTx/>
+              <a:latin typeface="Arial"/>
             </a:endParaRPr>
           </a:p>
           <a:p>
             <a:pPr lvl="5" marL="2592000" indent="-216000">
+              <a:lnSpc>
+                <a:spcPct val="100000"/>
+              </a:lnSpc>
               <a:spcAft>
                 <a:spcPts val="210"/>
               </a:spcAft>
@@ -1507,15 +1677,18 @@
             </a:r>
             <a:endParaRPr b="0" lang="ru-RU" sz="1800" strike="noStrike" u="none">
               <a:solidFill>
-                <a:srgbClr val="04617b"/>
-              </a:solidFill>
-              <a:effectLst/>
-              <a:uFillTx/>
-              <a:latin typeface="Noto Sans"/>
+                <a:srgbClr val="000000"/>
+              </a:solidFill>
+              <a:effectLst/>
+              <a:uFillTx/>
+              <a:latin typeface="Arial"/>
             </a:endParaRPr>
           </a:p>
           <a:p>
             <a:pPr lvl="6" marL="3024000" indent="-216000">
+              <a:lnSpc>
+                <a:spcPct val="100000"/>
+              </a:lnSpc>
               <a:spcAft>
                 <a:spcPts val="210"/>
               </a:spcAft>
@@ -1539,18 +1712,18 @@
             </a:r>
             <a:endParaRPr b="0" lang="ru-RU" sz="1800" strike="noStrike" u="none">
               <a:solidFill>
-                <a:srgbClr val="04617b"/>
-              </a:solidFill>
-              <a:effectLst/>
-              <a:uFillTx/>
-              <a:latin typeface="Noto Sans"/>
+                <a:srgbClr val="000000"/>
+              </a:solidFill>
+              <a:effectLst/>
+              <a:uFillTx/>
+              <a:latin typeface="Arial"/>
             </a:endParaRPr>
           </a:p>
         </p:txBody>
       </p:sp>
       <p:sp>
         <p:nvSpPr>
-          <p:cNvPr id="16" name="PlaceHolder 3"/>
+          <p:cNvPr id="17" name="PlaceHolder 3"/>
           <p:cNvSpPr>
             <a:spLocks noGrp="1"/>
           </p:cNvSpPr>
@@ -1561,7 +1734,7 @@
         <p:spPr>
           <a:xfrm>
             <a:off x="504000" y="5130000"/>
-            <a:ext cx="2340000" cy="450000"/>
+            <a:ext cx="2339640" cy="242640"/>
           </a:xfrm>
           <a:prstGeom prst="rect">
             <a:avLst/>
@@ -1577,7 +1750,13 @@
           </a:bodyPr>
           <a:lstStyle>
             <a:lvl1pPr indent="0">
+              <a:lnSpc>
+                <a:spcPct val="100000"/>
+              </a:lnSpc>
               <a:buNone/>
+              <a:tabLst>
+                <a:tab algn="l" pos="0"/>
+              </a:tabLst>
               <a:defRPr b="0" lang="ru-RU" sz="1400" strike="noStrike" u="none">
                 <a:solidFill>
                   <a:srgbClr val="484848"/>
@@ -1590,7 +1769,13 @@
           </a:lstStyle>
           <a:p>
             <a:pPr indent="0">
+              <a:lnSpc>
+                <a:spcPct val="100000"/>
+              </a:lnSpc>
               <a:buNone/>
+              <a:tabLst>
+                <a:tab algn="l" pos="0"/>
+              </a:tabLst>
             </a:pPr>
             <a:r>
               <a:rPr b="0" lang="ru-RU" sz="1400" strike="noStrike" u="none">
@@ -1605,18 +1790,18 @@
             </a:r>
             <a:endParaRPr b="0" lang="ru-RU" sz="1400" strike="noStrike" u="none">
               <a:solidFill>
-                <a:srgbClr val="484848"/>
-              </a:solidFill>
-              <a:effectLst/>
-              <a:uFillTx/>
-              <a:latin typeface="Noto Sans"/>
+                <a:srgbClr val="000000"/>
+              </a:solidFill>
+              <a:effectLst/>
+              <a:uFillTx/>
+              <a:latin typeface="Times New Roman"/>
             </a:endParaRPr>
           </a:p>
         </p:txBody>
       </p:sp>
       <p:sp>
         <p:nvSpPr>
-          <p:cNvPr id="17" name="PlaceHolder 4"/>
+          <p:cNvPr id="18" name="PlaceHolder 4"/>
           <p:cNvSpPr>
             <a:spLocks noGrp="1"/>
           </p:cNvSpPr>
@@ -1627,7 +1812,7 @@
         <p:spPr>
           <a:xfrm>
             <a:off x="3420000" y="5130000"/>
-            <a:ext cx="3240000" cy="450000"/>
+            <a:ext cx="3239640" cy="242640"/>
           </a:xfrm>
           <a:prstGeom prst="rect">
             <a:avLst/>
@@ -1643,7 +1828,13 @@
           </a:bodyPr>
           <a:lstStyle>
             <a:lvl1pPr indent="0" algn="ctr">
+              <a:lnSpc>
+                <a:spcPct val="100000"/>
+              </a:lnSpc>
               <a:buNone/>
+              <a:tabLst>
+                <a:tab algn="l" pos="0"/>
+              </a:tabLst>
               <a:defRPr b="0" lang="ru-RU" sz="1400" strike="noStrike" u="none">
                 <a:solidFill>
                   <a:srgbClr val="484848"/>
@@ -1656,7 +1847,13 @@
           </a:lstStyle>
           <a:p>
             <a:pPr indent="0" algn="ctr">
+              <a:lnSpc>
+                <a:spcPct val="100000"/>
+              </a:lnSpc>
               <a:buNone/>
+              <a:tabLst>
+                <a:tab algn="l" pos="0"/>
+              </a:tabLst>
             </a:pPr>
             <a:r>
               <a:rPr b="0" lang="ru-RU" sz="1400" strike="noStrike" u="none">
@@ -1671,18 +1868,18 @@
             </a:r>
             <a:endParaRPr b="0" lang="ru-RU" sz="1400" strike="noStrike" u="none">
               <a:solidFill>
-                <a:srgbClr val="484848"/>
-              </a:solidFill>
-              <a:effectLst/>
-              <a:uFillTx/>
-              <a:latin typeface="Noto Sans"/>
+                <a:srgbClr val="000000"/>
+              </a:solidFill>
+              <a:effectLst/>
+              <a:uFillTx/>
+              <a:latin typeface="Times New Roman"/>
             </a:endParaRPr>
           </a:p>
         </p:txBody>
       </p:sp>
       <p:sp>
         <p:nvSpPr>
-          <p:cNvPr id="18" name="PlaceHolder 5"/>
+          <p:cNvPr id="19" name="PlaceHolder 5"/>
           <p:cNvSpPr>
             <a:spLocks noGrp="1"/>
           </p:cNvSpPr>
@@ -1693,7 +1890,7 @@
         <p:spPr>
           <a:xfrm>
             <a:off x="7236000" y="5130000"/>
-            <a:ext cx="2340000" cy="450000"/>
+            <a:ext cx="2339640" cy="213840"/>
           </a:xfrm>
           <a:prstGeom prst="rect">
             <a:avLst/>
@@ -1709,7 +1906,13 @@
           </a:bodyPr>
           <a:lstStyle>
             <a:lvl1pPr indent="0" algn="r">
+              <a:lnSpc>
+                <a:spcPct val="100000"/>
+              </a:lnSpc>
               <a:buNone/>
+              <a:tabLst>
+                <a:tab algn="l" pos="0"/>
+              </a:tabLst>
               <a:defRPr b="0" lang="ru-RU" sz="1400" strike="noStrike" u="none">
                 <a:solidFill>
                   <a:srgbClr val="484848"/>
@@ -1722,9 +1925,15 @@
           </a:lstStyle>
           <a:p>
             <a:pPr indent="0" algn="r">
+              <a:lnSpc>
+                <a:spcPct val="100000"/>
+              </a:lnSpc>
               <a:buNone/>
-            </a:pPr>
-            <a:fld id="{17E606FD-8A33-406A-8AFF-BB3D75B181C8}" type="slidenum">
+              <a:tabLst>
+                <a:tab algn="l" pos="0"/>
+              </a:tabLst>
+            </a:pPr>
+            <a:fld id="{C48764CE-3B7A-40EF-898E-E96CCB89BD62}" type="slidenum">
               <a:rPr b="0" lang="ru-RU" sz="1400" strike="noStrike" u="none">
                 <a:solidFill>
                   <a:srgbClr val="484848"/>
@@ -1737,11 +1946,11 @@
             </a:fld>
             <a:endParaRPr b="0" lang="ru-RU" sz="1400" strike="noStrike" u="none">
               <a:solidFill>
-                <a:srgbClr val="484848"/>
-              </a:solidFill>
-              <a:effectLst/>
-              <a:uFillTx/>
-              <a:latin typeface="Noto Sans"/>
+                <a:srgbClr val="000000"/>
+              </a:solidFill>
+              <a:effectLst/>
+              <a:uFillTx/>
+              <a:latin typeface="Times New Roman"/>
             </a:endParaRPr>
           </a:p>
         </p:txBody>
@@ -1752,8 +1961,8 @@
 </file>
 
 <file path=ppt/slideLayouts/slideLayout4.xml><?xml version="1.0" encoding="utf-8"?>
-<p:sldLayout xmlns:a="http://schemas.openxmlformats.org/drawingml/2006/main" xmlns:p="http://schemas.openxmlformats.org/presentationml/2006/main" xmlns:r="http://schemas.openxmlformats.org/officeDocument/2006/relationships" xmlns:p14="http://schemas.microsoft.com/office/powerpoint/2010/main" xmlns:p15="http://schemas.microsoft.com/office/powerpoint/2012/main" xmlns:mc="http://schemas.openxmlformats.org/markup-compatibility/2006" type="mediaAndTx" preserve="1">
-  <p:cSld name="Vivid1">
+<p:sldLayout xmlns:a="http://schemas.openxmlformats.org/drawingml/2006/main" xmlns:p="http://schemas.openxmlformats.org/presentationml/2006/main" xmlns:r="http://schemas.openxmlformats.org/officeDocument/2006/relationships" xmlns:p14="http://schemas.microsoft.com/office/powerpoint/2010/main" xmlns:p15="http://schemas.microsoft.com/office/powerpoint/2012/main" xmlns:mc="http://schemas.openxmlformats.org/markup-compatibility/2006" type="blank" preserve="1">
+  <p:cSld name="Обычный 1">
     <p:spTree>
       <p:nvGrpSpPr>
         <p:cNvPr id="1" name=""/>
@@ -1770,14 +1979,14 @@
       </p:grpSpPr>
       <p:sp>
         <p:nvSpPr>
-          <p:cNvPr id="13" name=""/>
+          <p:cNvPr id="20" name=""/>
           <p:cNvSpPr/>
           <p:nvPr/>
         </p:nvSpPr>
         <p:spPr>
           <a:xfrm flipV="1">
-            <a:off x="0" y="0"/>
-            <a:ext cx="10080000" cy="1080000"/>
+            <a:off x="0" y="-720"/>
+            <a:ext cx="10079640" cy="1079640"/>
           </a:xfrm>
           <a:prstGeom prst="rect">
             <a:avLst/>
@@ -1794,7 +2003,7 @@
             <a:noFill/>
           </a:ln>
           <a:effectLst>
-            <a:outerShdw dist="25200" dir="5400000" blurRad="0" rotWithShape="0">
+            <a:outerShdw blurRad="0" dir="5400000" dist="25200" rotWithShape="0">
               <a:srgbClr val="f49100"/>
             </a:outerShdw>
           </a:effectLst>
@@ -1810,6 +2019,11 @@
             <a:noAutofit/>
           </a:bodyPr>
           <a:p>
+            <a:pPr>
+              <a:lnSpc>
+                <a:spcPct val="100000"/>
+              </a:lnSpc>
+            </a:pPr>
             <a:endParaRPr b="0" lang="ru-RU" sz="2200" strike="noStrike" u="none">
               <a:solidFill>
                 <a:srgbClr val="ffffff"/>
@@ -1817,13 +2031,14 @@
               <a:effectLst/>
               <a:uFillTx/>
               <a:latin typeface="Noto Sans"/>
+              <a:ea typeface="DejaVu Sans"/>
             </a:endParaRPr>
           </a:p>
         </p:txBody>
       </p:sp>
       <p:sp>
         <p:nvSpPr>
-          <p:cNvPr id="19" name="PlaceHolder 1"/>
+          <p:cNvPr id="21" name="PlaceHolder 1"/>
           <p:cNvSpPr>
             <a:spLocks noGrp="1"/>
           </p:cNvSpPr>
@@ -1834,7 +2049,7 @@
         <p:spPr>
           <a:xfrm>
             <a:off x="504000" y="90000"/>
-            <a:ext cx="9072000" cy="990000"/>
+            <a:ext cx="9071640" cy="989640"/>
           </a:xfrm>
           <a:prstGeom prst="rect">
             <a:avLst/>
@@ -1846,11 +2061,17 @@
         </p:spPr>
         <p:txBody>
           <a:bodyPr lIns="0" rIns="0" tIns="0" bIns="0" anchor="b">
-            <a:normAutofit fontScale="77500" lnSpcReduction="19999"/>
+            <a:normAutofit fontScale="85000" lnSpcReduction="19999"/>
           </a:bodyPr>
           <a:p>
             <a:pPr indent="0">
+              <a:lnSpc>
+                <a:spcPct val="100000"/>
+              </a:lnSpc>
               <a:buNone/>
+              <a:tabLst>
+                <a:tab algn="l" pos="0"/>
+              </a:tabLst>
             </a:pPr>
             <a:r>
               <a:rPr b="0" lang="ru-RU" sz="4500" strike="noStrike" u="none">
@@ -1865,18 +2086,18 @@
             </a:r>
             <a:endParaRPr b="0" lang="ru-RU" sz="4500" strike="noStrike" u="none">
               <a:solidFill>
-                <a:srgbClr val="dbf5f9"/>
-              </a:solidFill>
-              <a:effectLst/>
-              <a:uFillTx/>
-              <a:latin typeface="Noto Sans"/>
+                <a:srgbClr val="000000"/>
+              </a:solidFill>
+              <a:effectLst/>
+              <a:uFillTx/>
+              <a:latin typeface="Arial"/>
             </a:endParaRPr>
           </a:p>
         </p:txBody>
       </p:sp>
       <p:sp>
         <p:nvSpPr>
-          <p:cNvPr id="20" name="PlaceHolder 2"/>
+          <p:cNvPr id="22" name="PlaceHolder 2"/>
           <p:cNvSpPr>
             <a:spLocks noGrp="1"/>
           </p:cNvSpPr>
@@ -1887,7 +2108,7 @@
         <p:spPr>
           <a:xfrm>
             <a:off x="504000" y="1440000"/>
-            <a:ext cx="9072000" cy="3510000"/>
+            <a:ext cx="9071640" cy="3509640"/>
           </a:xfrm>
           <a:prstGeom prst="rect">
             <a:avLst/>
@@ -1903,6 +2124,9 @@
           </a:bodyPr>
           <a:p>
             <a:pPr marL="432000" indent="-324000">
+              <a:lnSpc>
+                <a:spcPct val="100000"/>
+              </a:lnSpc>
               <a:spcAft>
                 <a:spcPts val="1054"/>
               </a:spcAft>
@@ -1926,15 +2150,18 @@
             </a:r>
             <a:endParaRPr b="0" lang="ru-RU" sz="2400" strike="noStrike" u="none">
               <a:solidFill>
-                <a:srgbClr val="04617b"/>
-              </a:solidFill>
-              <a:effectLst/>
-              <a:uFillTx/>
-              <a:latin typeface="Noto Sans"/>
+                <a:srgbClr val="000000"/>
+              </a:solidFill>
+              <a:effectLst/>
+              <a:uFillTx/>
+              <a:latin typeface="Arial"/>
             </a:endParaRPr>
           </a:p>
           <a:p>
             <a:pPr lvl="1" marL="864000" indent="-324000">
+              <a:lnSpc>
+                <a:spcPct val="100000"/>
+              </a:lnSpc>
               <a:spcAft>
                 <a:spcPts val="842"/>
               </a:spcAft>
@@ -1958,15 +2185,18 @@
             </a:r>
             <a:endParaRPr b="0" lang="ru-RU" sz="2100" strike="noStrike" u="none">
               <a:solidFill>
-                <a:srgbClr val="04617b"/>
-              </a:solidFill>
-              <a:effectLst/>
-              <a:uFillTx/>
-              <a:latin typeface="Noto Sans"/>
+                <a:srgbClr val="000000"/>
+              </a:solidFill>
+              <a:effectLst/>
+              <a:uFillTx/>
+              <a:latin typeface="Arial"/>
             </a:endParaRPr>
           </a:p>
           <a:p>
             <a:pPr lvl="2" marL="1296000" indent="-288000">
+              <a:lnSpc>
+                <a:spcPct val="100000"/>
+              </a:lnSpc>
               <a:spcAft>
                 <a:spcPts val="635"/>
               </a:spcAft>
@@ -1990,15 +2220,18 @@
             </a:r>
             <a:endParaRPr b="0" lang="ru-RU" sz="1800" strike="noStrike" u="none">
               <a:solidFill>
-                <a:srgbClr val="04617b"/>
-              </a:solidFill>
-              <a:effectLst/>
-              <a:uFillTx/>
-              <a:latin typeface="Noto Sans"/>
+                <a:srgbClr val="000000"/>
+              </a:solidFill>
+              <a:effectLst/>
+              <a:uFillTx/>
+              <a:latin typeface="Arial"/>
             </a:endParaRPr>
           </a:p>
           <a:p>
             <a:pPr lvl="3" marL="1728000" indent="-216000">
+              <a:lnSpc>
+                <a:spcPct val="100000"/>
+              </a:lnSpc>
               <a:spcAft>
                 <a:spcPts val="422"/>
               </a:spcAft>
@@ -2022,15 +2255,18 @@
             </a:r>
             <a:endParaRPr b="0" lang="ru-RU" sz="1800" strike="noStrike" u="none">
               <a:solidFill>
-                <a:srgbClr val="04617b"/>
-              </a:solidFill>
-              <a:effectLst/>
-              <a:uFillTx/>
-              <a:latin typeface="Noto Sans"/>
+                <a:srgbClr val="000000"/>
+              </a:solidFill>
+              <a:effectLst/>
+              <a:uFillTx/>
+              <a:latin typeface="Arial"/>
             </a:endParaRPr>
           </a:p>
           <a:p>
             <a:pPr lvl="4" marL="2160000" indent="-216000">
+              <a:lnSpc>
+                <a:spcPct val="100000"/>
+              </a:lnSpc>
               <a:spcAft>
                 <a:spcPts val="210"/>
               </a:spcAft>
@@ -2054,15 +2290,18 @@
             </a:r>
             <a:endParaRPr b="0" lang="ru-RU" sz="1800" strike="noStrike" u="none">
               <a:solidFill>
-                <a:srgbClr val="04617b"/>
-              </a:solidFill>
-              <a:effectLst/>
-              <a:uFillTx/>
-              <a:latin typeface="Noto Sans"/>
+                <a:srgbClr val="000000"/>
+              </a:solidFill>
+              <a:effectLst/>
+              <a:uFillTx/>
+              <a:latin typeface="Arial"/>
             </a:endParaRPr>
           </a:p>
           <a:p>
             <a:pPr lvl="5" marL="2592000" indent="-216000">
+              <a:lnSpc>
+                <a:spcPct val="100000"/>
+              </a:lnSpc>
               <a:spcAft>
                 <a:spcPts val="210"/>
               </a:spcAft>
@@ -2086,15 +2325,18 @@
             </a:r>
             <a:endParaRPr b="0" lang="ru-RU" sz="1800" strike="noStrike" u="none">
               <a:solidFill>
-                <a:srgbClr val="04617b"/>
-              </a:solidFill>
-              <a:effectLst/>
-              <a:uFillTx/>
-              <a:latin typeface="Noto Sans"/>
+                <a:srgbClr val="000000"/>
+              </a:solidFill>
+              <a:effectLst/>
+              <a:uFillTx/>
+              <a:latin typeface="Arial"/>
             </a:endParaRPr>
           </a:p>
           <a:p>
             <a:pPr lvl="6" marL="3024000" indent="-216000">
+              <a:lnSpc>
+                <a:spcPct val="100000"/>
+              </a:lnSpc>
               <a:spcAft>
                 <a:spcPts val="210"/>
               </a:spcAft>
@@ -2118,18 +2360,18 @@
             </a:r>
             <a:endParaRPr b="0" lang="ru-RU" sz="1800" strike="noStrike" u="none">
               <a:solidFill>
-                <a:srgbClr val="04617b"/>
-              </a:solidFill>
-              <a:effectLst/>
-              <a:uFillTx/>
-              <a:latin typeface="Noto Sans"/>
+                <a:srgbClr val="000000"/>
+              </a:solidFill>
+              <a:effectLst/>
+              <a:uFillTx/>
+              <a:latin typeface="Arial"/>
             </a:endParaRPr>
           </a:p>
         </p:txBody>
       </p:sp>
       <p:sp>
         <p:nvSpPr>
-          <p:cNvPr id="21" name="PlaceHolder 3"/>
+          <p:cNvPr id="23" name="PlaceHolder 3"/>
           <p:cNvSpPr>
             <a:spLocks noGrp="1"/>
           </p:cNvSpPr>
@@ -2140,7 +2382,7 @@
         <p:spPr>
           <a:xfrm>
             <a:off x="504000" y="5130000"/>
-            <a:ext cx="2340000" cy="450000"/>
+            <a:ext cx="2339640" cy="242640"/>
           </a:xfrm>
           <a:prstGeom prst="rect">
             <a:avLst/>
@@ -2156,7 +2398,13 @@
           </a:bodyPr>
           <a:lstStyle>
             <a:lvl1pPr indent="0">
+              <a:lnSpc>
+                <a:spcPct val="100000"/>
+              </a:lnSpc>
               <a:buNone/>
+              <a:tabLst>
+                <a:tab algn="l" pos="0"/>
+              </a:tabLst>
               <a:defRPr b="0" lang="ru-RU" sz="1400" strike="noStrike" u="none">
                 <a:solidFill>
                   <a:srgbClr val="484848"/>
@@ -2169,7 +2417,13 @@
           </a:lstStyle>
           <a:p>
             <a:pPr indent="0">
+              <a:lnSpc>
+                <a:spcPct val="100000"/>
+              </a:lnSpc>
               <a:buNone/>
+              <a:tabLst>
+                <a:tab algn="l" pos="0"/>
+              </a:tabLst>
             </a:pPr>
             <a:r>
               <a:rPr b="0" lang="ru-RU" sz="1400" strike="noStrike" u="none">
@@ -2184,18 +2438,18 @@
             </a:r>
             <a:endParaRPr b="0" lang="ru-RU" sz="1400" strike="noStrike" u="none">
               <a:solidFill>
-                <a:srgbClr val="484848"/>
-              </a:solidFill>
-              <a:effectLst/>
-              <a:uFillTx/>
-              <a:latin typeface="Noto Sans"/>
+                <a:srgbClr val="000000"/>
+              </a:solidFill>
+              <a:effectLst/>
+              <a:uFillTx/>
+              <a:latin typeface="Times New Roman"/>
             </a:endParaRPr>
           </a:p>
         </p:txBody>
       </p:sp>
       <p:sp>
         <p:nvSpPr>
-          <p:cNvPr id="22" name="PlaceHolder 4"/>
+          <p:cNvPr id="24" name="PlaceHolder 4"/>
           <p:cNvSpPr>
             <a:spLocks noGrp="1"/>
           </p:cNvSpPr>
@@ -2206,7 +2460,7 @@
         <p:spPr>
           <a:xfrm>
             <a:off x="3420000" y="5130000"/>
-            <a:ext cx="3240000" cy="450000"/>
+            <a:ext cx="3239640" cy="242640"/>
           </a:xfrm>
           <a:prstGeom prst="rect">
             <a:avLst/>
@@ -2222,7 +2476,13 @@
           </a:bodyPr>
           <a:lstStyle>
             <a:lvl1pPr indent="0" algn="ctr">
+              <a:lnSpc>
+                <a:spcPct val="100000"/>
+              </a:lnSpc>
               <a:buNone/>
+              <a:tabLst>
+                <a:tab algn="l" pos="0"/>
+              </a:tabLst>
               <a:defRPr b="0" lang="ru-RU" sz="1400" strike="noStrike" u="none">
                 <a:solidFill>
                   <a:srgbClr val="484848"/>
@@ -2235,7 +2495,13 @@
           </a:lstStyle>
           <a:p>
             <a:pPr indent="0" algn="ctr">
+              <a:lnSpc>
+                <a:spcPct val="100000"/>
+              </a:lnSpc>
               <a:buNone/>
+              <a:tabLst>
+                <a:tab algn="l" pos="0"/>
+              </a:tabLst>
             </a:pPr>
             <a:r>
               <a:rPr b="0" lang="ru-RU" sz="1400" strike="noStrike" u="none">
@@ -2250,18 +2516,18 @@
             </a:r>
             <a:endParaRPr b="0" lang="ru-RU" sz="1400" strike="noStrike" u="none">
               <a:solidFill>
-                <a:srgbClr val="484848"/>
-              </a:solidFill>
-              <a:effectLst/>
-              <a:uFillTx/>
-              <a:latin typeface="Noto Sans"/>
+                <a:srgbClr val="000000"/>
+              </a:solidFill>
+              <a:effectLst/>
+              <a:uFillTx/>
+              <a:latin typeface="Times New Roman"/>
             </a:endParaRPr>
           </a:p>
         </p:txBody>
       </p:sp>
       <p:sp>
         <p:nvSpPr>
-          <p:cNvPr id="23" name="PlaceHolder 5"/>
+          <p:cNvPr id="25" name="PlaceHolder 5"/>
           <p:cNvSpPr>
             <a:spLocks noGrp="1"/>
           </p:cNvSpPr>
@@ -2272,7 +2538,7 @@
         <p:spPr>
           <a:xfrm>
             <a:off x="7236000" y="5130000"/>
-            <a:ext cx="2340000" cy="450000"/>
+            <a:ext cx="2339640" cy="213840"/>
           </a:xfrm>
           <a:prstGeom prst="rect">
             <a:avLst/>
@@ -2288,7 +2554,13 @@
           </a:bodyPr>
           <a:lstStyle>
             <a:lvl1pPr indent="0" algn="r">
+              <a:lnSpc>
+                <a:spcPct val="100000"/>
+              </a:lnSpc>
               <a:buNone/>
+              <a:tabLst>
+                <a:tab algn="l" pos="0"/>
+              </a:tabLst>
               <a:defRPr b="0" lang="ru-RU" sz="1400" strike="noStrike" u="none">
                 <a:solidFill>
                   <a:srgbClr val="484848"/>
@@ -2301,9 +2573,15 @@
           </a:lstStyle>
           <a:p>
             <a:pPr indent="0" algn="r">
+              <a:lnSpc>
+                <a:spcPct val="100000"/>
+              </a:lnSpc>
               <a:buNone/>
-            </a:pPr>
-            <a:fld id="{961C749E-D452-4F67-9D09-D63E52DCC257}" type="slidenum">
+              <a:tabLst>
+                <a:tab algn="l" pos="0"/>
+              </a:tabLst>
+            </a:pPr>
+            <a:fld id="{AECB2200-D01D-494F-944C-3261404F8EF6}" type="slidenum">
               <a:rPr b="0" lang="ru-RU" sz="1400" strike="noStrike" u="none">
                 <a:solidFill>
                   <a:srgbClr val="484848"/>
@@ -2316,11 +2594,11 @@
             </a:fld>
             <a:endParaRPr b="0" lang="ru-RU" sz="1400" strike="noStrike" u="none">
               <a:solidFill>
-                <a:srgbClr val="484848"/>
-              </a:solidFill>
-              <a:effectLst/>
-              <a:uFillTx/>
-              <a:latin typeface="Noto Sans"/>
+                <a:srgbClr val="000000"/>
+              </a:solidFill>
+              <a:effectLst/>
+              <a:uFillTx/>
+              <a:latin typeface="Times New Roman"/>
             </a:endParaRPr>
           </a:p>
         </p:txBody>
@@ -2331,7 +2609,7 @@
 </file>
 
 <file path=ppt/slideLayouts/slideLayout5.xml><?xml version="1.0" encoding="utf-8"?>
-<p:sldLayout xmlns:a="http://schemas.openxmlformats.org/drawingml/2006/main" xmlns:p="http://schemas.openxmlformats.org/presentationml/2006/main" xmlns:r="http://schemas.openxmlformats.org/officeDocument/2006/relationships" xmlns:p14="http://schemas.microsoft.com/office/powerpoint/2010/main" xmlns:p15="http://schemas.microsoft.com/office/powerpoint/2012/main" xmlns:mc="http://schemas.openxmlformats.org/markup-compatibility/2006" type="mediaAndTx" preserve="1">
+<p:sldLayout xmlns:a="http://schemas.openxmlformats.org/drawingml/2006/main" xmlns:p="http://schemas.openxmlformats.org/presentationml/2006/main" xmlns:r="http://schemas.openxmlformats.org/officeDocument/2006/relationships" xmlns:p14="http://schemas.microsoft.com/office/powerpoint/2010/main" xmlns:p15="http://schemas.microsoft.com/office/powerpoint/2012/main" xmlns:mc="http://schemas.openxmlformats.org/markup-compatibility/2006" type="blank" preserve="1">
   <p:cSld name="Vivid2">
     <p:spTree>
       <p:nvGrpSpPr>
@@ -2349,14 +2627,14 @@
       </p:grpSpPr>
       <p:sp>
         <p:nvSpPr>
-          <p:cNvPr id="24" name=""/>
+          <p:cNvPr id="26" name=""/>
           <p:cNvSpPr/>
           <p:nvPr/>
         </p:nvSpPr>
         <p:spPr>
           <a:xfrm flipV="1">
-            <a:off x="0" y="0"/>
-            <a:ext cx="10080000" cy="180000"/>
+            <a:off x="0" y="-720"/>
+            <a:ext cx="10079640" cy="179640"/>
           </a:xfrm>
           <a:prstGeom prst="rect">
             <a:avLst/>
@@ -2373,7 +2651,7 @@
             <a:noFill/>
           </a:ln>
           <a:effectLst>
-            <a:outerShdw dist="25200" dir="5400000" blurRad="0" rotWithShape="0">
+            <a:outerShdw blurRad="0" dir="5400000" dist="25200" rotWithShape="0">
               <a:srgbClr val="f49100"/>
             </a:outerShdw>
           </a:effectLst>
@@ -2389,6 +2667,11 @@
             <a:noAutofit/>
           </a:bodyPr>
           <a:p>
+            <a:pPr>
+              <a:lnSpc>
+                <a:spcPct val="100000"/>
+              </a:lnSpc>
+            </a:pPr>
             <a:endParaRPr b="0" lang="ru-RU" sz="2200" strike="noStrike" u="none">
               <a:solidFill>
                 <a:srgbClr val="ffffff"/>
@@ -2396,13 +2679,14 @@
               <a:effectLst/>
               <a:uFillTx/>
               <a:latin typeface="Noto Sans"/>
+              <a:ea typeface="DejaVu Sans"/>
             </a:endParaRPr>
           </a:p>
         </p:txBody>
       </p:sp>
       <p:sp>
         <p:nvSpPr>
-          <p:cNvPr id="25" name="PlaceHolder 1"/>
+          <p:cNvPr id="27" name="PlaceHolder 1"/>
           <p:cNvSpPr>
             <a:spLocks noGrp="1"/>
           </p:cNvSpPr>
@@ -2413,7 +2697,7 @@
         <p:spPr>
           <a:xfrm>
             <a:off x="504000" y="270000"/>
-            <a:ext cx="9072000" cy="990000"/>
+            <a:ext cx="9071640" cy="989640"/>
           </a:xfrm>
           <a:prstGeom prst="rect">
             <a:avLst/>
@@ -2425,11 +2709,17 @@
         </p:spPr>
         <p:txBody>
           <a:bodyPr lIns="0" rIns="0" tIns="0" bIns="0" anchor="ctr">
-            <a:normAutofit fontScale="77500" lnSpcReduction="19999"/>
+            <a:normAutofit fontScale="85000" lnSpcReduction="19999"/>
           </a:bodyPr>
           <a:p>
             <a:pPr indent="0">
+              <a:lnSpc>
+                <a:spcPct val="100000"/>
+              </a:lnSpc>
               <a:buNone/>
+              <a:tabLst>
+                <a:tab algn="l" pos="0"/>
+              </a:tabLst>
             </a:pPr>
             <a:r>
               <a:rPr b="0" lang="ru-RU" sz="4500" strike="noStrike" u="none">
@@ -2444,18 +2734,18 @@
             </a:r>
             <a:endParaRPr b="0" lang="ru-RU" sz="4500" strike="noStrike" u="none">
               <a:solidFill>
-                <a:srgbClr val="04617b"/>
-              </a:solidFill>
-              <a:effectLst/>
-              <a:uFillTx/>
-              <a:latin typeface="Noto Sans"/>
+                <a:srgbClr val="000000"/>
+              </a:solidFill>
+              <a:effectLst/>
+              <a:uFillTx/>
+              <a:latin typeface="Arial"/>
             </a:endParaRPr>
           </a:p>
         </p:txBody>
       </p:sp>
       <p:sp>
         <p:nvSpPr>
-          <p:cNvPr id="26" name="PlaceHolder 2"/>
+          <p:cNvPr id="28" name="PlaceHolder 2"/>
           <p:cNvSpPr>
             <a:spLocks noGrp="1"/>
           </p:cNvSpPr>
@@ -2466,7 +2756,7 @@
         <p:spPr>
           <a:xfrm>
             <a:off x="504000" y="1440000"/>
-            <a:ext cx="9072000" cy="3690000"/>
+            <a:ext cx="9071640" cy="3689640"/>
           </a:xfrm>
           <a:prstGeom prst="rect">
             <a:avLst/>
@@ -2482,6 +2772,9 @@
           </a:bodyPr>
           <a:p>
             <a:pPr marL="432000" indent="-324000">
+              <a:lnSpc>
+                <a:spcPct val="100000"/>
+              </a:lnSpc>
               <a:spcAft>
                 <a:spcPts val="1057"/>
               </a:spcAft>
@@ -2505,15 +2798,18 @@
             </a:r>
             <a:endParaRPr b="0" lang="ru-RU" sz="2400" strike="noStrike" u="none">
               <a:solidFill>
-                <a:srgbClr val="04617b"/>
-              </a:solidFill>
-              <a:effectLst/>
-              <a:uFillTx/>
-              <a:latin typeface="Noto Sans"/>
+                <a:srgbClr val="000000"/>
+              </a:solidFill>
+              <a:effectLst/>
+              <a:uFillTx/>
+              <a:latin typeface="Arial"/>
             </a:endParaRPr>
           </a:p>
           <a:p>
             <a:pPr lvl="1" marL="864000" indent="-324000">
+              <a:lnSpc>
+                <a:spcPct val="100000"/>
+              </a:lnSpc>
               <a:spcAft>
                 <a:spcPts val="842"/>
               </a:spcAft>
@@ -2537,15 +2833,18 @@
             </a:r>
             <a:endParaRPr b="0" lang="ru-RU" sz="2100" strike="noStrike" u="none">
               <a:solidFill>
-                <a:srgbClr val="04617b"/>
-              </a:solidFill>
-              <a:effectLst/>
-              <a:uFillTx/>
-              <a:latin typeface="Noto Sans"/>
+                <a:srgbClr val="000000"/>
+              </a:solidFill>
+              <a:effectLst/>
+              <a:uFillTx/>
+              <a:latin typeface="Arial"/>
             </a:endParaRPr>
           </a:p>
           <a:p>
             <a:pPr lvl="2" marL="1296000" indent="-288000">
+              <a:lnSpc>
+                <a:spcPct val="100000"/>
+              </a:lnSpc>
               <a:spcAft>
                 <a:spcPts val="635"/>
               </a:spcAft>
@@ -2569,15 +2868,18 @@
             </a:r>
             <a:endParaRPr b="0" lang="ru-RU" sz="1800" strike="noStrike" u="none">
               <a:solidFill>
-                <a:srgbClr val="04617b"/>
-              </a:solidFill>
-              <a:effectLst/>
-              <a:uFillTx/>
-              <a:latin typeface="Noto Sans"/>
+                <a:srgbClr val="000000"/>
+              </a:solidFill>
+              <a:effectLst/>
+              <a:uFillTx/>
+              <a:latin typeface="Arial"/>
             </a:endParaRPr>
           </a:p>
           <a:p>
             <a:pPr lvl="3" marL="1728000" indent="-216000">
+              <a:lnSpc>
+                <a:spcPct val="100000"/>
+              </a:lnSpc>
               <a:spcAft>
                 <a:spcPts val="422"/>
               </a:spcAft>
@@ -2601,15 +2903,18 @@
             </a:r>
             <a:endParaRPr b="0" lang="ru-RU" sz="1800" strike="noStrike" u="none">
               <a:solidFill>
-                <a:srgbClr val="04617b"/>
-              </a:solidFill>
-              <a:effectLst/>
-              <a:uFillTx/>
-              <a:latin typeface="Noto Sans"/>
+                <a:srgbClr val="000000"/>
+              </a:solidFill>
+              <a:effectLst/>
+              <a:uFillTx/>
+              <a:latin typeface="Arial"/>
             </a:endParaRPr>
           </a:p>
           <a:p>
             <a:pPr lvl="4" marL="2160000" indent="-216000">
+              <a:lnSpc>
+                <a:spcPct val="100000"/>
+              </a:lnSpc>
               <a:spcAft>
                 <a:spcPts val="210"/>
               </a:spcAft>
@@ -2633,15 +2938,18 @@
             </a:r>
             <a:endParaRPr b="0" lang="ru-RU" sz="1800" strike="noStrike" u="none">
               <a:solidFill>
-                <a:srgbClr val="04617b"/>
-              </a:solidFill>
-              <a:effectLst/>
-              <a:uFillTx/>
-              <a:latin typeface="Noto Sans"/>
+                <a:srgbClr val="000000"/>
+              </a:solidFill>
+              <a:effectLst/>
+              <a:uFillTx/>
+              <a:latin typeface="Arial"/>
             </a:endParaRPr>
           </a:p>
           <a:p>
             <a:pPr lvl="5" marL="2592000" indent="-216000">
+              <a:lnSpc>
+                <a:spcPct val="100000"/>
+              </a:lnSpc>
               <a:spcAft>
                 <a:spcPts val="210"/>
               </a:spcAft>
@@ -2665,15 +2973,18 @@
             </a:r>
             <a:endParaRPr b="0" lang="ru-RU" sz="1800" strike="noStrike" u="none">
               <a:solidFill>
-                <a:srgbClr val="04617b"/>
-              </a:solidFill>
-              <a:effectLst/>
-              <a:uFillTx/>
-              <a:latin typeface="Noto Sans"/>
+                <a:srgbClr val="000000"/>
+              </a:solidFill>
+              <a:effectLst/>
+              <a:uFillTx/>
+              <a:latin typeface="Arial"/>
             </a:endParaRPr>
           </a:p>
           <a:p>
             <a:pPr lvl="6" marL="3024000" indent="-216000">
+              <a:lnSpc>
+                <a:spcPct val="100000"/>
+              </a:lnSpc>
               <a:spcAft>
                 <a:spcPts val="210"/>
               </a:spcAft>
@@ -2697,18 +3008,18 @@
             </a:r>
             <a:endParaRPr b="0" lang="ru-RU" sz="1800" strike="noStrike" u="none">
               <a:solidFill>
-                <a:srgbClr val="04617b"/>
-              </a:solidFill>
-              <a:effectLst/>
-              <a:uFillTx/>
-              <a:latin typeface="Noto Sans"/>
+                <a:srgbClr val="000000"/>
+              </a:solidFill>
+              <a:effectLst/>
+              <a:uFillTx/>
+              <a:latin typeface="Arial"/>
             </a:endParaRPr>
           </a:p>
         </p:txBody>
       </p:sp>
       <p:sp>
         <p:nvSpPr>
-          <p:cNvPr id="27" name="PlaceHolder 3"/>
+          <p:cNvPr id="29" name="PlaceHolder 3"/>
           <p:cNvSpPr>
             <a:spLocks noGrp="1"/>
           </p:cNvSpPr>
@@ -2719,7 +3030,7 @@
         <p:spPr>
           <a:xfrm>
             <a:off x="504000" y="5130000"/>
-            <a:ext cx="2340000" cy="450000"/>
+            <a:ext cx="2339640" cy="242640"/>
           </a:xfrm>
           <a:prstGeom prst="rect">
             <a:avLst/>
@@ -2735,7 +3046,13 @@
           </a:bodyPr>
           <a:lstStyle>
             <a:lvl1pPr indent="0">
+              <a:lnSpc>
+                <a:spcPct val="100000"/>
+              </a:lnSpc>
               <a:buNone/>
+              <a:tabLst>
+                <a:tab algn="l" pos="0"/>
+              </a:tabLst>
               <a:defRPr b="0" lang="ru-RU" sz="1400" strike="noStrike" u="none">
                 <a:solidFill>
                   <a:srgbClr val="484848"/>
@@ -2748,7 +3065,13 @@
           </a:lstStyle>
           <a:p>
             <a:pPr indent="0">
+              <a:lnSpc>
+                <a:spcPct val="100000"/>
+              </a:lnSpc>
               <a:buNone/>
+              <a:tabLst>
+                <a:tab algn="l" pos="0"/>
+              </a:tabLst>
             </a:pPr>
             <a:r>
               <a:rPr b="0" lang="ru-RU" sz="1400" strike="noStrike" u="none">
@@ -2763,18 +3086,18 @@
             </a:r>
             <a:endParaRPr b="0" lang="ru-RU" sz="1400" strike="noStrike" u="none">
               <a:solidFill>
-                <a:srgbClr val="484848"/>
-              </a:solidFill>
-              <a:effectLst/>
-              <a:uFillTx/>
-              <a:latin typeface="Noto Sans"/>
+                <a:srgbClr val="000000"/>
+              </a:solidFill>
+              <a:effectLst/>
+              <a:uFillTx/>
+              <a:latin typeface="Times New Roman"/>
             </a:endParaRPr>
           </a:p>
         </p:txBody>
       </p:sp>
       <p:sp>
         <p:nvSpPr>
-          <p:cNvPr id="28" name="PlaceHolder 4"/>
+          <p:cNvPr id="30" name="PlaceHolder 4"/>
           <p:cNvSpPr>
             <a:spLocks noGrp="1"/>
           </p:cNvSpPr>
@@ -2785,7 +3108,7 @@
         <p:spPr>
           <a:xfrm>
             <a:off x="3420000" y="5130000"/>
-            <a:ext cx="3240000" cy="450000"/>
+            <a:ext cx="3239640" cy="242640"/>
           </a:xfrm>
           <a:prstGeom prst="rect">
             <a:avLst/>
@@ -2801,7 +3124,13 @@
           </a:bodyPr>
           <a:lstStyle>
             <a:lvl1pPr indent="0" algn="ctr">
+              <a:lnSpc>
+                <a:spcPct val="100000"/>
+              </a:lnSpc>
               <a:buNone/>
+              <a:tabLst>
+                <a:tab algn="l" pos="0"/>
+              </a:tabLst>
               <a:defRPr b="0" lang="ru-RU" sz="1400" strike="noStrike" u="none">
                 <a:solidFill>
                   <a:srgbClr val="484848"/>
@@ -2814,7 +3143,13 @@
           </a:lstStyle>
           <a:p>
             <a:pPr indent="0" algn="ctr">
+              <a:lnSpc>
+                <a:spcPct val="100000"/>
+              </a:lnSpc>
               <a:buNone/>
+              <a:tabLst>
+                <a:tab algn="l" pos="0"/>
+              </a:tabLst>
             </a:pPr>
             <a:r>
               <a:rPr b="0" lang="ru-RU" sz="1400" strike="noStrike" u="none">
@@ -2829,18 +3164,18 @@
             </a:r>
             <a:endParaRPr b="0" lang="ru-RU" sz="1400" strike="noStrike" u="none">
               <a:solidFill>
-                <a:srgbClr val="484848"/>
-              </a:solidFill>
-              <a:effectLst/>
-              <a:uFillTx/>
-              <a:latin typeface="Noto Sans"/>
+                <a:srgbClr val="000000"/>
+              </a:solidFill>
+              <a:effectLst/>
+              <a:uFillTx/>
+              <a:latin typeface="Times New Roman"/>
             </a:endParaRPr>
           </a:p>
         </p:txBody>
       </p:sp>
       <p:sp>
         <p:nvSpPr>
-          <p:cNvPr id="29" name="PlaceHolder 5"/>
+          <p:cNvPr id="31" name="PlaceHolder 5"/>
           <p:cNvSpPr>
             <a:spLocks noGrp="1"/>
           </p:cNvSpPr>
@@ -2851,7 +3186,7 @@
         <p:spPr>
           <a:xfrm>
             <a:off x="7236000" y="5130000"/>
-            <a:ext cx="2340000" cy="450000"/>
+            <a:ext cx="2339640" cy="213840"/>
           </a:xfrm>
           <a:prstGeom prst="rect">
             <a:avLst/>
@@ -2867,7 +3202,13 @@
           </a:bodyPr>
           <a:lstStyle>
             <a:lvl1pPr indent="0" algn="r">
+              <a:lnSpc>
+                <a:spcPct val="100000"/>
+              </a:lnSpc>
               <a:buNone/>
+              <a:tabLst>
+                <a:tab algn="l" pos="0"/>
+              </a:tabLst>
               <a:defRPr b="0" lang="ru-RU" sz="1400" strike="noStrike" u="none">
                 <a:solidFill>
                   <a:srgbClr val="484848"/>
@@ -2880,9 +3221,15 @@
           </a:lstStyle>
           <a:p>
             <a:pPr indent="0" algn="r">
+              <a:lnSpc>
+                <a:spcPct val="100000"/>
+              </a:lnSpc>
               <a:buNone/>
-            </a:pPr>
-            <a:fld id="{4464B22D-F163-449B-8C5C-2D9C6B267EF4}" type="slidenum">
+              <a:tabLst>
+                <a:tab algn="l" pos="0"/>
+              </a:tabLst>
+            </a:pPr>
+            <a:fld id="{F7E4A9ED-EC38-4927-91A5-A26C13E9798E}" type="slidenum">
               <a:rPr b="0" lang="ru-RU" sz="1400" strike="noStrike" u="none">
                 <a:solidFill>
                   <a:srgbClr val="484848"/>
@@ -2895,25 +3242,25 @@
             </a:fld>
             <a:endParaRPr b="0" lang="ru-RU" sz="1400" strike="noStrike" u="none">
               <a:solidFill>
-                <a:srgbClr val="484848"/>
-              </a:solidFill>
-              <a:effectLst/>
-              <a:uFillTx/>
-              <a:latin typeface="Noto Sans"/>
+                <a:srgbClr val="000000"/>
+              </a:solidFill>
+              <a:effectLst/>
+              <a:uFillTx/>
+              <a:latin typeface="Times New Roman"/>
             </a:endParaRPr>
           </a:p>
         </p:txBody>
       </p:sp>
       <p:sp>
         <p:nvSpPr>
-          <p:cNvPr id="30" name=""/>
+          <p:cNvPr id="32" name=""/>
           <p:cNvSpPr/>
           <p:nvPr/>
         </p:nvSpPr>
         <p:spPr>
           <a:xfrm>
             <a:off x="0" y="5580000"/>
-            <a:ext cx="10080000" cy="90000"/>
+            <a:ext cx="10079640" cy="89640"/>
           </a:xfrm>
           <a:prstGeom prst="rect">
             <a:avLst/>
@@ -2930,7 +3277,7 @@
             <a:noFill/>
           </a:ln>
           <a:effectLst>
-            <a:outerShdw dist="25200" dir="16200000" blurRad="0" rotWithShape="0">
+            <a:outerShdw blurRad="0" dir="16200000" dist="25200" rotWithShape="0">
               <a:srgbClr val="f49100"/>
             </a:outerShdw>
           </a:effectLst>
@@ -2946,6 +3293,11 @@
             <a:noAutofit/>
           </a:bodyPr>
           <a:p>
+            <a:pPr>
+              <a:lnSpc>
+                <a:spcPct val="100000"/>
+              </a:lnSpc>
+            </a:pPr>
             <a:endParaRPr b="0" lang="ru-RU" sz="2200" strike="noStrike" u="none">
               <a:solidFill>
                 <a:srgbClr val="ffffff"/>
@@ -2953,6 +3305,7 @@
               <a:effectLst/>
               <a:uFillTx/>
               <a:latin typeface="Noto Sans"/>
+              <a:ea typeface="DejaVu Sans"/>
             </a:endParaRPr>
           </a:p>
         </p:txBody>
@@ -3011,7 +3364,7 @@
       </p:grpSpPr>
       <p:sp>
         <p:nvSpPr>
-          <p:cNvPr id="31" name="PlaceHolder 1"/>
+          <p:cNvPr id="33" name="PlaceHolder 1"/>
           <p:cNvSpPr>
             <a:spLocks noGrp="1"/>
           </p:cNvSpPr>
@@ -3022,7 +3375,7 @@
         <p:spPr>
           <a:xfrm>
             <a:off x="504000" y="270000"/>
-            <a:ext cx="9072000" cy="3240000"/>
+            <a:ext cx="9071640" cy="3239640"/>
           </a:xfrm>
           <a:prstGeom prst="rect">
             <a:avLst/>
@@ -3038,7 +3391,13 @@
           </a:bodyPr>
           <a:p>
             <a:pPr indent="0">
+              <a:lnSpc>
+                <a:spcPct val="100000"/>
+              </a:lnSpc>
               <a:buNone/>
+              <a:tabLst>
+                <a:tab algn="l" pos="0"/>
+              </a:tabLst>
             </a:pPr>
             <a:r>
               <a:rPr b="0" lang="ru-RU" sz="6000" strike="noStrike" u="none">
@@ -3067,18 +3426,18 @@
             </a:r>
             <a:endParaRPr b="0" lang="ru-RU" sz="6000" strike="noStrike" u="none">
               <a:solidFill>
-                <a:srgbClr val="04617b"/>
-              </a:solidFill>
-              <a:effectLst/>
-              <a:uFillTx/>
-              <a:latin typeface="Noto Sans"/>
+                <a:srgbClr val="000000"/>
+              </a:solidFill>
+              <a:effectLst/>
+              <a:uFillTx/>
+              <a:latin typeface="Arial"/>
             </a:endParaRPr>
           </a:p>
         </p:txBody>
       </p:sp>
       <p:sp>
         <p:nvSpPr>
-          <p:cNvPr id="32" name="PlaceHolder 2"/>
+          <p:cNvPr id="34" name="PlaceHolder 2"/>
           <p:cNvSpPr>
             <a:spLocks noGrp="1"/>
           </p:cNvSpPr>
@@ -3089,7 +3448,7 @@
         <p:spPr>
           <a:xfrm>
             <a:off x="504000" y="3870000"/>
-            <a:ext cx="9072000" cy="1247400"/>
+            <a:ext cx="9071640" cy="1247760"/>
           </a:xfrm>
           <a:prstGeom prst="rect">
             <a:avLst/>
@@ -3105,7 +3464,13 @@
           </a:bodyPr>
           <a:p>
             <a:pPr indent="0">
+              <a:lnSpc>
+                <a:spcPct val="100000"/>
+              </a:lnSpc>
               <a:buNone/>
+              <a:tabLst>
+                <a:tab algn="l" pos="0"/>
+              </a:tabLst>
             </a:pPr>
             <a:r>
               <a:rPr b="1" lang="ru-RU" sz="3600" strike="noStrike" u="none">
@@ -3118,19 +3483,27 @@
               </a:rPr>
               <a:t>Доклад подготовил студент группы БСТ2502 Кочкин Иван Владимирович</a:t>
             </a:r>
-            <a:endParaRPr b="1" lang="ru-RU" sz="3600" strike="noStrike" u="none">
-              <a:solidFill>
-                <a:srgbClr val="dbf5f9"/>
-              </a:solidFill>
-              <a:effectLst/>
-              <a:uFillTx/>
-              <a:latin typeface="Noto Sans"/>
+            <a:endParaRPr b="0" lang="ru-RU" sz="3600" strike="noStrike" u="none">
+              <a:solidFill>
+                <a:srgbClr val="000000"/>
+              </a:solidFill>
+              <a:effectLst/>
+              <a:uFillTx/>
+              <a:latin typeface="Arial"/>
             </a:endParaRPr>
           </a:p>
         </p:txBody>
       </p:sp>
     </p:spTree>
   </p:cSld>
+  <mc:AlternateContent>
+    <mc:Choice Requires="p14">
+      <p:transition spd="slow" p14:dur="2000"/>
+    </mc:Choice>
+    <mc:Fallback>
+      <p:transition spd="slow"/>
+    </mc:Fallback>
+  </mc:AlternateContent>
 </p:sld>
 </file>
 
@@ -3153,7 +3526,7 @@
       </p:grpSpPr>
       <p:sp>
         <p:nvSpPr>
-          <p:cNvPr id="33" name="PlaceHolder 1"/>
+          <p:cNvPr id="35" name="PlaceHolder 1"/>
           <p:cNvSpPr>
             <a:spLocks noGrp="1"/>
           </p:cNvSpPr>
@@ -3164,7 +3537,7 @@
         <p:spPr>
           <a:xfrm>
             <a:off x="504000" y="90000"/>
-            <a:ext cx="9072000" cy="990000"/>
+            <a:ext cx="9071640" cy="989640"/>
           </a:xfrm>
           <a:prstGeom prst="rect">
             <a:avLst/>
@@ -3176,26 +3549,26 @@
         </p:spPr>
         <p:txBody>
           <a:bodyPr lIns="0" rIns="0" tIns="0" bIns="0" anchor="b">
-            <a:normAutofit/>
+            <a:normAutofit fontScale="85000" lnSpcReduction="19999"/>
           </a:bodyPr>
           <a:p>
-            <a:pPr indent="0">
+            <a:pPr indent="0" algn="ctr">
               <a:buNone/>
             </a:pPr>
-            <a:endParaRPr b="0" lang="ru-RU" sz="4500" strike="noStrike" u="none">
-              <a:solidFill>
-                <a:srgbClr val="dbf5f9"/>
-              </a:solidFill>
-              <a:effectLst/>
-              <a:uFillTx/>
-              <a:latin typeface="Noto Sans"/>
+            <a:endParaRPr b="0" lang="ru-RU" sz="1800" strike="noStrike" u="none">
+              <a:solidFill>
+                <a:srgbClr val="000000"/>
+              </a:solidFill>
+              <a:effectLst/>
+              <a:uFillTx/>
+              <a:latin typeface="Arial"/>
             </a:endParaRPr>
           </a:p>
         </p:txBody>
       </p:sp>
       <p:sp>
         <p:nvSpPr>
-          <p:cNvPr id="34" name="PlaceHolder 2"/>
+          <p:cNvPr id="36" name="PlaceHolder 2"/>
           <p:cNvSpPr>
             <a:spLocks noGrp="1"/>
           </p:cNvSpPr>
@@ -3206,7 +3579,7 @@
         <p:spPr>
           <a:xfrm>
             <a:off x="538200" y="1440000"/>
-            <a:ext cx="5221800" cy="3510000"/>
+            <a:ext cx="5221440" cy="3509640"/>
           </a:xfrm>
           <a:prstGeom prst="rect">
             <a:avLst/>
@@ -3221,26 +3594,69 @@
             <a:normAutofit/>
           </a:bodyPr>
           <a:p>
-            <a:pPr indent="0">
-              <a:spcAft>
-                <a:spcPts val="1054"/>
-              </a:spcAft>
+            <a:pPr marL="432000" indent="-324000">
+              <a:spcBef>
+                <a:spcPts val="1417"/>
+              </a:spcBef>
+              <a:buClr>
+                <a:srgbClr val="000000"/>
+              </a:buClr>
+              <a:buSzPct val="45000"/>
+              <a:buFont typeface="Wingdings" charset="2"/>
+              <a:buChar char=""/>
+            </a:pPr>
+            <a:r>
+              <a:rPr b="0" lang="ru-RU" sz="2600" strike="noStrike" u="none">
+                <a:solidFill>
+                  <a:srgbClr val="000000"/>
+                </a:solidFill>
+                <a:effectLst/>
+                <a:uFillTx/>
+                <a:latin typeface="Arial"/>
+              </a:rPr>
+              <a:t>Место службы: 828 </a:t>
+            </a:r>
+            <a:endParaRPr b="0" lang="ru-RU" sz="2600" strike="noStrike" u="none">
+              <a:solidFill>
+                <a:srgbClr val="000000"/>
+              </a:solidFill>
+              <a:effectLst/>
+              <a:uFillTx/>
+              <a:latin typeface="Arial"/>
+            </a:endParaRPr>
+          </a:p>
+          <a:p>
+            <a:pPr marL="432000" indent="0">
+              <a:spcBef>
+                <a:spcPts val="1417"/>
+              </a:spcBef>
               <a:buNone/>
             </a:pPr>
-            <a:endParaRPr b="0" lang="ru-RU" sz="2400" strike="noStrike" u="none">
-              <a:solidFill>
-                <a:srgbClr val="04617b"/>
-              </a:solidFill>
-              <a:effectLst/>
-              <a:uFillTx/>
-              <a:latin typeface="Noto Sans"/>
+            <a:r>
+              <a:rPr b="0" lang="ru-RU" sz="3200" strike="noStrike" u="none">
+                <a:solidFill>
+                  <a:srgbClr val="000000"/>
+                </a:solidFill>
+                <a:effectLst/>
+                <a:uFillTx/>
+                <a:latin typeface="Arial"/>
+              </a:rPr>
+              <a:t> </a:t>
+            </a:r>
+            <a:endParaRPr b="0" lang="ru-RU" sz="3200" strike="noStrike" u="none">
+              <a:solidFill>
+                <a:srgbClr val="000000"/>
+              </a:solidFill>
+              <a:effectLst/>
+              <a:uFillTx/>
+              <a:latin typeface="Arial"/>
             </a:endParaRPr>
           </a:p>
         </p:txBody>
       </p:sp>
       <p:pic>
         <p:nvPicPr>
-          <p:cNvPr id="35" name="" descr=""/>
+          <p:cNvPr id="37" name="" descr=""/>
           <p:cNvPicPr/>
           <p:nvPr/>
         </p:nvPicPr>
@@ -3251,7 +3667,7 @@
         <p:spPr>
           <a:xfrm>
             <a:off x="6235200" y="1260000"/>
-            <a:ext cx="3124800" cy="4075200"/>
+            <a:ext cx="3124440" cy="4074840"/>
           </a:xfrm>
           <a:prstGeom prst="rect">
             <a:avLst/>
@@ -3264,6 +3680,14 @@
       </p:pic>
     </p:spTree>
   </p:cSld>
+  <mc:AlternateContent>
+    <mc:Choice Requires="p14">
+      <p:transition spd="slow" p14:dur="2000"/>
+    </mc:Choice>
+    <mc:Fallback>
+      <p:transition spd="slow"/>
+    </mc:Fallback>
+  </mc:AlternateContent>
 </p:sld>
 </file>
 
@@ -3286,7 +3710,294 @@
       </p:grpSpPr>
       <p:sp>
         <p:nvSpPr>
-          <p:cNvPr id="36" name="PlaceHolder 1"/>
+          <p:cNvPr id="38" name="PlaceHolder 1"/>
+          <p:cNvSpPr>
+            <a:spLocks noGrp="1"/>
+          </p:cNvSpPr>
+          <p:nvPr>
+            <p:ph type="title"/>
+          </p:nvPr>
+        </p:nvSpPr>
+        <p:spPr>
+          <a:xfrm>
+            <a:off x="504000" y="90000"/>
+            <a:ext cx="9071640" cy="989640"/>
+          </a:xfrm>
+          <a:prstGeom prst="rect">
+            <a:avLst/>
+          </a:prstGeom>
+          <a:noFill/>
+          <a:ln w="0">
+            <a:noFill/>
+          </a:ln>
+        </p:spPr>
+        <p:txBody>
+          <a:bodyPr lIns="0" rIns="0" tIns="0" bIns="0" anchor="ctr">
+            <a:normAutofit/>
+          </a:bodyPr>
+          <a:p>
+            <a:pPr indent="0" algn="ctr">
+              <a:buNone/>
+            </a:pPr>
+            <a:r>
+              <a:rPr b="0" lang="ru-RU" sz="4400" strike="noStrike" u="none">
+                <a:solidFill>
+                  <a:srgbClr val="dbf5f9"/>
+                </a:solidFill>
+                <a:effectLst/>
+                <a:uFillTx/>
+                <a:latin typeface="Noto Sans"/>
+              </a:rPr>
+              <a:t>Награды</a:t>
+            </a:r>
+            <a:endParaRPr b="0" lang="ru-RU" sz="4400" strike="noStrike" u="none">
+              <a:solidFill>
+                <a:srgbClr val="c9211e"/>
+              </a:solidFill>
+              <a:effectLst/>
+              <a:uFillTx/>
+              <a:latin typeface="Arial"/>
+            </a:endParaRPr>
+          </a:p>
+        </p:txBody>
+      </p:sp>
+      <p:pic>
+        <p:nvPicPr>
+          <p:cNvPr id="39" name="" descr=""/>
+          <p:cNvPicPr/>
+          <p:nvPr/>
+        </p:nvPicPr>
+        <p:blipFill>
+          <a:blip r:embed="rId1"/>
+          <a:stretch/>
+        </p:blipFill>
+        <p:spPr>
+          <a:xfrm>
+            <a:off x="720000" y="1440000"/>
+            <a:ext cx="2059200" cy="3600000"/>
+          </a:xfrm>
+          <a:prstGeom prst="rect">
+            <a:avLst/>
+          </a:prstGeom>
+          <a:noFill/>
+          <a:ln w="0">
+            <a:noFill/>
+          </a:ln>
+        </p:spPr>
+      </p:pic>
+      <p:pic>
+        <p:nvPicPr>
+          <p:cNvPr id="40" name="" descr=""/>
+          <p:cNvPicPr/>
+          <p:nvPr/>
+        </p:nvPicPr>
+        <p:blipFill>
+          <a:blip r:embed="rId2"/>
+          <a:srcRect l="4988" t="0" r="0" b="0"/>
+          <a:stretch/>
+        </p:blipFill>
+        <p:spPr>
+          <a:xfrm>
+            <a:off x="2880000" y="3600000"/>
+            <a:ext cx="6840720" cy="1616400"/>
+          </a:xfrm>
+          <a:prstGeom prst="rect">
+            <a:avLst/>
+          </a:prstGeom>
+          <a:noFill/>
+          <a:ln w="0">
+            <a:noFill/>
+          </a:ln>
+        </p:spPr>
+      </p:pic>
+    </p:spTree>
+  </p:cSld>
+  <mc:AlternateContent>
+    <mc:Choice Requires="p14">
+      <p:transition spd="slow" p14:dur="2000"/>
+    </mc:Choice>
+    <mc:Fallback>
+      <p:transition spd="slow"/>
+    </mc:Fallback>
+  </mc:AlternateContent>
+</p:sld>
+</file>
+
+<file path=ppt/slides/slide4.xml><?xml version="1.0" encoding="utf-8"?>
+<p:sld xmlns:a="http://schemas.openxmlformats.org/drawingml/2006/main" xmlns:p="http://schemas.openxmlformats.org/presentationml/2006/main" xmlns:r="http://schemas.openxmlformats.org/officeDocument/2006/relationships" xmlns:p14="http://schemas.microsoft.com/office/powerpoint/2010/main" xmlns:p15="http://schemas.microsoft.com/office/powerpoint/2012/main" xmlns:mc="http://schemas.openxmlformats.org/markup-compatibility/2006">
+  <p:cSld>
+    <p:spTree>
+      <p:nvGrpSpPr>
+        <p:cNvPr id="1" name=""/>
+        <p:cNvGrpSpPr/>
+        <p:nvPr/>
+      </p:nvGrpSpPr>
+      <p:grpSpPr>
+        <a:xfrm>
+          <a:off x="0" y="0"/>
+          <a:ext cx="0" cy="0"/>
+          <a:chOff x="0" y="0"/>
+          <a:chExt cx="0" cy="0"/>
+        </a:xfrm>
+      </p:grpSpPr>
+      <p:sp>
+        <p:nvSpPr>
+          <p:cNvPr id="41" name="PlaceHolder 1"/>
+          <p:cNvSpPr>
+            <a:spLocks noGrp="1"/>
+          </p:cNvSpPr>
+          <p:nvPr>
+            <p:ph type="title"/>
+          </p:nvPr>
+        </p:nvSpPr>
+        <p:spPr>
+          <a:xfrm>
+            <a:off x="504000" y="90000"/>
+            <a:ext cx="9071640" cy="989640"/>
+          </a:xfrm>
+          <a:prstGeom prst="rect">
+            <a:avLst/>
+          </a:prstGeom>
+          <a:noFill/>
+          <a:ln w="0">
+            <a:noFill/>
+          </a:ln>
+        </p:spPr>
+        <p:txBody>
+          <a:bodyPr lIns="0" rIns="0" tIns="0" bIns="0" anchor="ctr">
+            <a:normAutofit/>
+          </a:bodyPr>
+          <a:p>
+            <a:pPr indent="0" algn="ctr">
+              <a:buNone/>
+            </a:pPr>
+            <a:r>
+              <a:rPr b="0" lang="ru-RU" sz="4400" strike="noStrike" u="none">
+                <a:solidFill>
+                  <a:srgbClr val="dbf5f9"/>
+                </a:solidFill>
+                <a:effectLst/>
+                <a:uFillTx/>
+                <a:latin typeface="Noto Sans"/>
+              </a:rPr>
+              <a:t>Награды</a:t>
+            </a:r>
+            <a:endParaRPr b="0" lang="ru-RU" sz="4400" strike="noStrike" u="none">
+              <a:solidFill>
+                <a:srgbClr val="c9211e"/>
+              </a:solidFill>
+              <a:effectLst/>
+              <a:uFillTx/>
+              <a:latin typeface="Arial"/>
+            </a:endParaRPr>
+          </a:p>
+        </p:txBody>
+      </p:sp>
+      <p:pic>
+        <p:nvPicPr>
+          <p:cNvPr id="42" name="" descr=""/>
+          <p:cNvPicPr/>
+          <p:nvPr/>
+        </p:nvPicPr>
+        <p:blipFill>
+          <a:blip r:embed="rId1"/>
+          <a:stretch/>
+        </p:blipFill>
+        <p:spPr>
+          <a:xfrm>
+            <a:off x="1080000" y="1620000"/>
+            <a:ext cx="2073600" cy="3600000"/>
+          </a:xfrm>
+          <a:prstGeom prst="rect">
+            <a:avLst/>
+          </a:prstGeom>
+          <a:noFill/>
+          <a:ln w="0">
+            <a:noFill/>
+          </a:ln>
+        </p:spPr>
+      </p:pic>
+      <p:pic>
+        <p:nvPicPr>
+          <p:cNvPr id="43" name="" descr=""/>
+          <p:cNvPicPr/>
+          <p:nvPr/>
+        </p:nvPicPr>
+        <p:blipFill>
+          <a:blip r:embed="rId2"/>
+          <a:stretch/>
+        </p:blipFill>
+        <p:spPr>
+          <a:xfrm>
+            <a:off x="3240000" y="4786200"/>
+            <a:ext cx="6480000" cy="433800"/>
+          </a:xfrm>
+          <a:prstGeom prst="rect">
+            <a:avLst/>
+          </a:prstGeom>
+          <a:noFill/>
+          <a:ln w="0">
+            <a:noFill/>
+          </a:ln>
+        </p:spPr>
+      </p:pic>
+      <p:pic>
+        <p:nvPicPr>
+          <p:cNvPr id="44" name="" descr=""/>
+          <p:cNvPicPr/>
+          <p:nvPr/>
+        </p:nvPicPr>
+        <p:blipFill>
+          <a:blip r:embed="rId3"/>
+          <a:stretch/>
+        </p:blipFill>
+        <p:spPr>
+          <a:xfrm>
+            <a:off x="3240000" y="2615400"/>
+            <a:ext cx="6480000" cy="2170800"/>
+          </a:xfrm>
+          <a:prstGeom prst="rect">
+            <a:avLst/>
+          </a:prstGeom>
+          <a:noFill/>
+          <a:ln w="0">
+            <a:noFill/>
+          </a:ln>
+        </p:spPr>
+      </p:pic>
+    </p:spTree>
+  </p:cSld>
+  <mc:AlternateContent>
+    <mc:Choice Requires="p14">
+      <p:transition spd="slow" p14:dur="2000"/>
+    </mc:Choice>
+    <mc:Fallback>
+      <p:transition spd="slow"/>
+    </mc:Fallback>
+  </mc:AlternateContent>
+</p:sld>
+</file>
+
+<file path=ppt/slides/slide5.xml><?xml version="1.0" encoding="utf-8"?>
+<p:sld xmlns:a="http://schemas.openxmlformats.org/drawingml/2006/main" xmlns:p="http://schemas.openxmlformats.org/presentationml/2006/main" xmlns:r="http://schemas.openxmlformats.org/officeDocument/2006/relationships" xmlns:p14="http://schemas.microsoft.com/office/powerpoint/2010/main" xmlns:p15="http://schemas.microsoft.com/office/powerpoint/2012/main" xmlns:mc="http://schemas.openxmlformats.org/markup-compatibility/2006">
+  <p:cSld>
+    <p:spTree>
+      <p:nvGrpSpPr>
+        <p:cNvPr id="1" name=""/>
+        <p:cNvGrpSpPr/>
+        <p:nvPr/>
+      </p:nvGrpSpPr>
+      <p:grpSpPr>
+        <a:xfrm>
+          <a:off x="0" y="0"/>
+          <a:ext cx="0" cy="0"/>
+          <a:chOff x="0" y="0"/>
+          <a:chExt cx="0" cy="0"/>
+        </a:xfrm>
+      </p:grpSpPr>
+      <p:sp>
+        <p:nvSpPr>
+          <p:cNvPr id="45" name="PlaceHolder 1"/>
           <p:cNvSpPr>
             <a:spLocks noGrp="1"/>
           </p:cNvSpPr>
@@ -3296,8 +4007,8 @@
         </p:nvSpPr>
         <p:spPr>
           <a:xfrm>
-            <a:off x="504000" y="630720"/>
-            <a:ext cx="9072000" cy="4388760"/>
+            <a:off x="504000" y="630360"/>
+            <a:ext cx="9071640" cy="4389120"/>
           </a:xfrm>
           <a:prstGeom prst="rect">
             <a:avLst/>
@@ -3313,19 +4024,27 @@
           </a:bodyPr>
           <a:p>
             <a:pPr algn="ctr"/>
-            <a:endParaRPr b="1" lang="ru-RU" sz="4000" strike="noStrike" u="none">
-              <a:solidFill>
-                <a:srgbClr val="009eda"/>
-              </a:solidFill>
-              <a:effectLst/>
-              <a:uFillTx/>
-              <a:latin typeface="Noto Sans"/>
+            <a:endParaRPr b="0" lang="ru-RU" sz="1800" strike="noStrike" u="none">
+              <a:solidFill>
+                <a:srgbClr val="000000"/>
+              </a:solidFill>
+              <a:effectLst/>
+              <a:uFillTx/>
+              <a:latin typeface="Arial"/>
             </a:endParaRPr>
           </a:p>
         </p:txBody>
       </p:sp>
     </p:spTree>
   </p:cSld>
+  <mc:AlternateContent>
+    <mc:Choice Requires="p14">
+      <p:transition spd="slow" p14:dur="2000"/>
+    </mc:Choice>
+    <mc:Fallback>
+      <p:transition spd="slow"/>
+    </mc:Fallback>
+  </mc:AlternateContent>
 </p:sld>
 </file>
 

--- a/Основы Российской Государственности/Кочкин Виталий Васильевич.pptx
+++ b/Основы Российской Государственности/Кочкин Виталий Васильевич.pptx
@@ -42,7 +42,7 @@
         <p:spPr>
           <a:xfrm>
             <a:off x="0" y="3780000"/>
-            <a:ext cx="10079640" cy="1889640"/>
+            <a:ext cx="10078920" cy="1888920"/>
           </a:xfrm>
           <a:prstGeom prst="rect">
             <a:avLst/>
@@ -105,7 +105,7 @@
         <p:spPr>
           <a:xfrm>
             <a:off x="504000" y="5130000"/>
-            <a:ext cx="2339640" cy="242640"/>
+            <a:ext cx="2338920" cy="242640"/>
           </a:xfrm>
           <a:prstGeom prst="rect">
             <a:avLst/>
@@ -157,7 +157,7 @@
                 <a:uFillTx/>
                 <a:latin typeface="Noto Sans"/>
               </a:rPr>
-              <a:t>&lt;дата/время&gt;</a:t>
+              <a:t> </a:t>
             </a:r>
             <a:endParaRPr b="0" lang="ru-RU" sz="1400" strike="noStrike" u="none">
               <a:solidFill>
@@ -183,7 +183,7 @@
         <p:spPr>
           <a:xfrm>
             <a:off x="3420000" y="5130000"/>
-            <a:ext cx="3239640" cy="242640"/>
+            <a:ext cx="3238920" cy="242640"/>
           </a:xfrm>
           <a:prstGeom prst="rect">
             <a:avLst/>
@@ -235,7 +235,7 @@
                 <a:uFillTx/>
                 <a:latin typeface="Noto Sans"/>
               </a:rPr>
-              <a:t>&lt;нижний колонтитул&gt;</a:t>
+              <a:t> </a:t>
             </a:r>
             <a:endParaRPr b="0" lang="ru-RU" sz="1400" strike="noStrike" u="none">
               <a:solidFill>
@@ -261,7 +261,7 @@
         <p:spPr>
           <a:xfrm>
             <a:off x="7236000" y="5130000"/>
-            <a:ext cx="2339640" cy="213840"/>
+            <a:ext cx="2338920" cy="213840"/>
           </a:xfrm>
           <a:prstGeom prst="rect">
             <a:avLst/>
@@ -304,7 +304,7 @@
                 <a:tab algn="l" pos="0"/>
               </a:tabLst>
             </a:pPr>
-            <a:fld id="{0AFC8106-B29E-4A59-AE75-1A55668FF8E5}" type="slidenum">
+            <a:fld id="{F660F7BB-E6E5-4DD9-833E-062FD8CBAA43}" type="slidenum">
               <a:rPr b="0" lang="ru-RU" sz="1400" strike="noStrike" u="none">
                 <a:solidFill>
                   <a:srgbClr val="dbf5f9"/>
@@ -313,7 +313,7 @@
                 <a:uFillTx/>
                 <a:latin typeface="Noto Sans"/>
               </a:rPr>
-              <a:t>&lt;номер&gt;</a:t>
+              <a:t>2</a:t>
             </a:fld>
             <a:endParaRPr b="0" lang="ru-RU" sz="1400" strike="noStrike" u="none">
               <a:solidFill>
@@ -339,7 +339,7 @@
         <p:spPr>
           <a:xfrm>
             <a:off x="504000" y="270000"/>
-            <a:ext cx="9071640" cy="3239640"/>
+            <a:ext cx="9070920" cy="3238920"/>
           </a:xfrm>
           <a:prstGeom prst="rect">
             <a:avLst/>
@@ -398,7 +398,7 @@
         <p:spPr>
           <a:xfrm>
             <a:off x="504000" y="3870000"/>
-            <a:ext cx="9071640" cy="1169640"/>
+            <a:ext cx="9070920" cy="1168920"/>
           </a:xfrm>
           <a:prstGeom prst="rect">
             <a:avLst/>
@@ -690,7 +690,7 @@
         <p:spPr>
           <a:xfrm>
             <a:off x="0" y="3780000"/>
-            <a:ext cx="10079640" cy="1889640"/>
+            <a:ext cx="10078920" cy="1888920"/>
           </a:xfrm>
           <a:prstGeom prst="rect">
             <a:avLst/>
@@ -753,7 +753,7 @@
         <p:spPr>
           <a:xfrm>
             <a:off x="504000" y="5130000"/>
-            <a:ext cx="2339640" cy="242640"/>
+            <a:ext cx="2338920" cy="242640"/>
           </a:xfrm>
           <a:prstGeom prst="rect">
             <a:avLst/>
@@ -831,7 +831,7 @@
         <p:spPr>
           <a:xfrm>
             <a:off x="3420000" y="5130000"/>
-            <a:ext cx="3239640" cy="242640"/>
+            <a:ext cx="3238920" cy="242640"/>
           </a:xfrm>
           <a:prstGeom prst="rect">
             <a:avLst/>
@@ -909,7 +909,7 @@
         <p:spPr>
           <a:xfrm>
             <a:off x="7236000" y="5130000"/>
-            <a:ext cx="2339640" cy="213840"/>
+            <a:ext cx="2338920" cy="213840"/>
           </a:xfrm>
           <a:prstGeom prst="rect">
             <a:avLst/>
@@ -952,7 +952,7 @@
                 <a:tab algn="l" pos="0"/>
               </a:tabLst>
             </a:pPr>
-            <a:fld id="{394C4D69-51F4-4CE6-8FC6-7F2A3F165238}" type="slidenum">
+            <a:fld id="{63D9D19C-4F20-4CFE-A2E3-B8102AC63086}" type="slidenum">
               <a:rPr b="0" lang="ru-RU" sz="1400" strike="noStrike" u="none">
                 <a:solidFill>
                   <a:srgbClr val="dbf5f9"/>
@@ -987,7 +987,7 @@
         <p:spPr>
           <a:xfrm>
             <a:off x="504000" y="270000"/>
-            <a:ext cx="9071640" cy="3239640"/>
+            <a:ext cx="9070920" cy="3238920"/>
           </a:xfrm>
           <a:prstGeom prst="rect">
             <a:avLst/>
@@ -1046,7 +1046,7 @@
         <p:spPr>
           <a:xfrm>
             <a:off x="504000" y="3870000"/>
-            <a:ext cx="9071640" cy="1169640"/>
+            <a:ext cx="9070920" cy="1168920"/>
           </a:xfrm>
           <a:prstGeom prst="rect">
             <a:avLst/>
@@ -1337,8 +1337,8 @@
         </p:nvSpPr>
         <p:spPr>
           <a:xfrm flipV="1">
-            <a:off x="0" y="-720"/>
-            <a:ext cx="10079640" cy="1079640"/>
+            <a:off x="0" y="-1440"/>
+            <a:ext cx="10078920" cy="1078920"/>
           </a:xfrm>
           <a:prstGeom prst="rect">
             <a:avLst/>
@@ -1401,7 +1401,7 @@
         <p:spPr>
           <a:xfrm>
             <a:off x="504000" y="90000"/>
-            <a:ext cx="9071640" cy="989640"/>
+            <a:ext cx="9070920" cy="988920"/>
           </a:xfrm>
           <a:prstGeom prst="rect">
             <a:avLst/>
@@ -1460,7 +1460,7 @@
         <p:spPr>
           <a:xfrm>
             <a:off x="504000" y="1440000"/>
-            <a:ext cx="9071640" cy="3509640"/>
+            <a:ext cx="9070920" cy="3508920"/>
           </a:xfrm>
           <a:prstGeom prst="rect">
             <a:avLst/>
@@ -1734,7 +1734,7 @@
         <p:spPr>
           <a:xfrm>
             <a:off x="504000" y="5130000"/>
-            <a:ext cx="2339640" cy="242640"/>
+            <a:ext cx="2338920" cy="242640"/>
           </a:xfrm>
           <a:prstGeom prst="rect">
             <a:avLst/>
@@ -1812,7 +1812,7 @@
         <p:spPr>
           <a:xfrm>
             <a:off x="3420000" y="5130000"/>
-            <a:ext cx="3239640" cy="242640"/>
+            <a:ext cx="3238920" cy="242640"/>
           </a:xfrm>
           <a:prstGeom prst="rect">
             <a:avLst/>
@@ -1890,7 +1890,7 @@
         <p:spPr>
           <a:xfrm>
             <a:off x="7236000" y="5130000"/>
-            <a:ext cx="2339640" cy="213840"/>
+            <a:ext cx="2338920" cy="213840"/>
           </a:xfrm>
           <a:prstGeom prst="rect">
             <a:avLst/>
@@ -1933,7 +1933,7 @@
                 <a:tab algn="l" pos="0"/>
               </a:tabLst>
             </a:pPr>
-            <a:fld id="{C48764CE-3B7A-40EF-898E-E96CCB89BD62}" type="slidenum">
+            <a:fld id="{100E5225-8F7F-45C2-B220-C93DCF8E7671}" type="slidenum">
               <a:rPr b="0" lang="ru-RU" sz="1400" strike="noStrike" u="none">
                 <a:solidFill>
                   <a:srgbClr val="484848"/>
@@ -1985,8 +1985,8 @@
         </p:nvSpPr>
         <p:spPr>
           <a:xfrm flipV="1">
-            <a:off x="0" y="-720"/>
-            <a:ext cx="10079640" cy="1079640"/>
+            <a:off x="0" y="-1440"/>
+            <a:ext cx="10078920" cy="1078920"/>
           </a:xfrm>
           <a:prstGeom prst="rect">
             <a:avLst/>
@@ -2049,7 +2049,7 @@
         <p:spPr>
           <a:xfrm>
             <a:off x="504000" y="90000"/>
-            <a:ext cx="9071640" cy="989640"/>
+            <a:ext cx="9070920" cy="988920"/>
           </a:xfrm>
           <a:prstGeom prst="rect">
             <a:avLst/>
@@ -2108,7 +2108,7 @@
         <p:spPr>
           <a:xfrm>
             <a:off x="504000" y="1440000"/>
-            <a:ext cx="9071640" cy="3509640"/>
+            <a:ext cx="9070920" cy="3508920"/>
           </a:xfrm>
           <a:prstGeom prst="rect">
             <a:avLst/>
@@ -2382,7 +2382,7 @@
         <p:spPr>
           <a:xfrm>
             <a:off x="504000" y="5130000"/>
-            <a:ext cx="2339640" cy="242640"/>
+            <a:ext cx="2338920" cy="242640"/>
           </a:xfrm>
           <a:prstGeom prst="rect">
             <a:avLst/>
@@ -2460,7 +2460,7 @@
         <p:spPr>
           <a:xfrm>
             <a:off x="3420000" y="5130000"/>
-            <a:ext cx="3239640" cy="242640"/>
+            <a:ext cx="3238920" cy="242640"/>
           </a:xfrm>
           <a:prstGeom prst="rect">
             <a:avLst/>
@@ -2538,7 +2538,7 @@
         <p:spPr>
           <a:xfrm>
             <a:off x="7236000" y="5130000"/>
-            <a:ext cx="2339640" cy="213840"/>
+            <a:ext cx="2338920" cy="213840"/>
           </a:xfrm>
           <a:prstGeom prst="rect">
             <a:avLst/>
@@ -2581,7 +2581,7 @@
                 <a:tab algn="l" pos="0"/>
               </a:tabLst>
             </a:pPr>
-            <a:fld id="{AECB2200-D01D-494F-944C-3261404F8EF6}" type="slidenum">
+            <a:fld id="{291CC93D-5EB4-45A4-A0F6-11D0BA5EDF06}" type="slidenum">
               <a:rPr b="0" lang="ru-RU" sz="1400" strike="noStrike" u="none">
                 <a:solidFill>
                   <a:srgbClr val="484848"/>
@@ -2633,8 +2633,8 @@
         </p:nvSpPr>
         <p:spPr>
           <a:xfrm flipV="1">
-            <a:off x="0" y="-720"/>
-            <a:ext cx="10079640" cy="179640"/>
+            <a:off x="0" y="-1440"/>
+            <a:ext cx="10078920" cy="178920"/>
           </a:xfrm>
           <a:prstGeom prst="rect">
             <a:avLst/>
@@ -2697,7 +2697,7 @@
         <p:spPr>
           <a:xfrm>
             <a:off x="504000" y="270000"/>
-            <a:ext cx="9071640" cy="989640"/>
+            <a:ext cx="9070920" cy="988920"/>
           </a:xfrm>
           <a:prstGeom prst="rect">
             <a:avLst/>
@@ -2756,7 +2756,7 @@
         <p:spPr>
           <a:xfrm>
             <a:off x="504000" y="1440000"/>
-            <a:ext cx="9071640" cy="3689640"/>
+            <a:ext cx="9070920" cy="3688920"/>
           </a:xfrm>
           <a:prstGeom prst="rect">
             <a:avLst/>
@@ -3030,7 +3030,7 @@
         <p:spPr>
           <a:xfrm>
             <a:off x="504000" y="5130000"/>
-            <a:ext cx="2339640" cy="242640"/>
+            <a:ext cx="2338920" cy="242640"/>
           </a:xfrm>
           <a:prstGeom prst="rect">
             <a:avLst/>
@@ -3108,7 +3108,7 @@
         <p:spPr>
           <a:xfrm>
             <a:off x="3420000" y="5130000"/>
-            <a:ext cx="3239640" cy="242640"/>
+            <a:ext cx="3238920" cy="242640"/>
           </a:xfrm>
           <a:prstGeom prst="rect">
             <a:avLst/>
@@ -3186,7 +3186,7 @@
         <p:spPr>
           <a:xfrm>
             <a:off x="7236000" y="5130000"/>
-            <a:ext cx="2339640" cy="213840"/>
+            <a:ext cx="2338920" cy="213840"/>
           </a:xfrm>
           <a:prstGeom prst="rect">
             <a:avLst/>
@@ -3229,7 +3229,7 @@
                 <a:tab algn="l" pos="0"/>
               </a:tabLst>
             </a:pPr>
-            <a:fld id="{F7E4A9ED-EC38-4927-91A5-A26C13E9798E}" type="slidenum">
+            <a:fld id="{AB9513BA-0E97-45C8-824C-75CC0F4B9D3E}" type="slidenum">
               <a:rPr b="0" lang="ru-RU" sz="1400" strike="noStrike" u="none">
                 <a:solidFill>
                   <a:srgbClr val="484848"/>
@@ -3260,7 +3260,7 @@
         <p:spPr>
           <a:xfrm>
             <a:off x="0" y="5580000"/>
-            <a:ext cx="10079640" cy="89640"/>
+            <a:ext cx="10078920" cy="88920"/>
           </a:xfrm>
           <a:prstGeom prst="rect">
             <a:avLst/>
@@ -3375,7 +3375,7 @@
         <p:spPr>
           <a:xfrm>
             <a:off x="504000" y="270000"/>
-            <a:ext cx="9071640" cy="3239640"/>
+            <a:ext cx="9070920" cy="3238920"/>
           </a:xfrm>
           <a:prstGeom prst="rect">
             <a:avLst/>
@@ -3448,7 +3448,7 @@
         <p:spPr>
           <a:xfrm>
             <a:off x="504000" y="3870000"/>
-            <a:ext cx="9071640" cy="1247760"/>
+            <a:ext cx="9070920" cy="1248480"/>
           </a:xfrm>
           <a:prstGeom prst="rect">
             <a:avLst/>
@@ -3537,7 +3537,7 @@
         <p:spPr>
           <a:xfrm>
             <a:off x="504000" y="90000"/>
-            <a:ext cx="9071640" cy="989640"/>
+            <a:ext cx="9070920" cy="988920"/>
           </a:xfrm>
           <a:prstGeom prst="rect">
             <a:avLst/>
@@ -3548,14 +3548,31 @@
           </a:ln>
         </p:spPr>
         <p:txBody>
-          <a:bodyPr lIns="0" rIns="0" tIns="0" bIns="0" anchor="b">
-            <a:normAutofit fontScale="85000" lnSpcReduction="19999"/>
+          <a:bodyPr lIns="0" rIns="0" tIns="0" bIns="0" anchor="ctr">
+            <a:normAutofit/>
           </a:bodyPr>
           <a:p>
             <a:pPr indent="0" algn="ctr">
+              <a:lnSpc>
+                <a:spcPct val="100000"/>
+              </a:lnSpc>
               <a:buNone/>
-            </a:pPr>
-            <a:endParaRPr b="0" lang="ru-RU" sz="1800" strike="noStrike" u="none">
+              <a:tabLst>
+                <a:tab algn="l" pos="0"/>
+              </a:tabLst>
+            </a:pPr>
+            <a:r>
+              <a:rPr b="0" lang="ru-RU" sz="4400" strike="noStrike" u="none">
+                <a:solidFill>
+                  <a:srgbClr val="dbf5f9"/>
+                </a:solidFill>
+                <a:effectLst/>
+                <a:uFillTx/>
+                <a:latin typeface="Noto Sans"/>
+              </a:rPr>
+              <a:t>Боевой путь</a:t>
+            </a:r>
+            <a:endParaRPr b="0" lang="ru-RU" sz="4400" strike="noStrike" u="none">
               <a:solidFill>
                 <a:srgbClr val="000000"/>
               </a:solidFill>
@@ -3579,7 +3596,7 @@
         <p:spPr>
           <a:xfrm>
             <a:off x="538200" y="1440000"/>
-            <a:ext cx="5221440" cy="3509640"/>
+            <a:ext cx="5220720" cy="3508920"/>
           </a:xfrm>
           <a:prstGeom prst="rect">
             <a:avLst/>
@@ -3595,6 +3612,9 @@
           </a:bodyPr>
           <a:p>
             <a:pPr marL="432000" indent="-324000">
+              <a:lnSpc>
+                <a:spcPct val="100000"/>
+              </a:lnSpc>
               <a:spcBef>
                 <a:spcPts val="1417"/>
               </a:spcBef>
@@ -3606,17 +3626,131 @@
               <a:buChar char=""/>
             </a:pPr>
             <a:r>
-              <a:rPr b="0" lang="ru-RU" sz="2600" strike="noStrike" u="none">
+              <a:rPr b="1" lang="ru-RU" sz="2400" strike="noStrike" u="none">
                 <a:solidFill>
                   <a:srgbClr val="000000"/>
                 </a:solidFill>
                 <a:effectLst/>
                 <a:uFillTx/>
-                <a:latin typeface="Arial"/>
-              </a:rPr>
-              <a:t>Место службы: 828 </a:t>
-            </a:r>
-            <a:endParaRPr b="0" lang="ru-RU" sz="2600" strike="noStrike" u="none">
+                <a:latin typeface="Noto Sans"/>
+              </a:rPr>
+              <a:t>Старший сержант</a:t>
+            </a:r>
+            <a:r>
+              <a:rPr b="0" lang="ru-RU" sz="2400" strike="noStrike" u="none">
+                <a:solidFill>
+                  <a:srgbClr val="000000"/>
+                </a:solidFill>
+                <a:effectLst/>
+                <a:uFillTx/>
+                <a:latin typeface="Noto Sans"/>
+              </a:rPr>
+              <a:t> технической службы</a:t>
+            </a:r>
+            <a:endParaRPr b="0" lang="ru-RU" sz="2400" strike="noStrike" u="none">
+              <a:solidFill>
+                <a:srgbClr val="000000"/>
+              </a:solidFill>
+              <a:effectLst/>
+              <a:uFillTx/>
+              <a:latin typeface="Arial"/>
+            </a:endParaRPr>
+          </a:p>
+          <a:p>
+            <a:pPr marL="432000" indent="-324000">
+              <a:lnSpc>
+                <a:spcPct val="100000"/>
+              </a:lnSpc>
+              <a:spcBef>
+                <a:spcPts val="1417"/>
+              </a:spcBef>
+              <a:buClr>
+                <a:srgbClr val="000000"/>
+              </a:buClr>
+              <a:buSzPct val="45000"/>
+              <a:buFont typeface="Wingdings" charset="2"/>
+              <a:buChar char=""/>
+            </a:pPr>
+            <a:r>
+              <a:rPr b="1" lang="ru-RU" sz="2400" strike="noStrike" u="none">
+                <a:solidFill>
+                  <a:srgbClr val="000000"/>
+                </a:solidFill>
+                <a:effectLst/>
+                <a:uFillTx/>
+                <a:latin typeface="Noto Sans"/>
+              </a:rPr>
+              <a:t>828 </a:t>
+            </a:r>
+            <a:r>
+              <a:rPr b="0" lang="ru-RU" sz="2400" strike="noStrike" u="none">
+                <a:solidFill>
+                  <a:srgbClr val="000000"/>
+                </a:solidFill>
+                <a:effectLst/>
+                <a:uFillTx/>
+                <a:latin typeface="Noto Sans"/>
+              </a:rPr>
+              <a:t>штурмовой авиационный полк </a:t>
+            </a:r>
+            <a:r>
+              <a:rPr b="1" lang="ru-RU" sz="2400" strike="noStrike" u="none">
+                <a:solidFill>
+                  <a:srgbClr val="000000"/>
+                </a:solidFill>
+                <a:effectLst/>
+                <a:uFillTx/>
+                <a:latin typeface="Noto Sans"/>
+              </a:rPr>
+              <a:t>260 </a:t>
+            </a:r>
+            <a:r>
+              <a:rPr b="0" lang="ru-RU" sz="2400" strike="noStrike" u="none">
+                <a:solidFill>
+                  <a:srgbClr val="000000"/>
+                </a:solidFill>
+                <a:effectLst/>
+                <a:uFillTx/>
+                <a:latin typeface="Noto Sans"/>
+              </a:rPr>
+              <a:t>штурмовой авиационной дивизии</a:t>
+            </a:r>
+            <a:endParaRPr b="0" lang="ru-RU" sz="2400" strike="noStrike" u="none">
+              <a:solidFill>
+                <a:srgbClr val="000000"/>
+              </a:solidFill>
+              <a:effectLst/>
+              <a:uFillTx/>
+              <a:latin typeface="Arial"/>
+            </a:endParaRPr>
+          </a:p>
+          <a:p>
+            <a:pPr marL="432000" indent="-324000">
+              <a:lnSpc>
+                <a:spcPct val="100000"/>
+              </a:lnSpc>
+              <a:spcBef>
+                <a:spcPts val="1417"/>
+              </a:spcBef>
+              <a:buClr>
+                <a:srgbClr val="000000"/>
+              </a:buClr>
+              <a:buSzPct val="45000"/>
+              <a:buFont typeface="Wingdings" charset="2"/>
+              <a:buChar char=""/>
+            </a:pPr>
+            <a:r>
+              <a:rPr b="0" lang="ru-RU" sz="2400" strike="noStrike" u="none">
+                <a:solidFill>
+                  <a:srgbClr val="000000"/>
+                </a:solidFill>
+                <a:effectLst/>
+                <a:uFillTx/>
+                <a:latin typeface="Noto Sans"/>
+              </a:rPr>
+              <a:t>Второй Белорусский Фронт</a:t>
+            </a:r>
+            <a:endParaRPr b="0" lang="ru-RU" sz="2400" strike="noStrike" u="none">
               <a:solidFill>
                 <a:srgbClr val="000000"/>
               </a:solidFill>
@@ -3627,23 +3761,29 @@
           </a:p>
           <a:p>
             <a:pPr marL="432000" indent="0">
+              <a:lnSpc>
+                <a:spcPct val="100000"/>
+              </a:lnSpc>
               <a:spcBef>
                 <a:spcPts val="1417"/>
               </a:spcBef>
               <a:buNone/>
-            </a:pPr>
-            <a:r>
-              <a:rPr b="0" lang="ru-RU" sz="3200" strike="noStrike" u="none">
+              <a:tabLst>
+                <a:tab algn="l" pos="0"/>
+              </a:tabLst>
+            </a:pPr>
+            <a:r>
+              <a:rPr b="0" lang="ru-RU" sz="2600" strike="noStrike" u="none">
                 <a:solidFill>
                   <a:srgbClr val="000000"/>
                 </a:solidFill>
                 <a:effectLst/>
                 <a:uFillTx/>
-                <a:latin typeface="Arial"/>
+                <a:latin typeface="Noto Sans"/>
               </a:rPr>
               <a:t> </a:t>
             </a:r>
-            <a:endParaRPr b="0" lang="ru-RU" sz="3200" strike="noStrike" u="none">
+            <a:endParaRPr b="0" lang="ru-RU" sz="2600" strike="noStrike" u="none">
               <a:solidFill>
                 <a:srgbClr val="000000"/>
               </a:solidFill>
@@ -3667,7 +3807,7 @@
         <p:spPr>
           <a:xfrm>
             <a:off x="6235200" y="1260000"/>
-            <a:ext cx="3124440" cy="4074840"/>
+            <a:ext cx="3123720" cy="4074120"/>
           </a:xfrm>
           <a:prstGeom prst="rect">
             <a:avLst/>
@@ -3721,7 +3861,7 @@
         <p:spPr>
           <a:xfrm>
             <a:off x="504000" y="90000"/>
-            <a:ext cx="9071640" cy="989640"/>
+            <a:ext cx="9070920" cy="988920"/>
           </a:xfrm>
           <a:prstGeom prst="rect">
             <a:avLst/>
@@ -3737,7 +3877,13 @@
           </a:bodyPr>
           <a:p>
             <a:pPr indent="0" algn="ctr">
+              <a:lnSpc>
+                <a:spcPct val="100000"/>
+              </a:lnSpc>
               <a:buNone/>
+              <a:tabLst>
+                <a:tab algn="l" pos="0"/>
+              </a:tabLst>
             </a:pPr>
             <a:r>
               <a:rPr b="0" lang="ru-RU" sz="4400" strike="noStrike" u="none">
@@ -3752,7 +3898,7 @@
             </a:r>
             <a:endParaRPr b="0" lang="ru-RU" sz="4400" strike="noStrike" u="none">
               <a:solidFill>
-                <a:srgbClr val="c9211e"/>
+                <a:srgbClr val="000000"/>
               </a:solidFill>
               <a:effectLst/>
               <a:uFillTx/>
@@ -3773,8 +3919,8 @@
         </p:blipFill>
         <p:spPr>
           <a:xfrm>
-            <a:off x="720000" y="1440000"/>
-            <a:ext cx="2059200" cy="3600000"/>
+            <a:off x="360000" y="1260360"/>
+            <a:ext cx="1800000" cy="2880000"/>
           </a:xfrm>
           <a:prstGeom prst="rect">
             <a:avLst/>
@@ -3785,21 +3931,95 @@
           </a:ln>
         </p:spPr>
       </p:pic>
-      <p:pic>
-        <p:nvPicPr>
-          <p:cNvPr id="40" name="" descr=""/>
-          <p:cNvPicPr/>
+      <p:sp>
+        <p:nvSpPr>
+          <p:cNvPr id="40" name=""/>
+          <p:cNvSpPr/>
           <p:nvPr/>
-        </p:nvPicPr>
-        <p:blipFill>
-          <a:blip r:embed="rId2"/>
-          <a:srcRect l="4988" t="0" r="0" b="0"/>
-          <a:stretch/>
-        </p:blipFill>
+        </p:nvSpPr>
         <p:spPr>
           <a:xfrm>
-            <a:off x="2880000" y="3600000"/>
-            <a:ext cx="6840720" cy="1616400"/>
+            <a:off x="3060000" y="2524320"/>
+            <a:ext cx="6840000" cy="1615680"/>
+          </a:xfrm>
+          <a:custGeom>
+            <a:avLst/>
+            <a:gdLst>
+              <a:gd name="textAreaLeft" fmla="*/ 0 w 6840000"/>
+              <a:gd name="textAreaRight" fmla="*/ 6840360 w 6840000"/>
+              <a:gd name="textAreaTop" fmla="*/ 0 h 1615680"/>
+              <a:gd name="textAreaBottom" fmla="*/ 1616040 h 1615680"/>
+            </a:gdLst>
+            <a:ahLst/>
+            <a:cxnLst/>
+            <a:rect l="textAreaLeft" t="textAreaTop" r="textAreaRight" b="textAreaBottom"/>
+            <a:pathLst>
+              <a:path w="19001" h="4489">
+                <a:moveTo>
+                  <a:pt x="0" y="4489"/>
+                </a:moveTo>
+                <a:lnTo>
+                  <a:pt x="0" y="0"/>
+                </a:lnTo>
+                <a:lnTo>
+                  <a:pt x="19001" y="0"/>
+                </a:lnTo>
+                <a:lnTo>
+                  <a:pt x="19001" y="4489"/>
+                </a:lnTo>
+                <a:lnTo>
+                  <a:pt x="0" y="4489"/>
+                </a:lnTo>
+                <a:close/>
+              </a:path>
+            </a:pathLst>
+          </a:custGeom>
+          <a:blipFill rotWithShape="0">
+            <a:blip r:embed="rId2"/>
+            <a:srcRect/>
+            <a:stretch/>
+          </a:blipFill>
+          <a:ln w="0">
+            <a:noFill/>
+          </a:ln>
+        </p:spPr>
+        <p:style>
+          <a:lnRef idx="0"/>
+          <a:fillRef idx="0"/>
+          <a:effectRef idx="0"/>
+          <a:fontRef idx="minor"/>
+        </p:style>
+        <p:txBody>
+          <a:bodyPr lIns="90000" rIns="90000" tIns="45000" bIns="45000" anchor="t" anchorCtr="1">
+            <a:noAutofit/>
+          </a:bodyPr>
+          <a:p>
+            <a:pPr>
+              <a:lnSpc>
+                <a:spcPct val="100000"/>
+              </a:lnSpc>
+            </a:pPr>
+            <a:endParaRPr b="0" lang="ru-RU" sz="1800" strike="noStrike" u="none">
+              <a:solidFill>
+                <a:srgbClr val="000000"/>
+              </a:solidFill>
+              <a:effectLst/>
+              <a:uFillTx/>
+              <a:latin typeface="Arial"/>
+            </a:endParaRPr>
+          </a:p>
+        </p:txBody>
+      </p:sp>
+      <p:sp>
+        <p:nvSpPr>
+          <p:cNvPr id="41" name=""/>
+          <p:cNvSpPr/>
+          <p:nvPr/>
+        </p:nvSpPr>
+        <p:spPr>
+          <a:xfrm>
+            <a:off x="360000" y="4361400"/>
+            <a:ext cx="2159640" cy="637920"/>
           </a:xfrm>
           <a:prstGeom prst="rect">
             <a:avLst/>
@@ -3809,7 +4029,101 @@
             <a:noFill/>
           </a:ln>
         </p:spPr>
-      </p:pic>
+        <p:style>
+          <a:lnRef idx="0"/>
+          <a:fillRef idx="0"/>
+          <a:effectRef idx="0"/>
+          <a:fontRef idx="minor"/>
+        </p:style>
+        <p:txBody>
+          <a:bodyPr lIns="90000" rIns="90000" tIns="45000" bIns="45000" anchor="ctr" anchorCtr="1">
+            <a:spAutoFit/>
+          </a:bodyPr>
+          <a:p>
+            <a:pPr algn="ctr">
+              <a:lnSpc>
+                <a:spcPct val="100000"/>
+              </a:lnSpc>
+            </a:pPr>
+            <a:r>
+              <a:rPr b="0" lang="ru-RU" sz="1800" strike="noStrike" u="none">
+                <a:solidFill>
+                  <a:srgbClr val="000000"/>
+                </a:solidFill>
+                <a:effectLst/>
+                <a:uFillTx/>
+                <a:latin typeface="Noto Sans"/>
+              </a:rPr>
+              <a:t>Медаль «За боевые заслуги»</a:t>
+            </a:r>
+            <a:endParaRPr b="0" lang="ru-RU" sz="1800" strike="noStrike" u="none">
+              <a:solidFill>
+                <a:srgbClr val="000000"/>
+              </a:solidFill>
+              <a:effectLst/>
+              <a:uFillTx/>
+              <a:latin typeface="Arial"/>
+            </a:endParaRPr>
+          </a:p>
+        </p:txBody>
+      </p:sp>
+      <p:sp>
+        <p:nvSpPr>
+          <p:cNvPr id="42" name=""/>
+          <p:cNvSpPr/>
+          <p:nvPr/>
+        </p:nvSpPr>
+        <p:spPr>
+          <a:xfrm>
+            <a:off x="3060000" y="4365360"/>
+            <a:ext cx="6840000" cy="365040"/>
+          </a:xfrm>
+          <a:prstGeom prst="rect">
+            <a:avLst/>
+          </a:prstGeom>
+          <a:noFill/>
+          <a:ln w="0">
+            <a:noFill/>
+          </a:ln>
+        </p:spPr>
+        <p:style>
+          <a:lnRef idx="0"/>
+          <a:fillRef idx="0"/>
+          <a:effectRef idx="0"/>
+          <a:fontRef idx="minor"/>
+        </p:style>
+        <p:txBody>
+          <a:bodyPr lIns="90000" rIns="90000" tIns="45000" bIns="45000" anchor="ctr" anchorCtr="1">
+            <a:spAutoFit/>
+          </a:bodyPr>
+          <a:p>
+            <a:pPr algn="ctr">
+              <a:lnSpc>
+                <a:spcPct val="100000"/>
+              </a:lnSpc>
+            </a:pPr>
+            <a:r>
+              <a:rPr b="0" lang="ru-RU" sz="1800" strike="noStrike" u="none">
+                <a:solidFill>
+                  <a:srgbClr val="000000"/>
+                </a:solidFill>
+                <a:effectLst/>
+                <a:uFillTx/>
+                <a:latin typeface="Noto Sans"/>
+              </a:rPr>
+              <a:t>Фрагменты документа о награждении</a:t>
+            </a:r>
+            <a:endParaRPr b="0" lang="ru-RU" sz="1800" strike="noStrike" u="none">
+              <a:solidFill>
+                <a:srgbClr val="000000"/>
+              </a:solidFill>
+              <a:effectLst/>
+              <a:uFillTx/>
+              <a:latin typeface="Arial"/>
+            </a:endParaRPr>
+          </a:p>
+        </p:txBody>
+      </p:sp>
     </p:spTree>
   </p:cSld>
   <mc:AlternateContent>
@@ -3842,7 +4156,7 @@
       </p:grpSpPr>
       <p:sp>
         <p:nvSpPr>
-          <p:cNvPr id="41" name="PlaceHolder 1"/>
+          <p:cNvPr id="43" name="PlaceHolder 1"/>
           <p:cNvSpPr>
             <a:spLocks noGrp="1"/>
           </p:cNvSpPr>
@@ -3853,7 +4167,7 @@
         <p:spPr>
           <a:xfrm>
             <a:off x="504000" y="90000"/>
-            <a:ext cx="9071640" cy="989640"/>
+            <a:ext cx="9070920" cy="988920"/>
           </a:xfrm>
           <a:prstGeom prst="rect">
             <a:avLst/>
@@ -3869,7 +4183,13 @@
           </a:bodyPr>
           <a:p>
             <a:pPr indent="0" algn="ctr">
+              <a:lnSpc>
+                <a:spcPct val="100000"/>
+              </a:lnSpc>
               <a:buNone/>
+              <a:tabLst>
+                <a:tab algn="l" pos="0"/>
+              </a:tabLst>
             </a:pPr>
             <a:r>
               <a:rPr b="0" lang="ru-RU" sz="4400" strike="noStrike" u="none">
@@ -3884,7 +4204,7 @@
             </a:r>
             <a:endParaRPr b="0" lang="ru-RU" sz="4400" strike="noStrike" u="none">
               <a:solidFill>
-                <a:srgbClr val="c9211e"/>
+                <a:srgbClr val="000000"/>
               </a:solidFill>
               <a:effectLst/>
               <a:uFillTx/>
@@ -3895,7 +4215,7 @@
       </p:sp>
       <p:pic>
         <p:nvPicPr>
-          <p:cNvPr id="42" name="" descr=""/>
+          <p:cNvPr id="44" name="" descr=""/>
           <p:cNvPicPr/>
           <p:nvPr/>
         </p:nvPicPr>
@@ -3905,8 +4225,8 @@
         </p:blipFill>
         <p:spPr>
           <a:xfrm>
-            <a:off x="1080000" y="1620000"/>
-            <a:ext cx="2073600" cy="3600000"/>
+            <a:off x="540360" y="1262880"/>
+            <a:ext cx="1798920" cy="2879640"/>
           </a:xfrm>
           <a:prstGeom prst="rect">
             <a:avLst/>
@@ -3919,7 +4239,7 @@
       </p:pic>
       <p:pic>
         <p:nvPicPr>
-          <p:cNvPr id="43" name="" descr=""/>
+          <p:cNvPr id="45" name="" descr=""/>
           <p:cNvPicPr/>
           <p:nvPr/>
         </p:nvPicPr>
@@ -3929,8 +4249,8 @@
         </p:blipFill>
         <p:spPr>
           <a:xfrm>
-            <a:off x="3240000" y="4786200"/>
-            <a:ext cx="6480000" cy="433800"/>
+            <a:off x="3240000" y="3706560"/>
+            <a:ext cx="6479280" cy="433080"/>
           </a:xfrm>
           <a:prstGeom prst="rect">
             <a:avLst/>
@@ -3943,7 +4263,7 @@
       </p:pic>
       <p:pic>
         <p:nvPicPr>
-          <p:cNvPr id="44" name="" descr=""/>
+          <p:cNvPr id="46" name="" descr=""/>
           <p:cNvPicPr/>
           <p:nvPr/>
         </p:nvPicPr>
@@ -3953,8 +4273,8 @@
         </p:blipFill>
         <p:spPr>
           <a:xfrm>
-            <a:off x="3240000" y="2615400"/>
-            <a:ext cx="6480000" cy="2170800"/>
+            <a:off x="3240000" y="1429560"/>
+            <a:ext cx="6479280" cy="2170080"/>
           </a:xfrm>
           <a:prstGeom prst="rect">
             <a:avLst/>
@@ -3965,6 +4285,126 @@
           </a:ln>
         </p:spPr>
       </p:pic>
+      <p:sp>
+        <p:nvSpPr>
+          <p:cNvPr id="47" name=""/>
+          <p:cNvSpPr/>
+          <p:nvPr/>
+        </p:nvSpPr>
+        <p:spPr>
+          <a:xfrm>
+            <a:off x="360000" y="4284360"/>
+            <a:ext cx="2160000" cy="1154880"/>
+          </a:xfrm>
+          <a:prstGeom prst="rect">
+            <a:avLst/>
+          </a:prstGeom>
+          <a:noFill/>
+          <a:ln w="0">
+            <a:noFill/>
+          </a:ln>
+        </p:spPr>
+        <p:style>
+          <a:lnRef idx="0"/>
+          <a:fillRef idx="0"/>
+          <a:effectRef idx="0"/>
+          <a:fontRef idx="minor"/>
+        </p:style>
+        <p:txBody>
+          <a:bodyPr lIns="90000" rIns="90000" tIns="45000" bIns="45000" anchor="ctr" anchorCtr="1">
+            <a:spAutoFit/>
+          </a:bodyPr>
+          <a:p>
+            <a:pPr algn="ctr">
+              <a:lnSpc>
+                <a:spcPct val="100000"/>
+              </a:lnSpc>
+              <a:spcBef>
+                <a:spcPts val="1191"/>
+              </a:spcBef>
+              <a:spcAft>
+                <a:spcPts val="992"/>
+              </a:spcAft>
+            </a:pPr>
+            <a:r>
+              <a:rPr b="0" lang="ru-RU" sz="1400" strike="noStrike" u="none">
+                <a:solidFill>
+                  <a:srgbClr val="000000"/>
+                </a:solidFill>
+                <a:effectLst/>
+                <a:uFillTx/>
+                <a:latin typeface="Noto Sans"/>
+              </a:rPr>
+              <a:t>Медаль «За победу над Германией в Великой Отечественной войне 1941–1945 гг.» </a:t>
+            </a:r>
+            <a:endParaRPr b="0" lang="ru-RU" sz="1400" strike="noStrike" u="none">
+              <a:solidFill>
+                <a:srgbClr val="000000"/>
+              </a:solidFill>
+              <a:effectLst/>
+              <a:uFillTx/>
+              <a:latin typeface="Arial"/>
+            </a:endParaRPr>
+          </a:p>
+        </p:txBody>
+      </p:sp>
+      <p:sp>
+        <p:nvSpPr>
+          <p:cNvPr id="48" name=""/>
+          <p:cNvSpPr/>
+          <p:nvPr/>
+        </p:nvSpPr>
+        <p:spPr>
+          <a:xfrm>
+            <a:off x="3240360" y="4322880"/>
+            <a:ext cx="6479640" cy="1076760"/>
+          </a:xfrm>
+          <a:prstGeom prst="rect">
+            <a:avLst/>
+          </a:prstGeom>
+          <a:noFill/>
+          <a:ln w="0">
+            <a:noFill/>
+          </a:ln>
+        </p:spPr>
+        <p:style>
+          <a:lnRef idx="0"/>
+          <a:fillRef idx="0"/>
+          <a:effectRef idx="0"/>
+          <a:fontRef idx="minor"/>
+        </p:style>
+        <p:txBody>
+          <a:bodyPr lIns="90000" rIns="90000" tIns="45000" bIns="45000" anchor="ctr" anchorCtr="1">
+            <a:spAutoFit/>
+          </a:bodyPr>
+          <a:p>
+            <a:pPr algn="ctr">
+              <a:lnSpc>
+                <a:spcPct val="100000"/>
+              </a:lnSpc>
+            </a:pPr>
+            <a:r>
+              <a:rPr b="0" lang="ru-RU" sz="1800" strike="noStrike" u="none">
+                <a:solidFill>
+                  <a:srgbClr val="000000"/>
+                </a:solidFill>
+                <a:effectLst/>
+                <a:uFillTx/>
+                <a:latin typeface="Noto Sans"/>
+              </a:rPr>
+              <a:t>Фрагменты документа о награждении</a:t>
+            </a:r>
+            <a:endParaRPr b="0" lang="ru-RU" sz="1800" strike="noStrike" u="none">
+              <a:solidFill>
+                <a:srgbClr val="000000"/>
+              </a:solidFill>
+              <a:effectLst/>
+              <a:uFillTx/>
+              <a:latin typeface="Arial"/>
+            </a:endParaRPr>
+          </a:p>
+        </p:txBody>
+      </p:sp>
     </p:spTree>
   </p:cSld>
   <mc:AlternateContent>
@@ -3997,18 +4437,18 @@
       </p:grpSpPr>
       <p:sp>
         <p:nvSpPr>
-          <p:cNvPr id="45" name="PlaceHolder 1"/>
+          <p:cNvPr id="49" name="PlaceHolder 1"/>
           <p:cNvSpPr>
             <a:spLocks noGrp="1"/>
           </p:cNvSpPr>
           <p:nvPr>
-            <p:ph type="subTitle"/>
+            <p:ph type="title"/>
           </p:nvPr>
         </p:nvSpPr>
         <p:spPr>
           <a:xfrm>
-            <a:off x="504000" y="630360"/>
-            <a:ext cx="9071640" cy="4389120"/>
+            <a:off x="504000" y="90000"/>
+            <a:ext cx="9070920" cy="988920"/>
           </a:xfrm>
           <a:prstGeom prst="rect">
             <a:avLst/>
@@ -4023,8 +4463,109 @@
             <a:spAutoFit/>
           </a:bodyPr>
           <a:p>
-            <a:pPr algn="ctr"/>
-            <a:endParaRPr b="0" lang="ru-RU" sz="1800" strike="noStrike" u="none">
+            <a:pPr indent="0" algn="ctr">
+              <a:buNone/>
+            </a:pPr>
+            <a:r>
+              <a:rPr b="0" lang="ru-RU" sz="4400" strike="noStrike" u="none">
+                <a:solidFill>
+                  <a:srgbClr val="dbf5f9"/>
+                </a:solidFill>
+                <a:effectLst/>
+                <a:uFillTx/>
+                <a:latin typeface="Noto Sans"/>
+              </a:rPr>
+              <a:t>Источники</a:t>
+            </a:r>
+            <a:endParaRPr b="0" lang="ru-RU" sz="4400" strike="noStrike" u="none">
+              <a:solidFill>
+                <a:srgbClr val="dbf5f9"/>
+              </a:solidFill>
+              <a:effectLst/>
+              <a:uFillTx/>
+              <a:latin typeface="Noto Sans"/>
+            </a:endParaRPr>
+          </a:p>
+        </p:txBody>
+      </p:sp>
+      <p:sp>
+        <p:nvSpPr>
+          <p:cNvPr id="50" name="PlaceHolder 2"/>
+          <p:cNvSpPr>
+            <a:spLocks noGrp="1"/>
+          </p:cNvSpPr>
+          <p:nvPr>
+            <p:ph/>
+          </p:nvPr>
+        </p:nvSpPr>
+        <p:spPr>
+          <a:xfrm>
+            <a:off x="504000" y="1440000"/>
+            <a:ext cx="9070920" cy="3508920"/>
+          </a:xfrm>
+          <a:prstGeom prst="rect">
+            <a:avLst/>
+          </a:prstGeom>
+          <a:noFill/>
+          <a:ln w="0">
+            <a:noFill/>
+          </a:ln>
+        </p:spPr>
+        <p:txBody>
+          <a:bodyPr lIns="0" rIns="0" tIns="0" bIns="0" anchor="t">
+            <a:normAutofit/>
+          </a:bodyPr>
+          <a:p>
+            <a:pPr marL="432000" indent="-324000">
+              <a:spcBef>
+                <a:spcPts val="1417"/>
+              </a:spcBef>
+              <a:buClr>
+                <a:srgbClr val="000000"/>
+              </a:buClr>
+              <a:buSzPct val="45000"/>
+              <a:buFont typeface="Wingdings" charset="2"/>
+              <a:buChar char=""/>
+            </a:pPr>
+            <a:r>
+              <a:rPr b="0" lang="ru-RU" sz="3200" strike="noStrike" u="none">
+                <a:solidFill>
+                  <a:srgbClr val="000000"/>
+                </a:solidFill>
+                <a:effectLst/>
+                <a:uFillTx/>
+                <a:latin typeface="Noto Sans"/>
+              </a:rPr>
+              <a:t>https://podvignaroda.ru/</a:t>
+            </a:r>
+            <a:endParaRPr b="0" lang="ru-RU" sz="3200" strike="noStrike" u="none">
+              <a:solidFill>
+                <a:srgbClr val="000000"/>
+              </a:solidFill>
+              <a:effectLst/>
+              <a:uFillTx/>
+              <a:latin typeface="Arial"/>
+            </a:endParaRPr>
+          </a:p>
+          <a:p>
+            <a:pPr marL="432000" indent="0">
+              <a:spcBef>
+                <a:spcPts val="1417"/>
+              </a:spcBef>
+              <a:buNone/>
+            </a:pPr>
+            <a:r>
+              <a:rPr b="0" lang="ru-RU" sz="3200" strike="noStrike" u="none">
+                <a:solidFill>
+                  <a:srgbClr val="000000"/>
+                </a:solidFill>
+                <a:effectLst/>
+                <a:uFillTx/>
+                <a:latin typeface="Arial"/>
+              </a:rPr>
+              <a:t> </a:t>
+            </a:r>
+            <a:endParaRPr b="0" lang="ru-RU" sz="3200" strike="noStrike" u="none">
               <a:solidFill>
                 <a:srgbClr val="000000"/>
               </a:solidFill>

--- a/Основы Российской Государственности/Кочкин Виталий Васильевич.pptx
+++ b/Основы Российской Государственности/Кочкин Виталий Васильевич.pptx
@@ -10,6 +10,7 @@
     <p:sldId id="258" r:id="rId5"/>
     <p:sldId id="259" r:id="rId6"/>
     <p:sldId id="260" r:id="rId7"/>
+    <p:sldId id="261" r:id="rId8"/>
   </p:sldIdLst>
   <p:sldSz cx="10080625" cy="5670550"/>
   <p:notesSz cx="7559675" cy="10691813"/>
@@ -42,7 +43,7 @@
         <p:spPr>
           <a:xfrm>
             <a:off x="0" y="3780000"/>
-            <a:ext cx="10078920" cy="1888920"/>
+            <a:ext cx="10078200" cy="1888200"/>
           </a:xfrm>
           <a:prstGeom prst="rect">
             <a:avLst/>
@@ -105,7 +106,7 @@
         <p:spPr>
           <a:xfrm>
             <a:off x="504000" y="5130000"/>
-            <a:ext cx="2338920" cy="242640"/>
+            <a:ext cx="2338200" cy="242640"/>
           </a:xfrm>
           <a:prstGeom prst="rect">
             <a:avLst/>
@@ -157,7 +158,7 @@
                 <a:uFillTx/>
                 <a:latin typeface="Noto Sans"/>
               </a:rPr>
-              <a:t> </a:t>
+              <a:t>&lt;дата/время&gt;</a:t>
             </a:r>
             <a:endParaRPr b="0" lang="ru-RU" sz="1400" strike="noStrike" u="none">
               <a:solidFill>
@@ -183,7 +184,7 @@
         <p:spPr>
           <a:xfrm>
             <a:off x="3420000" y="5130000"/>
-            <a:ext cx="3238920" cy="242640"/>
+            <a:ext cx="3238200" cy="242640"/>
           </a:xfrm>
           <a:prstGeom prst="rect">
             <a:avLst/>
@@ -235,7 +236,7 @@
                 <a:uFillTx/>
                 <a:latin typeface="Noto Sans"/>
               </a:rPr>
-              <a:t> </a:t>
+              <a:t>&lt;нижний колонтитул&gt;</a:t>
             </a:r>
             <a:endParaRPr b="0" lang="ru-RU" sz="1400" strike="noStrike" u="none">
               <a:solidFill>
@@ -261,7 +262,7 @@
         <p:spPr>
           <a:xfrm>
             <a:off x="7236000" y="5130000"/>
-            <a:ext cx="2338920" cy="213840"/>
+            <a:ext cx="2338200" cy="213840"/>
           </a:xfrm>
           <a:prstGeom prst="rect">
             <a:avLst/>
@@ -304,7 +305,7 @@
                 <a:tab algn="l" pos="0"/>
               </a:tabLst>
             </a:pPr>
-            <a:fld id="{F660F7BB-E6E5-4DD9-833E-062FD8CBAA43}" type="slidenum">
+            <a:fld id="{6B26AC30-A83E-4E11-BD78-A35ED511FB74}" type="slidenum">
               <a:rPr b="0" lang="ru-RU" sz="1400" strike="noStrike" u="none">
                 <a:solidFill>
                   <a:srgbClr val="dbf5f9"/>
@@ -313,7 +314,7 @@
                 <a:uFillTx/>
                 <a:latin typeface="Noto Sans"/>
               </a:rPr>
-              <a:t>2</a:t>
+              <a:t>&lt;номер&gt;</a:t>
             </a:fld>
             <a:endParaRPr b="0" lang="ru-RU" sz="1400" strike="noStrike" u="none">
               <a:solidFill>
@@ -339,7 +340,7 @@
         <p:spPr>
           <a:xfrm>
             <a:off x="504000" y="270000"/>
-            <a:ext cx="9070920" cy="3238920"/>
+            <a:ext cx="9070200" cy="3238200"/>
           </a:xfrm>
           <a:prstGeom prst="rect">
             <a:avLst/>
@@ -398,7 +399,7 @@
         <p:spPr>
           <a:xfrm>
             <a:off x="504000" y="3870000"/>
-            <a:ext cx="9070920" cy="1168920"/>
+            <a:ext cx="9070200" cy="1168200"/>
           </a:xfrm>
           <a:prstGeom prst="rect">
             <a:avLst/>
@@ -690,7 +691,7 @@
         <p:spPr>
           <a:xfrm>
             <a:off x="0" y="3780000"/>
-            <a:ext cx="10078920" cy="1888920"/>
+            <a:ext cx="10078200" cy="1888200"/>
           </a:xfrm>
           <a:prstGeom prst="rect">
             <a:avLst/>
@@ -753,7 +754,7 @@
         <p:spPr>
           <a:xfrm>
             <a:off x="504000" y="5130000"/>
-            <a:ext cx="2338920" cy="242640"/>
+            <a:ext cx="2338200" cy="242640"/>
           </a:xfrm>
           <a:prstGeom prst="rect">
             <a:avLst/>
@@ -831,7 +832,7 @@
         <p:spPr>
           <a:xfrm>
             <a:off x="3420000" y="5130000"/>
-            <a:ext cx="3238920" cy="242640"/>
+            <a:ext cx="3238200" cy="242640"/>
           </a:xfrm>
           <a:prstGeom prst="rect">
             <a:avLst/>
@@ -909,7 +910,7 @@
         <p:spPr>
           <a:xfrm>
             <a:off x="7236000" y="5130000"/>
-            <a:ext cx="2338920" cy="213840"/>
+            <a:ext cx="2338200" cy="213840"/>
           </a:xfrm>
           <a:prstGeom prst="rect">
             <a:avLst/>
@@ -952,7 +953,7 @@
                 <a:tab algn="l" pos="0"/>
               </a:tabLst>
             </a:pPr>
-            <a:fld id="{63D9D19C-4F20-4CFE-A2E3-B8102AC63086}" type="slidenum">
+            <a:fld id="{2E488ECF-B116-45D8-A819-C5C3ABAA636B}" type="slidenum">
               <a:rPr b="0" lang="ru-RU" sz="1400" strike="noStrike" u="none">
                 <a:solidFill>
                   <a:srgbClr val="dbf5f9"/>
@@ -987,7 +988,7 @@
         <p:spPr>
           <a:xfrm>
             <a:off x="504000" y="270000"/>
-            <a:ext cx="9070920" cy="3238920"/>
+            <a:ext cx="9070200" cy="3238200"/>
           </a:xfrm>
           <a:prstGeom prst="rect">
             <a:avLst/>
@@ -1046,7 +1047,7 @@
         <p:spPr>
           <a:xfrm>
             <a:off x="504000" y="3870000"/>
-            <a:ext cx="9070920" cy="1168920"/>
+            <a:ext cx="9070200" cy="1168200"/>
           </a:xfrm>
           <a:prstGeom prst="rect">
             <a:avLst/>
@@ -1337,8 +1338,8 @@
         </p:nvSpPr>
         <p:spPr>
           <a:xfrm flipV="1">
-            <a:off x="0" y="-1440"/>
-            <a:ext cx="10078920" cy="1078920"/>
+            <a:off x="0" y="-2160"/>
+            <a:ext cx="10078200" cy="1078200"/>
           </a:xfrm>
           <a:prstGeom prst="rect">
             <a:avLst/>
@@ -1401,7 +1402,7 @@
         <p:spPr>
           <a:xfrm>
             <a:off x="504000" y="90000"/>
-            <a:ext cx="9070920" cy="988920"/>
+            <a:ext cx="9070200" cy="988200"/>
           </a:xfrm>
           <a:prstGeom prst="rect">
             <a:avLst/>
@@ -1460,7 +1461,7 @@
         <p:spPr>
           <a:xfrm>
             <a:off x="504000" y="1440000"/>
-            <a:ext cx="9070920" cy="3508920"/>
+            <a:ext cx="9070200" cy="3508200"/>
           </a:xfrm>
           <a:prstGeom prst="rect">
             <a:avLst/>
@@ -1734,7 +1735,7 @@
         <p:spPr>
           <a:xfrm>
             <a:off x="504000" y="5130000"/>
-            <a:ext cx="2338920" cy="242640"/>
+            <a:ext cx="2338200" cy="242640"/>
           </a:xfrm>
           <a:prstGeom prst="rect">
             <a:avLst/>
@@ -1812,7 +1813,7 @@
         <p:spPr>
           <a:xfrm>
             <a:off x="3420000" y="5130000"/>
-            <a:ext cx="3238920" cy="242640"/>
+            <a:ext cx="3238200" cy="242640"/>
           </a:xfrm>
           <a:prstGeom prst="rect">
             <a:avLst/>
@@ -1890,7 +1891,7 @@
         <p:spPr>
           <a:xfrm>
             <a:off x="7236000" y="5130000"/>
-            <a:ext cx="2338920" cy="213840"/>
+            <a:ext cx="2338200" cy="213840"/>
           </a:xfrm>
           <a:prstGeom prst="rect">
             <a:avLst/>
@@ -1933,7 +1934,7 @@
                 <a:tab algn="l" pos="0"/>
               </a:tabLst>
             </a:pPr>
-            <a:fld id="{100E5225-8F7F-45C2-B220-C93DCF8E7671}" type="slidenum">
+            <a:fld id="{F828ABD4-2627-4300-BE52-6CF736F2CFB9}" type="slidenum">
               <a:rPr b="0" lang="ru-RU" sz="1400" strike="noStrike" u="none">
                 <a:solidFill>
                   <a:srgbClr val="484848"/>
@@ -1985,8 +1986,8 @@
         </p:nvSpPr>
         <p:spPr>
           <a:xfrm flipV="1">
-            <a:off x="0" y="-1440"/>
-            <a:ext cx="10078920" cy="1078920"/>
+            <a:off x="0" y="-2160"/>
+            <a:ext cx="10078200" cy="1078200"/>
           </a:xfrm>
           <a:prstGeom prst="rect">
             <a:avLst/>
@@ -2049,7 +2050,7 @@
         <p:spPr>
           <a:xfrm>
             <a:off x="504000" y="90000"/>
-            <a:ext cx="9070920" cy="988920"/>
+            <a:ext cx="9070200" cy="988200"/>
           </a:xfrm>
           <a:prstGeom prst="rect">
             <a:avLst/>
@@ -2108,7 +2109,7 @@
         <p:spPr>
           <a:xfrm>
             <a:off x="504000" y="1440000"/>
-            <a:ext cx="9070920" cy="3508920"/>
+            <a:ext cx="9070200" cy="3508200"/>
           </a:xfrm>
           <a:prstGeom prst="rect">
             <a:avLst/>
@@ -2382,7 +2383,7 @@
         <p:spPr>
           <a:xfrm>
             <a:off x="504000" y="5130000"/>
-            <a:ext cx="2338920" cy="242640"/>
+            <a:ext cx="2338200" cy="242640"/>
           </a:xfrm>
           <a:prstGeom prst="rect">
             <a:avLst/>
@@ -2460,7 +2461,7 @@
         <p:spPr>
           <a:xfrm>
             <a:off x="3420000" y="5130000"/>
-            <a:ext cx="3238920" cy="242640"/>
+            <a:ext cx="3238200" cy="242640"/>
           </a:xfrm>
           <a:prstGeom prst="rect">
             <a:avLst/>
@@ -2538,7 +2539,7 @@
         <p:spPr>
           <a:xfrm>
             <a:off x="7236000" y="5130000"/>
-            <a:ext cx="2338920" cy="213840"/>
+            <a:ext cx="2338200" cy="213840"/>
           </a:xfrm>
           <a:prstGeom prst="rect">
             <a:avLst/>
@@ -2581,7 +2582,7 @@
                 <a:tab algn="l" pos="0"/>
               </a:tabLst>
             </a:pPr>
-            <a:fld id="{291CC93D-5EB4-45A4-A0F6-11D0BA5EDF06}" type="slidenum">
+            <a:fld id="{4C0E73E9-2A01-4B91-A8C9-CF252D9E8EF2}" type="slidenum">
               <a:rPr b="0" lang="ru-RU" sz="1400" strike="noStrike" u="none">
                 <a:solidFill>
                   <a:srgbClr val="484848"/>
@@ -2633,8 +2634,8 @@
         </p:nvSpPr>
         <p:spPr>
           <a:xfrm flipV="1">
-            <a:off x="0" y="-1440"/>
-            <a:ext cx="10078920" cy="178920"/>
+            <a:off x="0" y="-2160"/>
+            <a:ext cx="10078200" cy="178200"/>
           </a:xfrm>
           <a:prstGeom prst="rect">
             <a:avLst/>
@@ -2697,7 +2698,7 @@
         <p:spPr>
           <a:xfrm>
             <a:off x="504000" y="270000"/>
-            <a:ext cx="9070920" cy="988920"/>
+            <a:ext cx="9070200" cy="988200"/>
           </a:xfrm>
           <a:prstGeom prst="rect">
             <a:avLst/>
@@ -2756,7 +2757,7 @@
         <p:spPr>
           <a:xfrm>
             <a:off x="504000" y="1440000"/>
-            <a:ext cx="9070920" cy="3688920"/>
+            <a:ext cx="9070200" cy="3688200"/>
           </a:xfrm>
           <a:prstGeom prst="rect">
             <a:avLst/>
@@ -3030,7 +3031,7 @@
         <p:spPr>
           <a:xfrm>
             <a:off x="504000" y="5130000"/>
-            <a:ext cx="2338920" cy="242640"/>
+            <a:ext cx="2338200" cy="242640"/>
           </a:xfrm>
           <a:prstGeom prst="rect">
             <a:avLst/>
@@ -3108,7 +3109,7 @@
         <p:spPr>
           <a:xfrm>
             <a:off x="3420000" y="5130000"/>
-            <a:ext cx="3238920" cy="242640"/>
+            <a:ext cx="3238200" cy="242640"/>
           </a:xfrm>
           <a:prstGeom prst="rect">
             <a:avLst/>
@@ -3186,7 +3187,7 @@
         <p:spPr>
           <a:xfrm>
             <a:off x="7236000" y="5130000"/>
-            <a:ext cx="2338920" cy="213840"/>
+            <a:ext cx="2338200" cy="213840"/>
           </a:xfrm>
           <a:prstGeom prst="rect">
             <a:avLst/>
@@ -3229,7 +3230,7 @@
                 <a:tab algn="l" pos="0"/>
               </a:tabLst>
             </a:pPr>
-            <a:fld id="{AB9513BA-0E97-45C8-824C-75CC0F4B9D3E}" type="slidenum">
+            <a:fld id="{0625DB7D-2645-49DA-ADE3-DA95C13DD4AF}" type="slidenum">
               <a:rPr b="0" lang="ru-RU" sz="1400" strike="noStrike" u="none">
                 <a:solidFill>
                   <a:srgbClr val="484848"/>
@@ -3260,7 +3261,7 @@
         <p:spPr>
           <a:xfrm>
             <a:off x="0" y="5580000"/>
-            <a:ext cx="10078920" cy="88920"/>
+            <a:ext cx="10078200" cy="88200"/>
           </a:xfrm>
           <a:prstGeom prst="rect">
             <a:avLst/>
@@ -3375,7 +3376,7 @@
         <p:spPr>
           <a:xfrm>
             <a:off x="504000" y="270000"/>
-            <a:ext cx="9070920" cy="3238920"/>
+            <a:ext cx="9070200" cy="3238200"/>
           </a:xfrm>
           <a:prstGeom prst="rect">
             <a:avLst/>
@@ -3422,7 +3423,7 @@
                 <a:uFillTx/>
                 <a:latin typeface="Noto Sans"/>
               </a:rPr>
-              <a:t>24.06.1925 - </a:t>
+              <a:t>24.06.1925 - ??.02.1980</a:t>
             </a:r>
             <a:endParaRPr b="0" lang="ru-RU" sz="6000" strike="noStrike" u="none">
               <a:solidFill>
@@ -3448,7 +3449,7 @@
         <p:spPr>
           <a:xfrm>
             <a:off x="504000" y="3870000"/>
-            <a:ext cx="9070920" cy="1248480"/>
+            <a:ext cx="9070200" cy="1249200"/>
           </a:xfrm>
           <a:prstGeom prst="rect">
             <a:avLst/>
@@ -3537,7 +3538,7 @@
         <p:spPr>
           <a:xfrm>
             <a:off x="504000" y="90000"/>
-            <a:ext cx="9070920" cy="988920"/>
+            <a:ext cx="9070200" cy="988200"/>
           </a:xfrm>
           <a:prstGeom prst="rect">
             <a:avLst/>
@@ -3596,7 +3597,7 @@
         <p:spPr>
           <a:xfrm>
             <a:off x="538200" y="1440000"/>
-            <a:ext cx="5220720" cy="3508920"/>
+            <a:ext cx="5220000" cy="3885480"/>
           </a:xfrm>
           <a:prstGeom prst="rect">
             <a:avLst/>
@@ -3608,7 +3609,7 @@
         </p:spPr>
         <p:txBody>
           <a:bodyPr lIns="0" rIns="0" tIns="0" bIns="0" anchor="t">
-            <a:normAutofit/>
+            <a:normAutofit fontScale="92500" lnSpcReduction="9999"/>
           </a:bodyPr>
           <a:p>
             <a:pPr marL="432000" indent="-324000">
@@ -3626,7 +3627,7 @@
               <a:buChar char=""/>
             </a:pPr>
             <a:r>
-              <a:rPr b="1" lang="ru-RU" sz="2400" strike="noStrike" u="none">
+              <a:rPr b="1" lang="ru-RU" sz="2800" strike="noStrike" u="none">
                 <a:solidFill>
                   <a:srgbClr val="000000"/>
                 </a:solidFill>
@@ -3637,7 +3638,7 @@
               <a:t>Старший сержант</a:t>
             </a:r>
             <a:r>
-              <a:rPr b="0" lang="ru-RU" sz="2400" strike="noStrike" u="none">
+              <a:rPr b="0" lang="ru-RU" sz="2800" strike="noStrike" u="none">
                 <a:solidFill>
                   <a:srgbClr val="000000"/>
                 </a:solidFill>
@@ -3647,7 +3648,7 @@
               </a:rPr>
               <a:t> технической службы</a:t>
             </a:r>
-            <a:endParaRPr b="0" lang="ru-RU" sz="2400" strike="noStrike" u="none">
+            <a:endParaRPr b="0" lang="ru-RU" sz="2800" strike="noStrike" u="none">
               <a:solidFill>
                 <a:srgbClr val="000000"/>
               </a:solidFill>
@@ -3672,7 +3673,7 @@
               <a:buChar char=""/>
             </a:pPr>
             <a:r>
-              <a:rPr b="1" lang="ru-RU" sz="2400" strike="noStrike" u="none">
+              <a:rPr b="1" lang="ru-RU" sz="2800" strike="noStrike" u="none">
                 <a:solidFill>
                   <a:srgbClr val="000000"/>
                 </a:solidFill>
@@ -3683,7 +3684,7 @@
               <a:t>828 </a:t>
             </a:r>
             <a:r>
-              <a:rPr b="0" lang="ru-RU" sz="2400" strike="noStrike" u="none">
+              <a:rPr b="0" lang="ru-RU" sz="2800" strike="noStrike" u="none">
                 <a:solidFill>
                   <a:srgbClr val="000000"/>
                 </a:solidFill>
@@ -3694,7 +3695,7 @@
               <a:t>штурмовой авиационный полк </a:t>
             </a:r>
             <a:r>
-              <a:rPr b="1" lang="ru-RU" sz="2400" strike="noStrike" u="none">
+              <a:rPr b="1" lang="ru-RU" sz="2800" strike="noStrike" u="none">
                 <a:solidFill>
                   <a:srgbClr val="000000"/>
                 </a:solidFill>
@@ -3705,7 +3706,7 @@
               <a:t>260 </a:t>
             </a:r>
             <a:r>
-              <a:rPr b="0" lang="ru-RU" sz="2400" strike="noStrike" u="none">
+              <a:rPr b="0" lang="ru-RU" sz="2800" strike="noStrike" u="none">
                 <a:solidFill>
                   <a:srgbClr val="000000"/>
                 </a:solidFill>
@@ -3715,7 +3716,7 @@
               </a:rPr>
               <a:t>штурмовой авиационной дивизии</a:t>
             </a:r>
-            <a:endParaRPr b="0" lang="ru-RU" sz="2400" strike="noStrike" u="none">
+            <a:endParaRPr b="0" lang="ru-RU" sz="2800" strike="noStrike" u="none">
               <a:solidFill>
                 <a:srgbClr val="000000"/>
               </a:solidFill>
@@ -3740,7 +3741,7 @@
               <a:buChar char=""/>
             </a:pPr>
             <a:r>
-              <a:rPr b="0" lang="ru-RU" sz="2400" strike="noStrike" u="none">
+              <a:rPr b="0" lang="ru-RU" sz="2800" strike="noStrike" u="none">
                 <a:solidFill>
                   <a:srgbClr val="000000"/>
                 </a:solidFill>
@@ -3748,32 +3749,34 @@
                 <a:uFillTx/>
                 <a:latin typeface="Noto Sans"/>
               </a:rPr>
-              <a:t>Второй Белорусский Фронт</a:t>
-            </a:r>
-            <a:endParaRPr b="0" lang="ru-RU" sz="2400" strike="noStrike" u="none">
-              <a:solidFill>
-                <a:srgbClr val="000000"/>
-              </a:solidFill>
-              <a:effectLst/>
-              <a:uFillTx/>
-              <a:latin typeface="Arial"/>
-            </a:endParaRPr>
-          </a:p>
-          <a:p>
-            <a:pPr marL="432000" indent="0">
+              <a:t>Второй Белорусский, затем Карельский Фронты</a:t>
+            </a:r>
+            <a:endParaRPr b="0" lang="ru-RU" sz="2800" strike="noStrike" u="none">
+              <a:solidFill>
+                <a:srgbClr val="000000"/>
+              </a:solidFill>
+              <a:effectLst/>
+              <a:uFillTx/>
+              <a:latin typeface="Arial"/>
+            </a:endParaRPr>
+          </a:p>
+          <a:p>
+            <a:pPr marL="432000" indent="-324000">
               <a:lnSpc>
                 <a:spcPct val="100000"/>
               </a:lnSpc>
               <a:spcBef>
                 <a:spcPts val="1417"/>
               </a:spcBef>
-              <a:buNone/>
-              <a:tabLst>
-                <a:tab algn="l" pos="0"/>
-              </a:tabLst>
-            </a:pPr>
-            <a:r>
-              <a:rPr b="0" lang="ru-RU" sz="2600" strike="noStrike" u="none">
+              <a:buClr>
+                <a:srgbClr val="000000"/>
+              </a:buClr>
+              <a:buSzPct val="45000"/>
+              <a:buFont typeface="Wingdings" charset="2"/>
+              <a:buChar char=""/>
+            </a:pPr>
+            <a:r>
+              <a:rPr b="0" lang="ru-RU" sz="2800" strike="noStrike" u="none">
                 <a:solidFill>
                   <a:srgbClr val="000000"/>
                 </a:solidFill>
@@ -3781,9 +3784,9 @@
                 <a:uFillTx/>
                 <a:latin typeface="Noto Sans"/>
               </a:rPr>
-              <a:t> </a:t>
-            </a:r>
-            <a:endParaRPr b="0" lang="ru-RU" sz="2600" strike="noStrike" u="none">
+              <a:t>Демобилизован 25.03.1950</a:t>
+            </a:r>
+            <a:endParaRPr b="0" lang="ru-RU" sz="2800" strike="noStrike" u="none">
               <a:solidFill>
                 <a:srgbClr val="000000"/>
               </a:solidFill>
@@ -3807,7 +3810,7 @@
         <p:spPr>
           <a:xfrm>
             <a:off x="6235200" y="1260000"/>
-            <a:ext cx="3123720" cy="4074120"/>
+            <a:ext cx="3123000" cy="4073400"/>
           </a:xfrm>
           <a:prstGeom prst="rect">
             <a:avLst/>
@@ -3861,7 +3864,7 @@
         <p:spPr>
           <a:xfrm>
             <a:off x="504000" y="90000"/>
-            <a:ext cx="9070920" cy="988920"/>
+            <a:ext cx="9070200" cy="988200"/>
           </a:xfrm>
           <a:prstGeom prst="rect">
             <a:avLst/>
@@ -3877,13 +3880,7 @@
           </a:bodyPr>
           <a:p>
             <a:pPr indent="0" algn="ctr">
-              <a:lnSpc>
-                <a:spcPct val="100000"/>
-              </a:lnSpc>
               <a:buNone/>
-              <a:tabLst>
-                <a:tab algn="l" pos="0"/>
-              </a:tabLst>
             </a:pPr>
             <a:r>
               <a:rPr b="0" lang="ru-RU" sz="4400" strike="noStrike" u="none">
@@ -3894,22 +3891,163 @@
                 <a:uFillTx/>
                 <a:latin typeface="Noto Sans"/>
               </a:rPr>
-              <a:t>Награды</a:t>
+              <a:t>Боевой путь</a:t>
             </a:r>
             <a:endParaRPr b="0" lang="ru-RU" sz="4400" strike="noStrike" u="none">
               <a:solidFill>
-                <a:srgbClr val="000000"/>
-              </a:solidFill>
-              <a:effectLst/>
-              <a:uFillTx/>
-              <a:latin typeface="Arial"/>
+                <a:srgbClr val="dbf5f9"/>
+              </a:solidFill>
+              <a:effectLst/>
+              <a:uFillTx/>
+              <a:latin typeface="Noto Sans"/>
+            </a:endParaRPr>
+          </a:p>
+        </p:txBody>
+      </p:sp>
+      <p:sp>
+        <p:nvSpPr>
+          <p:cNvPr id="39" name="PlaceHolder 2"/>
+          <p:cNvSpPr>
+            <a:spLocks noGrp="1"/>
+          </p:cNvSpPr>
+          <p:nvPr>
+            <p:ph/>
+          </p:nvPr>
+        </p:nvSpPr>
+        <p:spPr>
+          <a:xfrm>
+            <a:off x="538200" y="1440000"/>
+            <a:ext cx="5220000" cy="3893760"/>
+          </a:xfrm>
+          <a:prstGeom prst="rect">
+            <a:avLst/>
+          </a:prstGeom>
+          <a:noFill/>
+          <a:ln w="0">
+            <a:noFill/>
+          </a:ln>
+        </p:spPr>
+        <p:txBody>
+          <a:bodyPr lIns="0" rIns="0" tIns="0" bIns="0" anchor="t">
+            <a:normAutofit/>
+          </a:bodyPr>
+          <a:p>
+            <a:pPr marL="432000" indent="-324000">
+              <a:spcBef>
+                <a:spcPts val="1417"/>
+              </a:spcBef>
+              <a:buClr>
+                <a:srgbClr val="000000"/>
+              </a:buClr>
+              <a:buSzPct val="45000"/>
+              <a:buFont typeface="Wingdings" charset="2"/>
+              <a:buChar char=""/>
+            </a:pPr>
+            <a:r>
+              <a:rPr b="0" lang="ru-RU" sz="3200" strike="noStrike" u="none">
+                <a:solidFill>
+                  <a:srgbClr val="000000"/>
+                </a:solidFill>
+                <a:effectLst/>
+                <a:uFillTx/>
+                <a:latin typeface="Noto Sans"/>
+              </a:rPr>
+              <a:t>Петсамо-Киркенесская операция (1944)</a:t>
+            </a:r>
+            <a:endParaRPr b="0" lang="ru-RU" sz="3200" strike="noStrike" u="none">
+              <a:solidFill>
+                <a:srgbClr val="000000"/>
+              </a:solidFill>
+              <a:effectLst/>
+              <a:uFillTx/>
+              <a:latin typeface="Noto Sans"/>
+            </a:endParaRPr>
+          </a:p>
+          <a:p>
+            <a:pPr marL="432000" indent="-324000">
+              <a:spcBef>
+                <a:spcPts val="1417"/>
+              </a:spcBef>
+              <a:buClr>
+                <a:srgbClr val="000000"/>
+              </a:buClr>
+              <a:buSzPct val="45000"/>
+              <a:buFont typeface="Wingdings" charset="2"/>
+              <a:buChar char=""/>
+            </a:pPr>
+            <a:r>
+              <a:rPr b="0" lang="ru-RU" sz="3200" strike="noStrike" u="none">
+                <a:solidFill>
+                  <a:srgbClr val="000000"/>
+                </a:solidFill>
+                <a:effectLst/>
+                <a:uFillTx/>
+                <a:latin typeface="Noto Sans"/>
+              </a:rPr>
+              <a:t>Висло-Одерская операция (1945)</a:t>
+            </a:r>
+            <a:endParaRPr b="0" lang="ru-RU" sz="3200" strike="noStrike" u="none">
+              <a:solidFill>
+                <a:srgbClr val="000000"/>
+              </a:solidFill>
+              <a:effectLst/>
+              <a:uFillTx/>
+              <a:latin typeface="Noto Sans"/>
+            </a:endParaRPr>
+          </a:p>
+          <a:p>
+            <a:pPr marL="432000" indent="-324000">
+              <a:spcBef>
+                <a:spcPts val="1417"/>
+              </a:spcBef>
+              <a:buClr>
+                <a:srgbClr val="000000"/>
+              </a:buClr>
+              <a:buSzPct val="45000"/>
+              <a:buFont typeface="Wingdings" charset="2"/>
+              <a:buChar char=""/>
+            </a:pPr>
+            <a:r>
+              <a:rPr b="0" lang="ru-RU" sz="3200" strike="noStrike" u="none">
+                <a:solidFill>
+                  <a:srgbClr val="000000"/>
+                </a:solidFill>
+                <a:effectLst/>
+                <a:uFillTx/>
+                <a:latin typeface="Noto Sans"/>
+              </a:rPr>
+              <a:t>Штурм Берлина</a:t>
+            </a:r>
+            <a:endParaRPr b="0" lang="ru-RU" sz="3200" strike="noStrike" u="none">
+              <a:solidFill>
+                <a:srgbClr val="000000"/>
+              </a:solidFill>
+              <a:effectLst/>
+              <a:uFillTx/>
+              <a:latin typeface="Noto Sans"/>
+            </a:endParaRPr>
+          </a:p>
+          <a:p>
+            <a:pPr marL="432000" indent="0">
+              <a:spcBef>
+                <a:spcPts val="1417"/>
+              </a:spcBef>
+              <a:buNone/>
+            </a:pPr>
+            <a:endParaRPr b="0" lang="ru-RU" sz="3200" strike="noStrike" u="none">
+              <a:solidFill>
+                <a:srgbClr val="000000"/>
+              </a:solidFill>
+              <a:effectLst/>
+              <a:uFillTx/>
+              <a:latin typeface="Noto Sans"/>
             </a:endParaRPr>
           </a:p>
         </p:txBody>
       </p:sp>
       <p:pic>
         <p:nvPicPr>
-          <p:cNvPr id="39" name="" descr=""/>
+          <p:cNvPr id="40" name="" descr=""/>
           <p:cNvPicPr/>
           <p:nvPr/>
         </p:nvPicPr>
@@ -3919,8 +4057,8 @@
         </p:blipFill>
         <p:spPr>
           <a:xfrm>
-            <a:off x="360000" y="1260360"/>
-            <a:ext cx="1800000" cy="2880000"/>
+            <a:off x="6660000" y="1302480"/>
+            <a:ext cx="2880000" cy="4097520"/>
           </a:xfrm>
           <a:prstGeom prst="rect">
             <a:avLst/>
@@ -3931,199 +4069,6 @@
           </a:ln>
         </p:spPr>
       </p:pic>
-      <p:sp>
-        <p:nvSpPr>
-          <p:cNvPr id="40" name=""/>
-          <p:cNvSpPr/>
-          <p:nvPr/>
-        </p:nvSpPr>
-        <p:spPr>
-          <a:xfrm>
-            <a:off x="3060000" y="2524320"/>
-            <a:ext cx="6840000" cy="1615680"/>
-          </a:xfrm>
-          <a:custGeom>
-            <a:avLst/>
-            <a:gdLst>
-              <a:gd name="textAreaLeft" fmla="*/ 0 w 6840000"/>
-              <a:gd name="textAreaRight" fmla="*/ 6840360 w 6840000"/>
-              <a:gd name="textAreaTop" fmla="*/ 0 h 1615680"/>
-              <a:gd name="textAreaBottom" fmla="*/ 1616040 h 1615680"/>
-            </a:gdLst>
-            <a:ahLst/>
-            <a:cxnLst/>
-            <a:rect l="textAreaLeft" t="textAreaTop" r="textAreaRight" b="textAreaBottom"/>
-            <a:pathLst>
-              <a:path w="19001" h="4489">
-                <a:moveTo>
-                  <a:pt x="0" y="4489"/>
-                </a:moveTo>
-                <a:lnTo>
-                  <a:pt x="0" y="0"/>
-                </a:lnTo>
-                <a:lnTo>
-                  <a:pt x="19001" y="0"/>
-                </a:lnTo>
-                <a:lnTo>
-                  <a:pt x="19001" y="4489"/>
-                </a:lnTo>
-                <a:lnTo>
-                  <a:pt x="0" y="4489"/>
-                </a:lnTo>
-                <a:close/>
-              </a:path>
-            </a:pathLst>
-          </a:custGeom>
-          <a:blipFill rotWithShape="0">
-            <a:blip r:embed="rId2"/>
-            <a:srcRect/>
-            <a:stretch/>
-          </a:blipFill>
-          <a:ln w="0">
-            <a:noFill/>
-          </a:ln>
-        </p:spPr>
-        <p:style>
-          <a:lnRef idx="0"/>
-          <a:fillRef idx="0"/>
-          <a:effectRef idx="0"/>
-          <a:fontRef idx="minor"/>
-        </p:style>
-        <p:txBody>
-          <a:bodyPr lIns="90000" rIns="90000" tIns="45000" bIns="45000" anchor="t" anchorCtr="1">
-            <a:noAutofit/>
-          </a:bodyPr>
-          <a:p>
-            <a:pPr>
-              <a:lnSpc>
-                <a:spcPct val="100000"/>
-              </a:lnSpc>
-            </a:pPr>
-            <a:endParaRPr b="0" lang="ru-RU" sz="1800" strike="noStrike" u="none">
-              <a:solidFill>
-                <a:srgbClr val="000000"/>
-              </a:solidFill>
-              <a:effectLst/>
-              <a:uFillTx/>
-              <a:latin typeface="Arial"/>
-            </a:endParaRPr>
-          </a:p>
-        </p:txBody>
-      </p:sp>
-      <p:sp>
-        <p:nvSpPr>
-          <p:cNvPr id="41" name=""/>
-          <p:cNvSpPr/>
-          <p:nvPr/>
-        </p:nvSpPr>
-        <p:spPr>
-          <a:xfrm>
-            <a:off x="360000" y="4361400"/>
-            <a:ext cx="2159640" cy="637920"/>
-          </a:xfrm>
-          <a:prstGeom prst="rect">
-            <a:avLst/>
-          </a:prstGeom>
-          <a:noFill/>
-          <a:ln w="0">
-            <a:noFill/>
-          </a:ln>
-        </p:spPr>
-        <p:style>
-          <a:lnRef idx="0"/>
-          <a:fillRef idx="0"/>
-          <a:effectRef idx="0"/>
-          <a:fontRef idx="minor"/>
-        </p:style>
-        <p:txBody>
-          <a:bodyPr lIns="90000" rIns="90000" tIns="45000" bIns="45000" anchor="ctr" anchorCtr="1">
-            <a:spAutoFit/>
-          </a:bodyPr>
-          <a:p>
-            <a:pPr algn="ctr">
-              <a:lnSpc>
-                <a:spcPct val="100000"/>
-              </a:lnSpc>
-            </a:pPr>
-            <a:r>
-              <a:rPr b="0" lang="ru-RU" sz="1800" strike="noStrike" u="none">
-                <a:solidFill>
-                  <a:srgbClr val="000000"/>
-                </a:solidFill>
-                <a:effectLst/>
-                <a:uFillTx/>
-                <a:latin typeface="Noto Sans"/>
-              </a:rPr>
-              <a:t>Медаль «За боевые заслуги»</a:t>
-            </a:r>
-            <a:endParaRPr b="0" lang="ru-RU" sz="1800" strike="noStrike" u="none">
-              <a:solidFill>
-                <a:srgbClr val="000000"/>
-              </a:solidFill>
-              <a:effectLst/>
-              <a:uFillTx/>
-              <a:latin typeface="Arial"/>
-            </a:endParaRPr>
-          </a:p>
-        </p:txBody>
-      </p:sp>
-      <p:sp>
-        <p:nvSpPr>
-          <p:cNvPr id="42" name=""/>
-          <p:cNvSpPr/>
-          <p:nvPr/>
-        </p:nvSpPr>
-        <p:spPr>
-          <a:xfrm>
-            <a:off x="3060000" y="4365360"/>
-            <a:ext cx="6840000" cy="365040"/>
-          </a:xfrm>
-          <a:prstGeom prst="rect">
-            <a:avLst/>
-          </a:prstGeom>
-          <a:noFill/>
-          <a:ln w="0">
-            <a:noFill/>
-          </a:ln>
-        </p:spPr>
-        <p:style>
-          <a:lnRef idx="0"/>
-          <a:fillRef idx="0"/>
-          <a:effectRef idx="0"/>
-          <a:fontRef idx="minor"/>
-        </p:style>
-        <p:txBody>
-          <a:bodyPr lIns="90000" rIns="90000" tIns="45000" bIns="45000" anchor="ctr" anchorCtr="1">
-            <a:spAutoFit/>
-          </a:bodyPr>
-          <a:p>
-            <a:pPr algn="ctr">
-              <a:lnSpc>
-                <a:spcPct val="100000"/>
-              </a:lnSpc>
-            </a:pPr>
-            <a:r>
-              <a:rPr b="0" lang="ru-RU" sz="1800" strike="noStrike" u="none">
-                <a:solidFill>
-                  <a:srgbClr val="000000"/>
-                </a:solidFill>
-                <a:effectLst/>
-                <a:uFillTx/>
-                <a:latin typeface="Noto Sans"/>
-              </a:rPr>
-              <a:t>Фрагменты документа о награждении</a:t>
-            </a:r>
-            <a:endParaRPr b="0" lang="ru-RU" sz="1800" strike="noStrike" u="none">
-              <a:solidFill>
-                <a:srgbClr val="000000"/>
-              </a:solidFill>
-              <a:effectLst/>
-              <a:uFillTx/>
-              <a:latin typeface="Arial"/>
-            </a:endParaRPr>
-          </a:p>
-        </p:txBody>
-      </p:sp>
     </p:spTree>
   </p:cSld>
   <mc:AlternateContent>
@@ -4156,7 +4101,7 @@
       </p:grpSpPr>
       <p:sp>
         <p:nvSpPr>
-          <p:cNvPr id="43" name="PlaceHolder 1"/>
+          <p:cNvPr id="41" name="PlaceHolder 1"/>
           <p:cNvSpPr>
             <a:spLocks noGrp="1"/>
           </p:cNvSpPr>
@@ -4167,7 +4112,7 @@
         <p:spPr>
           <a:xfrm>
             <a:off x="504000" y="90000"/>
-            <a:ext cx="9070920" cy="988920"/>
+            <a:ext cx="9070200" cy="988200"/>
           </a:xfrm>
           <a:prstGeom prst="rect">
             <a:avLst/>
@@ -4215,7 +4160,7 @@
       </p:sp>
       <p:pic>
         <p:nvPicPr>
-          <p:cNvPr id="44" name="" descr=""/>
+          <p:cNvPr id="42" name="" descr=""/>
           <p:cNvPicPr/>
           <p:nvPr/>
         </p:nvPicPr>
@@ -4225,8 +4170,8 @@
         </p:blipFill>
         <p:spPr>
           <a:xfrm>
-            <a:off x="540360" y="1262880"/>
-            <a:ext cx="1798920" cy="2879640"/>
+            <a:off x="360000" y="1260360"/>
+            <a:ext cx="1799280" cy="2879280"/>
           </a:xfrm>
           <a:prstGeom prst="rect">
             <a:avLst/>
@@ -4237,64 +4182,96 @@
           </a:ln>
         </p:spPr>
       </p:pic>
-      <p:pic>
-        <p:nvPicPr>
-          <p:cNvPr id="45" name="" descr=""/>
-          <p:cNvPicPr/>
-          <p:nvPr/>
-        </p:nvPicPr>
-        <p:blipFill>
-          <a:blip r:embed="rId2"/>
-          <a:stretch/>
-        </p:blipFill>
-        <p:spPr>
-          <a:xfrm>
-            <a:off x="3240000" y="3706560"/>
-            <a:ext cx="6479280" cy="433080"/>
-          </a:xfrm>
-          <a:prstGeom prst="rect">
-            <a:avLst/>
-          </a:prstGeom>
-          <a:noFill/>
-          <a:ln w="0">
-            <a:noFill/>
-          </a:ln>
-        </p:spPr>
-      </p:pic>
-      <p:pic>
-        <p:nvPicPr>
-          <p:cNvPr id="46" name="" descr=""/>
-          <p:cNvPicPr/>
-          <p:nvPr/>
-        </p:nvPicPr>
-        <p:blipFill>
-          <a:blip r:embed="rId3"/>
-          <a:stretch/>
-        </p:blipFill>
-        <p:spPr>
-          <a:xfrm>
-            <a:off x="3240000" y="1429560"/>
-            <a:ext cx="6479280" cy="2170080"/>
-          </a:xfrm>
-          <a:prstGeom prst="rect">
-            <a:avLst/>
-          </a:prstGeom>
-          <a:noFill/>
-          <a:ln w="0">
-            <a:noFill/>
-          </a:ln>
-        </p:spPr>
-      </p:pic>
       <p:sp>
         <p:nvSpPr>
-          <p:cNvPr id="47" name=""/>
+          <p:cNvPr id="43" name=""/>
           <p:cNvSpPr/>
           <p:nvPr/>
         </p:nvSpPr>
         <p:spPr>
           <a:xfrm>
-            <a:off x="360000" y="4284360"/>
-            <a:ext cx="2160000" cy="1154880"/>
+            <a:off x="3060000" y="2524320"/>
+            <a:ext cx="6839280" cy="1614960"/>
+          </a:xfrm>
+          <a:custGeom>
+            <a:avLst/>
+            <a:gdLst>
+              <a:gd name="textAreaLeft" fmla="*/ 0 w 6839280"/>
+              <a:gd name="textAreaRight" fmla="*/ 6840360 w 6839280"/>
+              <a:gd name="textAreaTop" fmla="*/ 0 h 1614960"/>
+              <a:gd name="textAreaBottom" fmla="*/ 1616040 h 1614960"/>
+            </a:gdLst>
+            <a:ahLst/>
+            <a:cxnLst/>
+            <a:rect l="textAreaLeft" t="textAreaTop" r="textAreaRight" b="textAreaBottom"/>
+            <a:pathLst>
+              <a:path w="19001" h="4489">
+                <a:moveTo>
+                  <a:pt x="0" y="4489"/>
+                </a:moveTo>
+                <a:lnTo>
+                  <a:pt x="0" y="0"/>
+                </a:lnTo>
+                <a:lnTo>
+                  <a:pt x="19001" y="0"/>
+                </a:lnTo>
+                <a:lnTo>
+                  <a:pt x="19001" y="4489"/>
+                </a:lnTo>
+                <a:lnTo>
+                  <a:pt x="0" y="4489"/>
+                </a:lnTo>
+                <a:close/>
+              </a:path>
+            </a:pathLst>
+          </a:custGeom>
+          <a:blipFill rotWithShape="0">
+            <a:blip r:embed="rId2"/>
+            <a:srcRect/>
+            <a:stretch/>
+          </a:blipFill>
+          <a:ln w="0">
+            <a:noFill/>
+          </a:ln>
+        </p:spPr>
+        <p:style>
+          <a:lnRef idx="0"/>
+          <a:fillRef idx="0"/>
+          <a:effectRef idx="0"/>
+          <a:fontRef idx="minor"/>
+        </p:style>
+        <p:txBody>
+          <a:bodyPr lIns="90000" rIns="90000" tIns="45000" bIns="45000" anchor="t" anchorCtr="1">
+            <a:noAutofit/>
+          </a:bodyPr>
+          <a:p>
+            <a:pPr>
+              <a:lnSpc>
+                <a:spcPct val="100000"/>
+              </a:lnSpc>
+            </a:pPr>
+            <a:endParaRPr b="0" lang="ru-RU" sz="1800" strike="noStrike" u="none">
+              <a:solidFill>
+                <a:srgbClr val="000000"/>
+              </a:solidFill>
+              <a:effectLst/>
+              <a:uFillTx/>
+              <a:latin typeface="Arial"/>
+              <a:ea typeface="DejaVu Sans"/>
+            </a:endParaRPr>
+          </a:p>
+        </p:txBody>
+      </p:sp>
+      <p:sp>
+        <p:nvSpPr>
+          <p:cNvPr id="44" name=""/>
+          <p:cNvSpPr/>
+          <p:nvPr/>
+        </p:nvSpPr>
+        <p:spPr>
+          <a:xfrm>
+            <a:off x="360000" y="4361400"/>
+            <a:ext cx="2158920" cy="637920"/>
           </a:xfrm>
           <a:prstGeom prst="rect">
             <a:avLst/>
@@ -4319,25 +4296,20 @@
               <a:lnSpc>
                 <a:spcPct val="100000"/>
               </a:lnSpc>
-              <a:spcBef>
-                <a:spcPts val="1191"/>
-              </a:spcBef>
-              <a:spcAft>
-                <a:spcPts val="992"/>
-              </a:spcAft>
-            </a:pPr>
-            <a:r>
-              <a:rPr b="0" lang="ru-RU" sz="1400" strike="noStrike" u="none">
+            </a:pPr>
+            <a:r>
+              <a:rPr b="0" lang="ru-RU" sz="1800" strike="noStrike" u="none">
                 <a:solidFill>
                   <a:srgbClr val="000000"/>
                 </a:solidFill>
                 <a:effectLst/>
                 <a:uFillTx/>
                 <a:latin typeface="Noto Sans"/>
-              </a:rPr>
-              <a:t>Медаль «За победу над Германией в Великой Отечественной войне 1941–1945 гг.» </a:t>
-            </a:r>
-            <a:endParaRPr b="0" lang="ru-RU" sz="1400" strike="noStrike" u="none">
+                <a:ea typeface="DejaVu Sans"/>
+              </a:rPr>
+              <a:t>Медаль «За боевые заслуги»</a:t>
+            </a:r>
+            <a:endParaRPr b="0" lang="ru-RU" sz="1800" strike="noStrike" u="none">
               <a:solidFill>
                 <a:srgbClr val="000000"/>
               </a:solidFill>
@@ -4350,14 +4322,14 @@
       </p:sp>
       <p:sp>
         <p:nvSpPr>
-          <p:cNvPr id="48" name=""/>
+          <p:cNvPr id="45" name=""/>
           <p:cNvSpPr/>
           <p:nvPr/>
         </p:nvSpPr>
         <p:spPr>
           <a:xfrm>
-            <a:off x="3240360" y="4322880"/>
-            <a:ext cx="6479640" cy="1076760"/>
+            <a:off x="3060000" y="4365360"/>
+            <a:ext cx="6839280" cy="364320"/>
           </a:xfrm>
           <a:prstGeom prst="rect">
             <a:avLst/>
@@ -4391,6 +4363,7 @@
                 <a:effectLst/>
                 <a:uFillTx/>
                 <a:latin typeface="Noto Sans"/>
+                <a:ea typeface="DejaVu Sans"/>
               </a:rPr>
               <a:t>Фрагменты документа о награждении</a:t>
             </a:r>
@@ -4437,7 +4410,7 @@
       </p:grpSpPr>
       <p:sp>
         <p:nvSpPr>
-          <p:cNvPr id="49" name="PlaceHolder 1"/>
+          <p:cNvPr id="46" name="PlaceHolder 1"/>
           <p:cNvSpPr>
             <a:spLocks noGrp="1"/>
           </p:cNvSpPr>
@@ -4448,7 +4421,290 @@
         <p:spPr>
           <a:xfrm>
             <a:off x="504000" y="90000"/>
-            <a:ext cx="9070920" cy="988920"/>
+            <a:ext cx="9070200" cy="988200"/>
+          </a:xfrm>
+          <a:prstGeom prst="rect">
+            <a:avLst/>
+          </a:prstGeom>
+          <a:noFill/>
+          <a:ln w="0">
+            <a:noFill/>
+          </a:ln>
+        </p:spPr>
+        <p:txBody>
+          <a:bodyPr lIns="0" rIns="0" tIns="0" bIns="0" anchor="ctr">
+            <a:normAutofit/>
+          </a:bodyPr>
+          <a:p>
+            <a:pPr indent="0" algn="ctr">
+              <a:lnSpc>
+                <a:spcPct val="100000"/>
+              </a:lnSpc>
+              <a:buNone/>
+              <a:tabLst>
+                <a:tab algn="l" pos="0"/>
+              </a:tabLst>
+            </a:pPr>
+            <a:r>
+              <a:rPr b="0" lang="ru-RU" sz="4400" strike="noStrike" u="none">
+                <a:solidFill>
+                  <a:srgbClr val="dbf5f9"/>
+                </a:solidFill>
+                <a:effectLst/>
+                <a:uFillTx/>
+                <a:latin typeface="Noto Sans"/>
+              </a:rPr>
+              <a:t>Награды</a:t>
+            </a:r>
+            <a:endParaRPr b="0" lang="ru-RU" sz="4400" strike="noStrike" u="none">
+              <a:solidFill>
+                <a:srgbClr val="000000"/>
+              </a:solidFill>
+              <a:effectLst/>
+              <a:uFillTx/>
+              <a:latin typeface="Arial"/>
+            </a:endParaRPr>
+          </a:p>
+        </p:txBody>
+      </p:sp>
+      <p:pic>
+        <p:nvPicPr>
+          <p:cNvPr id="47" name="" descr=""/>
+          <p:cNvPicPr/>
+          <p:nvPr/>
+        </p:nvPicPr>
+        <p:blipFill>
+          <a:blip r:embed="rId1"/>
+          <a:stretch/>
+        </p:blipFill>
+        <p:spPr>
+          <a:xfrm>
+            <a:off x="540360" y="1262880"/>
+            <a:ext cx="1798200" cy="2878920"/>
+          </a:xfrm>
+          <a:prstGeom prst="rect">
+            <a:avLst/>
+          </a:prstGeom>
+          <a:noFill/>
+          <a:ln w="0">
+            <a:noFill/>
+          </a:ln>
+        </p:spPr>
+      </p:pic>
+      <p:pic>
+        <p:nvPicPr>
+          <p:cNvPr id="48" name="" descr=""/>
+          <p:cNvPicPr/>
+          <p:nvPr/>
+        </p:nvPicPr>
+        <p:blipFill>
+          <a:blip r:embed="rId2"/>
+          <a:stretch/>
+        </p:blipFill>
+        <p:spPr>
+          <a:xfrm>
+            <a:off x="3240000" y="3706560"/>
+            <a:ext cx="6478560" cy="432360"/>
+          </a:xfrm>
+          <a:prstGeom prst="rect">
+            <a:avLst/>
+          </a:prstGeom>
+          <a:noFill/>
+          <a:ln w="0">
+            <a:noFill/>
+          </a:ln>
+        </p:spPr>
+      </p:pic>
+      <p:pic>
+        <p:nvPicPr>
+          <p:cNvPr id="49" name="" descr=""/>
+          <p:cNvPicPr/>
+          <p:nvPr/>
+        </p:nvPicPr>
+        <p:blipFill>
+          <a:blip r:embed="rId3"/>
+          <a:stretch/>
+        </p:blipFill>
+        <p:spPr>
+          <a:xfrm>
+            <a:off x="3240000" y="1429560"/>
+            <a:ext cx="6478560" cy="2169360"/>
+          </a:xfrm>
+          <a:prstGeom prst="rect">
+            <a:avLst/>
+          </a:prstGeom>
+          <a:noFill/>
+          <a:ln w="0">
+            <a:noFill/>
+          </a:ln>
+        </p:spPr>
+      </p:pic>
+      <p:sp>
+        <p:nvSpPr>
+          <p:cNvPr id="50" name=""/>
+          <p:cNvSpPr/>
+          <p:nvPr/>
+        </p:nvSpPr>
+        <p:spPr>
+          <a:xfrm>
+            <a:off x="360000" y="4284360"/>
+            <a:ext cx="2159280" cy="1154160"/>
+          </a:xfrm>
+          <a:prstGeom prst="rect">
+            <a:avLst/>
+          </a:prstGeom>
+          <a:noFill/>
+          <a:ln w="0">
+            <a:noFill/>
+          </a:ln>
+        </p:spPr>
+        <p:style>
+          <a:lnRef idx="0"/>
+          <a:fillRef idx="0"/>
+          <a:effectRef idx="0"/>
+          <a:fontRef idx="minor"/>
+        </p:style>
+        <p:txBody>
+          <a:bodyPr lIns="90000" rIns="90000" tIns="45000" bIns="45000" anchor="ctr" anchorCtr="1">
+            <a:spAutoFit/>
+          </a:bodyPr>
+          <a:p>
+            <a:pPr algn="ctr">
+              <a:lnSpc>
+                <a:spcPct val="100000"/>
+              </a:lnSpc>
+              <a:spcBef>
+                <a:spcPts val="1191"/>
+              </a:spcBef>
+              <a:spcAft>
+                <a:spcPts val="992"/>
+              </a:spcAft>
+            </a:pPr>
+            <a:r>
+              <a:rPr b="0" lang="ru-RU" sz="1400" strike="noStrike" u="none">
+                <a:solidFill>
+                  <a:srgbClr val="000000"/>
+                </a:solidFill>
+                <a:effectLst/>
+                <a:uFillTx/>
+                <a:latin typeface="Noto Sans"/>
+                <a:ea typeface="DejaVu Sans"/>
+              </a:rPr>
+              <a:t>Медаль «За победу над Германией в Великой Отечественной войне 1941–1945 гг.» </a:t>
+            </a:r>
+            <a:endParaRPr b="0" lang="ru-RU" sz="1400" strike="noStrike" u="none">
+              <a:solidFill>
+                <a:srgbClr val="000000"/>
+              </a:solidFill>
+              <a:effectLst/>
+              <a:uFillTx/>
+              <a:latin typeface="Arial"/>
+            </a:endParaRPr>
+          </a:p>
+        </p:txBody>
+      </p:sp>
+      <p:sp>
+        <p:nvSpPr>
+          <p:cNvPr id="51" name=""/>
+          <p:cNvSpPr/>
+          <p:nvPr/>
+        </p:nvSpPr>
+        <p:spPr>
+          <a:xfrm>
+            <a:off x="3240360" y="4322880"/>
+            <a:ext cx="6478920" cy="1076040"/>
+          </a:xfrm>
+          <a:prstGeom prst="rect">
+            <a:avLst/>
+          </a:prstGeom>
+          <a:noFill/>
+          <a:ln w="0">
+            <a:noFill/>
+          </a:ln>
+        </p:spPr>
+        <p:style>
+          <a:lnRef idx="0"/>
+          <a:fillRef idx="0"/>
+          <a:effectRef idx="0"/>
+          <a:fontRef idx="minor"/>
+        </p:style>
+        <p:txBody>
+          <a:bodyPr lIns="90000" rIns="90000" tIns="45000" bIns="45000" anchor="ctr" anchorCtr="1">
+            <a:spAutoFit/>
+          </a:bodyPr>
+          <a:p>
+            <a:pPr algn="ctr">
+              <a:lnSpc>
+                <a:spcPct val="100000"/>
+              </a:lnSpc>
+            </a:pPr>
+            <a:r>
+              <a:rPr b="0" lang="ru-RU" sz="1800" strike="noStrike" u="none">
+                <a:solidFill>
+                  <a:srgbClr val="000000"/>
+                </a:solidFill>
+                <a:effectLst/>
+                <a:uFillTx/>
+                <a:latin typeface="Noto Sans"/>
+                <a:ea typeface="DejaVu Sans"/>
+              </a:rPr>
+              <a:t>Фрагменты документа о награждении</a:t>
+            </a:r>
+            <a:endParaRPr b="0" lang="ru-RU" sz="1800" strike="noStrike" u="none">
+              <a:solidFill>
+                <a:srgbClr val="000000"/>
+              </a:solidFill>
+              <a:effectLst/>
+              <a:uFillTx/>
+              <a:latin typeface="Arial"/>
+            </a:endParaRPr>
+          </a:p>
+        </p:txBody>
+      </p:sp>
+    </p:spTree>
+  </p:cSld>
+  <mc:AlternateContent>
+    <mc:Choice Requires="p14">
+      <p:transition spd="slow" p14:dur="2000"/>
+    </mc:Choice>
+    <mc:Fallback>
+      <p:transition spd="slow"/>
+    </mc:Fallback>
+  </mc:AlternateContent>
+</p:sld>
+</file>
+
+<file path=ppt/slides/slide6.xml><?xml version="1.0" encoding="utf-8"?>
+<p:sld xmlns:a="http://schemas.openxmlformats.org/drawingml/2006/main" xmlns:p="http://schemas.openxmlformats.org/presentationml/2006/main" xmlns:r="http://schemas.openxmlformats.org/officeDocument/2006/relationships" xmlns:p14="http://schemas.microsoft.com/office/powerpoint/2010/main" xmlns:p15="http://schemas.microsoft.com/office/powerpoint/2012/main" xmlns:mc="http://schemas.openxmlformats.org/markup-compatibility/2006">
+  <p:cSld>
+    <p:spTree>
+      <p:nvGrpSpPr>
+        <p:cNvPr id="1" name=""/>
+        <p:cNvGrpSpPr/>
+        <p:nvPr/>
+      </p:nvGrpSpPr>
+      <p:grpSpPr>
+        <a:xfrm>
+          <a:off x="0" y="0"/>
+          <a:ext cx="0" cy="0"/>
+          <a:chOff x="0" y="0"/>
+          <a:chExt cx="0" cy="0"/>
+        </a:xfrm>
+      </p:grpSpPr>
+      <p:sp>
+        <p:nvSpPr>
+          <p:cNvPr id="52" name="PlaceHolder 1"/>
+          <p:cNvSpPr>
+            <a:spLocks noGrp="1"/>
+          </p:cNvSpPr>
+          <p:nvPr>
+            <p:ph type="title"/>
+          </p:nvPr>
+        </p:nvSpPr>
+        <p:spPr>
+          <a:xfrm>
+            <a:off x="504000" y="89280"/>
+            <a:ext cx="9070200" cy="989640"/>
           </a:xfrm>
           <a:prstGeom prst="rect">
             <a:avLst/>
@@ -4464,7 +4720,13 @@
           </a:bodyPr>
           <a:p>
             <a:pPr indent="0" algn="ctr">
+              <a:lnSpc>
+                <a:spcPct val="100000"/>
+              </a:lnSpc>
               <a:buNone/>
+              <a:tabLst>
+                <a:tab algn="l" pos="0"/>
+              </a:tabLst>
             </a:pPr>
             <a:r>
               <a:rPr b="0" lang="ru-RU" sz="4400" strike="noStrike" u="none">
@@ -4479,18 +4741,18 @@
             </a:r>
             <a:endParaRPr b="0" lang="ru-RU" sz="4400" strike="noStrike" u="none">
               <a:solidFill>
-                <a:srgbClr val="dbf5f9"/>
-              </a:solidFill>
-              <a:effectLst/>
-              <a:uFillTx/>
-              <a:latin typeface="Noto Sans"/>
+                <a:srgbClr val="000000"/>
+              </a:solidFill>
+              <a:effectLst/>
+              <a:uFillTx/>
+              <a:latin typeface="Arial"/>
             </a:endParaRPr>
           </a:p>
         </p:txBody>
       </p:sp>
       <p:sp>
         <p:nvSpPr>
-          <p:cNvPr id="50" name="PlaceHolder 2"/>
+          <p:cNvPr id="53" name="PlaceHolder 2"/>
           <p:cNvSpPr>
             <a:spLocks noGrp="1"/>
           </p:cNvSpPr>
@@ -4500,8 +4762,8 @@
         </p:nvSpPr>
         <p:spPr>
           <a:xfrm>
-            <a:off x="504000" y="1440000"/>
-            <a:ext cx="9070920" cy="3508920"/>
+            <a:off x="504000" y="1476000"/>
+            <a:ext cx="9070200" cy="3852360"/>
           </a:xfrm>
           <a:prstGeom prst="rect">
             <a:avLst/>
@@ -4513,7 +4775,7 @@
         </p:spPr>
         <p:txBody>
           <a:bodyPr lIns="0" rIns="0" tIns="0" bIns="0" anchor="t">
-            <a:normAutofit/>
+            <a:noAutofit/>
           </a:bodyPr>
           <a:p>
             <a:pPr marL="432000" indent="-324000">
@@ -4523,39 +4785,106 @@
               <a:buClr>
                 <a:srgbClr val="000000"/>
               </a:buClr>
-              <a:buSzPct val="45000"/>
-              <a:buFont typeface="Wingdings" charset="2"/>
-              <a:buChar char=""/>
-            </a:pPr>
-            <a:r>
-              <a:rPr b="0" lang="ru-RU" sz="3200" strike="noStrike" u="none">
+              <a:buFont typeface="OpenSymbol"/>
+              <a:buAutoNum type="arabicPeriod"/>
+            </a:pPr>
+            <a:r>
+              <a:rPr b="0" lang="ru-RU" sz="2800" strike="noStrike" u="none">
                 <a:solidFill>
                   <a:srgbClr val="000000"/>
                 </a:solidFill>
                 <a:effectLst/>
                 <a:uFillTx/>
-                <a:latin typeface="Noto Sans"/>
-              </a:rPr>
-              <a:t>https://podvignaroda.ru/</a:t>
-            </a:r>
-            <a:endParaRPr b="0" lang="ru-RU" sz="3200" strike="noStrike" u="none">
-              <a:solidFill>
-                <a:srgbClr val="000000"/>
-              </a:solidFill>
-              <a:effectLst/>
-              <a:uFillTx/>
-              <a:latin typeface="Arial"/>
-            </a:endParaRPr>
-          </a:p>
-          <a:p>
-            <a:pPr marL="432000" indent="0">
+                <a:latin typeface="Arial"/>
+              </a:rPr>
+              <a:t> Сайт «Подвиг Народа»</a:t>
+            </a:r>
+            <a:endParaRPr b="0" lang="ru-RU" sz="2800" strike="noStrike" u="none">
+              <a:solidFill>
+                <a:srgbClr val="000000"/>
+              </a:solidFill>
+              <a:effectLst/>
+              <a:uFillTx/>
+              <a:latin typeface="Arial"/>
+            </a:endParaRPr>
+          </a:p>
+          <a:p>
+            <a:pPr lvl="1" marL="864000" indent="-324000">
+              <a:spcBef>
+                <a:spcPts val="1134"/>
+              </a:spcBef>
+              <a:buClr>
+                <a:srgbClr val="000000"/>
+              </a:buClr>
+              <a:buFont typeface="OpenSymbol"/>
+              <a:buAutoNum type="arabicPeriod"/>
+            </a:pPr>
+            <a:r>
+              <a:rPr b="0" lang="ru-RU" sz="2600" strike="noStrike" u="none">
+                <a:solidFill>
+                  <a:srgbClr val="000000"/>
+                </a:solidFill>
+                <a:effectLst/>
+                <a:uFillTx/>
+                <a:latin typeface="Arial"/>
+                <a:hlinkClick r:id="rId1"/>
+              </a:rPr>
+              <a:t>https://podvignaroda.ru/?#id=37715866&amp;tab=navDetailManAward</a:t>
+            </a:r>
+            <a:endParaRPr b="0" lang="ru-RU" sz="2600" strike="noStrike" u="none">
+              <a:solidFill>
+                <a:srgbClr val="000000"/>
+              </a:solidFill>
+              <a:effectLst/>
+              <a:uFillTx/>
+              <a:latin typeface="Arial"/>
+            </a:endParaRPr>
+          </a:p>
+          <a:p>
+            <a:pPr lvl="1" marL="864000" indent="-324000">
+              <a:spcBef>
+                <a:spcPts val="1134"/>
+              </a:spcBef>
+              <a:buClr>
+                <a:srgbClr val="000000"/>
+              </a:buClr>
+              <a:buFont typeface="OpenSymbol"/>
+              <a:buAutoNum type="arabicPeriod"/>
+            </a:pPr>
+            <a:r>
+              <a:rPr b="0" lang="ru-RU" sz="2600" strike="noStrike" u="none">
+                <a:solidFill>
+                  <a:srgbClr val="000000"/>
+                </a:solidFill>
+                <a:effectLst/>
+                <a:uFillTx/>
+                <a:latin typeface="Arial"/>
+                <a:hlinkClick r:id="rId2"/>
+              </a:rPr>
+              <a:t>https://podvignaroda.ru/?#id=1536573241&amp;tab=navDetailManAward</a:t>
+            </a:r>
+            <a:endParaRPr b="0" lang="ru-RU" sz="2600" strike="noStrike" u="none">
+              <a:solidFill>
+                <a:srgbClr val="000000"/>
+              </a:solidFill>
+              <a:effectLst/>
+              <a:uFillTx/>
+              <a:latin typeface="Arial"/>
+            </a:endParaRPr>
+          </a:p>
+          <a:p>
+            <a:pPr marL="432000" indent="-324000">
               <a:spcBef>
                 <a:spcPts val="1417"/>
               </a:spcBef>
-              <a:buNone/>
-            </a:pPr>
-            <a:r>
-              <a:rPr b="0" lang="ru-RU" sz="3200" strike="noStrike" u="none">
+              <a:buClr>
+                <a:srgbClr val="000000"/>
+              </a:buClr>
+              <a:buFont typeface="OpenSymbol"/>
+              <a:buAutoNum type="arabicPeriod"/>
+            </a:pPr>
+            <a:r>
+              <a:rPr b="0" lang="ru-RU" sz="2800" strike="noStrike" u="none">
                 <a:solidFill>
                   <a:srgbClr val="000000"/>
                 </a:solidFill>
@@ -4563,9 +4892,40 @@
                 <a:uFillTx/>
                 <a:latin typeface="Arial"/>
               </a:rPr>
-              <a:t> </a:t>
-            </a:r>
-            <a:endParaRPr b="0" lang="ru-RU" sz="3200" strike="noStrike" u="none">
+              <a:t> Личный архив (единственная фотография)</a:t>
+            </a:r>
+            <a:endParaRPr b="0" lang="ru-RU" sz="2800" strike="noStrike" u="none">
+              <a:solidFill>
+                <a:srgbClr val="000000"/>
+              </a:solidFill>
+              <a:effectLst/>
+              <a:uFillTx/>
+              <a:latin typeface="Arial"/>
+            </a:endParaRPr>
+          </a:p>
+          <a:p>
+            <a:pPr marL="432000" indent="-324000">
+              <a:spcBef>
+                <a:spcPts val="1417"/>
+              </a:spcBef>
+              <a:buClr>
+                <a:srgbClr val="000000"/>
+              </a:buClr>
+              <a:buFont typeface="OpenSymbol"/>
+              <a:buAutoNum type="arabicPeriod"/>
+            </a:pPr>
+            <a:r>
+              <a:rPr b="0" lang="ru-RU" sz="2800" strike="noStrike" u="none">
+                <a:solidFill>
+                  <a:srgbClr val="000000"/>
+                </a:solidFill>
+                <a:effectLst/>
+                <a:uFillTx/>
+                <a:latin typeface="Arial"/>
+              </a:rPr>
+              <a:t>Сайт «Память народа»: https://pamyat-naroda.ru/ё</a:t>
+            </a:r>
+            <a:endParaRPr b="0" lang="ru-RU" sz="2800" strike="noStrike" u="none">
               <a:solidFill>
                 <a:srgbClr val="000000"/>
               </a:solidFill>
